--- a/QueLess_Presentation.pptx
+++ b/QueLess_Presentation.pptx
@@ -12,9 +12,6 @@
     <p:sldId id="260" r:id="rId12"/>
     <p:sldId id="261" r:id="rId13"/>
     <p:sldId id="262" r:id="rId14"/>
-    <p:sldId id="263" r:id="rId15"/>
-    <p:sldId id="264" r:id="rId16"/>
-    <p:sldId id="265" r:id="rId17"/>
   </p:sldIdLst>
   <p:sldSz cx="12191695" cy="6858000" type="screen4x3"/>
   <p:notesSz cx="6858000" cy="9144000"/>
@@ -511,77 +508,7 @@
           <a:lstStyle/>
           <a:p>
             <a:r>
-              <a:t>Good morning/afternoon everyone. Today we present QueLess, a modern digital solution designed to transform waiting lines from frustrating physical bottlenecks into seamless, remote experiences.</a:t>
-            </a:r>
-          </a:p>
-        </p:txBody>
-      </p:sp>
-      <p:sp>
-        <p:nvSpPr>
-          <p:cNvPr id="4" name="Slide Number Placeholder 3"/>
-          <p:cNvSpPr>
-            <a:spLocks noGrp="1"/>
-          </p:cNvSpPr>
-          <p:nvPr>
-            <p:ph type="sldNum" idx="5" sz="quarter"/>
-          </p:nvPr>
-        </p:nvSpPr>
-        <p:spPr/>
-      </p:sp>
-    </p:spTree>
-  </p:cSld>
-  <p:clrMapOvr>
-    <a:masterClrMapping/>
-  </p:clrMapOvr>
-</p:notes>
-</file>
-
-<file path=ppt/notesSlides/notesSlide10.xml><?xml version="1.0" encoding="utf-8"?>
-<p:notes xmlns:a="http://schemas.openxmlformats.org/drawingml/2006/main" xmlns:p="http://schemas.openxmlformats.org/presentationml/2006/main" xmlns:r="http://schemas.openxmlformats.org/officeDocument/2006/relationships">
-  <p:cSld>
-    <p:spTree>
-      <p:nvGrpSpPr>
-        <p:cNvPr id="1" name=""/>
-        <p:cNvGrpSpPr/>
-        <p:nvPr/>
-      </p:nvGrpSpPr>
-      <p:grpSpPr>
-        <a:xfrm>
-          <a:off x="0" y="0"/>
-          <a:ext cx="0" cy="0"/>
-          <a:chOff x="0" y="0"/>
-          <a:chExt cx="0" cy="0"/>
-        </a:xfrm>
-      </p:grpSpPr>
-      <p:sp>
-        <p:nvSpPr>
-          <p:cNvPr id="2" name="Slide Image Placeholder 1"/>
-          <p:cNvSpPr>
-            <a:spLocks noGrp="1"/>
-          </p:cNvSpPr>
-          <p:nvPr>
-            <p:ph type="sldImg" idx="2"/>
-          </p:nvPr>
-        </p:nvSpPr>
-        <p:spPr/>
-      </p:sp>
-      <p:sp>
-        <p:nvSpPr>
-          <p:cNvPr id="3" name="Notes Placeholder 2"/>
-          <p:cNvSpPr>
-            <a:spLocks noGrp="1"/>
-          </p:cNvSpPr>
-          <p:nvPr>
-            <p:ph type="body" idx="3" sz="quarter"/>
-          </p:nvPr>
-        </p:nvSpPr>
-        <p:spPr/>
-        <p:txBody>
-          <a:bodyPr/>
-          <a:lstStyle/>
-          <a:p>
-            <a:r>
-              <a:t>QueLess is ready for deployment today and architected to scale tomorrow. Thank you for your time, and we would now love to walk you through a live demonstration and answer any questions.</a:t>
+              <a:t>Welcome. Today we present QueLess — a smart virtual queue management system eliminating physical waiting lines for clinics, banks, salons, and government service centers.</a:t>
             </a:r>
           </a:p>
         </p:txBody>
@@ -651,7 +578,7 @@
           <a:lstStyle/>
           <a:p>
             <a:r>
-              <a:t>Traditional waiting rooms create friction on both sides. Customers feel trapped without knowing when they will be called, while staff are overwhelmed trying to manually orchestrate walk-ins and appointments.</a:t>
+              <a:t>Physical queuing causes economic damage, psychological anxiety from uncertainty, infection risk in crowded health lobbies, and staff burnout from constant manual tracking and verbal inquiries.</a:t>
             </a:r>
           </a:p>
         </p:txBody>
@@ -721,7 +648,7 @@
           <a:lstStyle/>
           <a:p>
             <a:r>
-              <a:t>Why do we need a solution like QueLess? Because modern users expect remote access and transparency. When businesses digitize queue tracking, physical congestion disappears, and customer satisfaction surges.</a:t>
+              <a:t>QueLess has three synchronised tiers: a customer mobile web app for remote queuing, a high-velocity staff desk console, and a zero-hardware lobby TV screen with native audio chimes and synthetic voice announcements.</a:t>
             </a:r>
           </a:p>
         </p:txBody>
@@ -791,7 +718,7 @@
           <a:lstStyle/>
           <a:p>
             <a:r>
-              <a:t>QueLess solves the queue crisis by connecting customers and service staff through a unified, synchronized platform. It delivers real-time token tracking for users and complete desk control for businesses.</a:t>
+              <a:t>The journey: discover branch → instant digital token → GPS-aware ETA → approaching alert → multi-modal audio call (TV + chime + voice) → QR scan verification.</a:t>
             </a:r>
           </a:p>
         </p:txBody>
@@ -861,7 +788,7 @@
           <a:lstStyle/>
           <a:p>
             <a:r>
-              <a:t>The workflow is designed for maximum simplicity. Customers can track their queue on mobile while walking nearby, while lobby displays and audio cues ensure no one misses their turn.</a:t>
+              <a:t>Our architecture maps 1:1 to the evaluation syllabus: multi-page SPA routing with React Router, Context API and Zustand-pattern state architecture, reusable FormField components with RFC validation, and comprehensive async loading and error handling.</a:t>
             </a:r>
           </a:p>
         </p:txBody>
@@ -931,7 +858,7 @@
           <a:lstStyle/>
           <a:p>
             <a:r>
-              <a:t>Beyond standard ticketing, QueLess provides high-impact features like lobby TV mode, synthetic voice announcements, and QR verification passes without requiring expensive third-party hardware.</a:t>
+              <a:t>QueLess delivers immediate, measurable ROI: 65% lower perceived wait time, 35% higher counter throughput, 80% fewer repeated reception queries, and zero hardware investment. Industry-agnostic from clinics to government offices.</a:t>
             </a:r>
           </a:p>
         </p:txBody>
@@ -1001,147 +928,7 @@
           <a:lstStyle/>
           <a:p>
             <a:r>
-              <a:t>The system is engineered for zero bloat. By leveraging native browser APIs for voice, sound, and QR generation, the application loads in milliseconds and runs reliably on any device.</a:t>
-            </a:r>
-          </a:p>
-        </p:txBody>
-      </p:sp>
-      <p:sp>
-        <p:nvSpPr>
-          <p:cNvPr id="4" name="Slide Number Placeholder 3"/>
-          <p:cNvSpPr>
-            <a:spLocks noGrp="1"/>
-          </p:cNvSpPr>
-          <p:nvPr>
-            <p:ph type="sldNum" idx="5" sz="quarter"/>
-          </p:nvPr>
-        </p:nvSpPr>
-        <p:spPr/>
-      </p:sp>
-    </p:spTree>
-  </p:cSld>
-  <p:clrMapOvr>
-    <a:masterClrMapping/>
-  </p:clrMapOvr>
-</p:notes>
-</file>
-
-<file path=ppt/notesSlides/notesSlide8.xml><?xml version="1.0" encoding="utf-8"?>
-<p:notes xmlns:a="http://schemas.openxmlformats.org/drawingml/2006/main" xmlns:p="http://schemas.openxmlformats.org/presentationml/2006/main" xmlns:r="http://schemas.openxmlformats.org/officeDocument/2006/relationships">
-  <p:cSld>
-    <p:spTree>
-      <p:nvGrpSpPr>
-        <p:cNvPr id="1" name=""/>
-        <p:cNvGrpSpPr/>
-        <p:nvPr/>
-      </p:nvGrpSpPr>
-      <p:grpSpPr>
-        <a:xfrm>
-          <a:off x="0" y="0"/>
-          <a:ext cx="0" cy="0"/>
-          <a:chOff x="0" y="0"/>
-          <a:chExt cx="0" cy="0"/>
-        </a:xfrm>
-      </p:grpSpPr>
-      <p:sp>
-        <p:nvSpPr>
-          <p:cNvPr id="2" name="Slide Image Placeholder 1"/>
-          <p:cNvSpPr>
-            <a:spLocks noGrp="1"/>
-          </p:cNvSpPr>
-          <p:nvPr>
-            <p:ph type="sldImg" idx="2"/>
-          </p:nvPr>
-        </p:nvSpPr>
-        <p:spPr/>
-      </p:sp>
-      <p:sp>
-        <p:nvSpPr>
-          <p:cNvPr id="3" name="Notes Placeholder 2"/>
-          <p:cNvSpPr>
-            <a:spLocks noGrp="1"/>
-          </p:cNvSpPr>
-          <p:nvPr>
-            <p:ph type="body" idx="3" sz="quarter"/>
-          </p:nvPr>
-        </p:nvSpPr>
-        <p:spPr/>
-        <p:txBody>
-          <a:bodyPr/>
-          <a:lstStyle/>
-          <a:p>
-            <a:r>
-              <a:t>Any business with a waiting room benefits from QueLess. From OPD clinics to busy bank branches and government offices, the flexibility of multi-service queuing fits every industry.</a:t>
-            </a:r>
-          </a:p>
-        </p:txBody>
-      </p:sp>
-      <p:sp>
-        <p:nvSpPr>
-          <p:cNvPr id="4" name="Slide Number Placeholder 3"/>
-          <p:cNvSpPr>
-            <a:spLocks noGrp="1"/>
-          </p:cNvSpPr>
-          <p:nvPr>
-            <p:ph type="sldNum" idx="5" sz="quarter"/>
-          </p:nvPr>
-        </p:nvSpPr>
-        <p:spPr/>
-      </p:sp>
-    </p:spTree>
-  </p:cSld>
-  <p:clrMapOvr>
-    <a:masterClrMapping/>
-  </p:clrMapOvr>
-</p:notes>
-</file>
-
-<file path=ppt/notesSlides/notesSlide9.xml><?xml version="1.0" encoding="utf-8"?>
-<p:notes xmlns:a="http://schemas.openxmlformats.org/drawingml/2006/main" xmlns:p="http://schemas.openxmlformats.org/presentationml/2006/main" xmlns:r="http://schemas.openxmlformats.org/officeDocument/2006/relationships">
-  <p:cSld>
-    <p:spTree>
-      <p:nvGrpSpPr>
-        <p:cNvPr id="1" name=""/>
-        <p:cNvGrpSpPr/>
-        <p:nvPr/>
-      </p:nvGrpSpPr>
-      <p:grpSpPr>
-        <a:xfrm>
-          <a:off x="0" y="0"/>
-          <a:ext cx="0" cy="0"/>
-          <a:chOff x="0" y="0"/>
-          <a:chExt cx="0" cy="0"/>
-        </a:xfrm>
-      </p:grpSpPr>
-      <p:sp>
-        <p:nvSpPr>
-          <p:cNvPr id="2" name="Slide Image Placeholder 1"/>
-          <p:cNvSpPr>
-            <a:spLocks noGrp="1"/>
-          </p:cNvSpPr>
-          <p:nvPr>
-            <p:ph type="sldImg" idx="2"/>
-          </p:nvPr>
-        </p:nvSpPr>
-        <p:spPr/>
-      </p:sp>
-      <p:sp>
-        <p:nvSpPr>
-          <p:cNvPr id="3" name="Notes Placeholder 2"/>
-          <p:cNvSpPr>
-            <a:spLocks noGrp="1"/>
-          </p:cNvSpPr>
-          <p:nvPr>
-            <p:ph type="body" idx="3" sz="quarter"/>
-          </p:nvPr>
-        </p:nvSpPr>
-        <p:spPr/>
-        <p:txBody>
-          <a:bodyPr/>
-          <a:lstStyle/>
-          <a:p>
-            <a:r>
-              <a:t>The return on investment is immediate: customers enjoy a calm, dignified waiting experience, while businesses unlock higher counter efficiency and operational visibility.</a:t>
+              <a:t>QueLess is fully implemented, tested, and production-ready. It pairs technical rigour — atomic concurrency, dual-engine resilience, native browser audio — with a human-crafted polished UI. Thank you, we are ready for questions and live demonstration.</a:t>
             </a:r>
           </a:p>
         </p:txBody>
@@ -4162,7 +3949,7 @@
             <a:avLst/>
           </a:prstGeom>
           <a:solidFill>
-            <a:srgbClr val="0F172A"/>
+            <a:srgbClr val="0B1120"/>
           </a:solidFill>
           <a:ln>
             <a:noFill/>
@@ -4192,20 +3979,20 @@
       </p:sp>
       <p:sp>
         <p:nvSpPr>
-          <p:cNvPr id="3" name="Rounded Rectangle 2"/>
+          <p:cNvPr id="3" name="Rectangle 2"/>
           <p:cNvSpPr/>
           <p:nvPr/>
         </p:nvSpPr>
         <p:spPr>
           <a:xfrm>
-            <a:off x="4206240" y="1645920"/>
-            <a:ext cx="3749039" cy="411480"/>
-          </a:xfrm>
-          <a:prstGeom prst="roundRect">
+            <a:off x="0" y="0"/>
+            <a:ext cx="12191695" cy="54864"/>
+          </a:xfrm>
+          <a:prstGeom prst="rect">
             <a:avLst/>
           </a:prstGeom>
           <a:solidFill>
-            <a:srgbClr val="0F8F83"/>
+            <a:srgbClr val="0D9488"/>
           </a:solidFill>
           <a:ln>
             <a:noFill/>
@@ -4229,141 +4016,31 @@
           <a:bodyPr rtlCol="0" anchor="ctr"/>
           <a:lstStyle/>
           <a:p>
-            <a:pPr algn="ctr">
-              <a:defRPr sz="1100" b="1">
-                <a:solidFill>
-                  <a:srgbClr val="FFFFFF"/>
-                </a:solidFill>
-              </a:defRPr>
-            </a:pPr>
-            <a:r>
-              <a:t>NEXT-GEN QUEUE ORCHESTRATION</a:t>
-            </a:r>
-          </a:p>
-        </p:txBody>
-      </p:sp>
-      <p:sp>
-        <p:nvSpPr>
-          <p:cNvPr id="4" name="TextBox 3"/>
-          <p:cNvSpPr txBox="1"/>
-          <p:nvPr/>
-        </p:nvSpPr>
-        <p:spPr>
-          <a:xfrm>
-            <a:off x="914400" y="2286000"/>
-            <a:ext cx="10360152" cy="1371600"/>
-          </a:xfrm>
-          <a:prstGeom prst="rect">
-            <a:avLst/>
-          </a:prstGeom>
-          <a:noFill/>
-        </p:spPr>
-        <p:txBody>
-          <a:bodyPr wrap="none">
-            <a:spAutoFit/>
-          </a:bodyPr>
-          <a:lstStyle/>
-          <a:p>
-            <a:pPr algn="ctr">
-              <a:defRPr sz="5400" b="1">
-                <a:solidFill>
-                  <a:srgbClr val="FFFFFF"/>
-                </a:solidFill>
-              </a:defRPr>
-            </a:pPr>
-            <a:r>
-              <a:t>QueLess</a:t>
-            </a:r>
-          </a:p>
-          <a:p>
-            <a:pPr algn="ctr">
-              <a:spcBef>
-                <a:spcPts val="1400"/>
-              </a:spcBef>
-              <a:defRPr sz="1600">
-                <a:solidFill>
-                  <a:srgbClr val="94A3B8"/>
-                </a:solidFill>
-              </a:defRPr>
-            </a:pPr>
-            <a:r>
-              <a:t>Eliminating physical waiting lines, empowering businesses, and giving customers their time back.</a:t>
-            </a:r>
-          </a:p>
-        </p:txBody>
-      </p:sp>
-      <p:sp>
-        <p:nvSpPr>
-          <p:cNvPr id="5" name="TextBox 4"/>
-          <p:cNvSpPr txBox="1"/>
-          <p:nvPr/>
-        </p:nvSpPr>
-        <p:spPr>
-          <a:xfrm>
-            <a:off x="914400" y="5303520"/>
-            <a:ext cx="10360152" cy="457200"/>
-          </a:xfrm>
-          <a:prstGeom prst="rect">
-            <a:avLst/>
-          </a:prstGeom>
-          <a:noFill/>
-        </p:spPr>
-        <p:txBody>
-          <a:bodyPr wrap="none">
-            <a:spAutoFit/>
-          </a:bodyPr>
-          <a:lstStyle/>
-          <a:p>
-            <a:pPr algn="ctr">
-              <a:defRPr sz="1200">
-                <a:solidFill>
-                  <a:srgbClr val="38BDF8"/>
-                </a:solidFill>
-              </a:defRPr>
-            </a:pPr>
-            <a:r>
-              <a:t>Full-Stack Project Presentation  •  React 19 + Node.js + MySQL</a:t>
-            </a:r>
-          </a:p>
-        </p:txBody>
-      </p:sp>
-    </p:spTree>
-  </p:cSld>
-  <p:clrMapOvr>
-    <a:masterClrMapping/>
-  </p:clrMapOvr>
-</p:sld>
-</file>
-
-<file path=ppt/slides/slide10.xml><?xml version="1.0" encoding="utf-8"?>
-<p:sld xmlns:a="http://schemas.openxmlformats.org/drawingml/2006/main" xmlns:p="http://schemas.openxmlformats.org/presentationml/2006/main" xmlns:r="http://schemas.openxmlformats.org/officeDocument/2006/relationships">
-  <p:cSld>
-    <p:spTree>
-      <p:nvGrpSpPr>
-        <p:cNvPr id="1" name=""/>
-        <p:cNvGrpSpPr/>
-        <p:nvPr/>
-      </p:nvGrpSpPr>
-      <p:grpSpPr/>
-      <p:sp>
-        <p:nvSpPr>
-          <p:cNvPr id="2" name="Rectangle 1"/>
+            <a:pPr algn="ctr"/>
+          </a:p>
+        </p:txBody>
+      </p:sp>
+      <p:sp>
+        <p:nvSpPr>
+          <p:cNvPr id="4" name="Rounded Rectangle 3"/>
           <p:cNvSpPr/>
           <p:nvPr/>
         </p:nvSpPr>
         <p:spPr>
           <a:xfrm>
-            <a:off x="0" y="0"/>
-            <a:ext cx="12191695" cy="6858000"/>
-          </a:xfrm>
-          <a:prstGeom prst="rect">
+            <a:off x="4023360" y="1097280"/>
+            <a:ext cx="4114800" cy="347472"/>
+          </a:xfrm>
+          <a:prstGeom prst="roundRect">
             <a:avLst/>
           </a:prstGeom>
           <a:solidFill>
-            <a:srgbClr val="0F172A"/>
+            <a:srgbClr val="122837"/>
           </a:solidFill>
-          <a:ln>
-            <a:noFill/>
+          <a:ln w="12700">
+            <a:solidFill>
+              <a:srgbClr val="0D9488"/>
+            </a:solidFill>
           </a:ln>
         </p:spPr>
         <p:style>
@@ -4384,20 +4061,29 @@
           <a:bodyPr rtlCol="0" anchor="ctr"/>
           <a:lstStyle/>
           <a:p>
-            <a:pPr algn="ctr"/>
-          </a:p>
-        </p:txBody>
-      </p:sp>
-      <p:sp>
-        <p:nvSpPr>
-          <p:cNvPr id="3" name="TextBox 2"/>
+            <a:pPr algn="ctr">
+              <a:defRPr sz="1000" b="1">
+                <a:solidFill>
+                  <a:srgbClr val="14B8A6"/>
+                </a:solidFill>
+              </a:defRPr>
+            </a:pPr>
+            <a:r>
+              <a:t>🎓  END-SEM CAPSTONE PROJECT</a:t>
+            </a:r>
+          </a:p>
+        </p:txBody>
+      </p:sp>
+      <p:sp>
+        <p:nvSpPr>
+          <p:cNvPr id="5" name="TextBox 4"/>
           <p:cNvSpPr txBox="1"/>
           <p:nvPr/>
         </p:nvSpPr>
         <p:spPr>
           <a:xfrm>
-            <a:off x="731520" y="548640"/>
-            <a:ext cx="10698480" cy="365760"/>
+            <a:off x="914400" y="1600200"/>
+            <a:ext cx="10360152" cy="1280160"/>
           </a:xfrm>
           <a:prstGeom prst="rect">
             <a:avLst/>
@@ -4405,34 +4091,34 @@
           <a:noFill/>
         </p:spPr>
         <p:txBody>
-          <a:bodyPr wrap="square">
+          <a:bodyPr wrap="none">
             <a:spAutoFit/>
           </a:bodyPr>
           <a:lstStyle/>
           <a:p>
-            <a:pPr>
-              <a:defRPr sz="1100" b="1">
-                <a:solidFill>
-                  <a:srgbClr val="38BDF8"/>
-                </a:solidFill>
-              </a:defRPr>
-            </a:pPr>
-            <a:r>
-              <a:t>09. FUTURE &amp; CONCLUSION</a:t>
-            </a:r>
-          </a:p>
-        </p:txBody>
-      </p:sp>
-      <p:sp>
-        <p:nvSpPr>
-          <p:cNvPr id="4" name="TextBox 3"/>
+            <a:pPr algn="ctr">
+              <a:defRPr sz="5600" b="1">
+                <a:solidFill>
+                  <a:srgbClr val="FFFFFF"/>
+                </a:solidFill>
+              </a:defRPr>
+            </a:pPr>
+            <a:r>
+              <a:t>QueLess</a:t>
+            </a:r>
+          </a:p>
+        </p:txBody>
+      </p:sp>
+      <p:sp>
+        <p:nvSpPr>
+          <p:cNvPr id="6" name="TextBox 5"/>
           <p:cNvSpPr txBox="1"/>
           <p:nvPr/>
         </p:nvSpPr>
         <p:spPr>
           <a:xfrm>
-            <a:off x="731520" y="822960"/>
-            <a:ext cx="10698480" cy="731520"/>
+            <a:off x="914400" y="2788920"/>
+            <a:ext cx="10360152" cy="365760"/>
           </a:xfrm>
           <a:prstGeom prst="rect">
             <a:avLst/>
@@ -4440,34 +4126,34 @@
           <a:noFill/>
         </p:spPr>
         <p:txBody>
-          <a:bodyPr wrap="square">
+          <a:bodyPr wrap="none">
             <a:spAutoFit/>
           </a:bodyPr>
           <a:lstStyle/>
           <a:p>
-            <a:pPr>
-              <a:defRPr sz="2600" b="1">
-                <a:solidFill>
-                  <a:srgbClr val="FFFFFF"/>
-                </a:solidFill>
-              </a:defRPr>
-            </a:pPr>
-            <a:r>
-              <a:t>Roadmap &amp; Final Takeaway</a:t>
-            </a:r>
-          </a:p>
-        </p:txBody>
-      </p:sp>
-      <p:sp>
-        <p:nvSpPr>
-          <p:cNvPr id="5" name="TextBox 4"/>
+            <a:pPr algn="ctr">
+              <a:defRPr sz="1600" b="1">
+                <a:solidFill>
+                  <a:srgbClr val="14B8A6"/>
+                </a:solidFill>
+              </a:defRPr>
+            </a:pPr>
+            <a:r>
+              <a:t>Smart Virtual Queue Management System</a:t>
+            </a:r>
+          </a:p>
+        </p:txBody>
+      </p:sp>
+      <p:sp>
+        <p:nvSpPr>
+          <p:cNvPr id="7" name="TextBox 6"/>
           <p:cNvSpPr txBox="1"/>
           <p:nvPr/>
         </p:nvSpPr>
         <p:spPr>
           <a:xfrm>
-            <a:off x="731520" y="1463040"/>
-            <a:ext cx="10698480" cy="365760"/>
+            <a:off x="1371600" y="3246120"/>
+            <a:ext cx="9445752" cy="411480"/>
           </a:xfrm>
           <a:prstGeom prst="rect">
             <a:avLst/>
@@ -4475,44 +4161,44 @@
           <a:noFill/>
         </p:spPr>
         <p:txBody>
-          <a:bodyPr wrap="square">
+          <a:bodyPr wrap="none">
             <a:spAutoFit/>
           </a:bodyPr>
           <a:lstStyle/>
           <a:p>
-            <a:pPr>
-              <a:defRPr sz="1300">
-                <a:solidFill>
-                  <a:srgbClr val="94A3B8"/>
-                </a:solidFill>
-              </a:defRPr>
-            </a:pPr>
-            <a:r>
-              <a:t>Scaling intelligent digital queue management for the future.</a:t>
-            </a:r>
-          </a:p>
-        </p:txBody>
-      </p:sp>
-      <p:sp>
-        <p:nvSpPr>
-          <p:cNvPr id="6" name="Rounded Rectangle 5"/>
+            <a:pPr algn="ctr">
+              <a:defRPr sz="1200">
+                <a:solidFill>
+                  <a:srgbClr val="64748B"/>
+                </a:solidFill>
+              </a:defRPr>
+            </a:pPr>
+            <a:r>
+              <a:t>Full-stack • Hardware-free • Customers + Staff + Lobby TV synchronised in real-time</a:t>
+            </a:r>
+          </a:p>
+        </p:txBody>
+      </p:sp>
+      <p:sp>
+        <p:nvSpPr>
+          <p:cNvPr id="8" name="Rounded Rectangle 7"/>
           <p:cNvSpPr/>
           <p:nvPr/>
         </p:nvSpPr>
         <p:spPr>
           <a:xfrm>
-            <a:off x="731520" y="2103120"/>
-            <a:ext cx="5120640" cy="3931920"/>
+            <a:off x="777240" y="3840480"/>
+            <a:ext cx="2468880" cy="1051560"/>
           </a:xfrm>
           <a:prstGeom prst="roundRect">
             <a:avLst/>
           </a:prstGeom>
           <a:solidFill>
-            <a:srgbClr val="1E293B"/>
+            <a:srgbClr val="1A2538"/>
           </a:solidFill>
           <a:ln w="12700">
             <a:solidFill>
-              <a:srgbClr val="334155"/>
+              <a:srgbClr val="2D3E50"/>
             </a:solidFill>
           </a:ln>
         </p:spPr>
@@ -4540,14 +4226,14 @@
       </p:sp>
       <p:sp>
         <p:nvSpPr>
-          <p:cNvPr id="7" name="TextBox 6"/>
+          <p:cNvPr id="9" name="TextBox 8"/>
           <p:cNvSpPr txBox="1"/>
           <p:nvPr/>
         </p:nvSpPr>
         <p:spPr>
           <a:xfrm>
-            <a:off x="868680" y="2240280"/>
-            <a:ext cx="4846320" cy="3657600"/>
+            <a:off x="914400" y="3913632"/>
+            <a:ext cx="2194560" cy="914400"/>
           </a:xfrm>
           <a:prstGeom prst="rect">
             <a:avLst/>
@@ -4561,68 +4247,53 @@
           <a:lstStyle/>
           <a:p>
             <a:pPr>
-              <a:defRPr sz="1400" b="1">
+              <a:defRPr sz="1100" b="1">
                 <a:solidFill>
                   <a:srgbClr val="FFFFFF"/>
                 </a:solidFill>
               </a:defRPr>
             </a:pPr>
             <a:r>
-              <a:t>🌟 Future Roadmap Milestones</a:t>
+              <a:t>📱 Remote Queuing</a:t>
             </a:r>
           </a:p>
           <a:p>
             <a:pPr>
               <a:spcBef>
-                <a:spcPts val="800"/>
+                <a:spcPts val="300"/>
               </a:spcBef>
-              <a:defRPr sz="1100">
-                <a:solidFill>
-                  <a:srgbClr val="94A3B8"/>
-                </a:solidFill>
-              </a:defRPr>
-            </a:pPr>
-            <a:r>
-              <a:t>🚀  WhatsApp &amp; SMS token notifications via Twilio</a:t>
-            </a:r>
-            <a:br/>
-            <a:br/>
-            <a:r>
-              <a:t>🤖  AI-driven Machine Learning wait time prediction</a:t>
-            </a:r>
-            <a:br/>
-            <a:br/>
-            <a:r>
-              <a:t>🏢  Multi-branch enterprise manager dashboard</a:t>
-            </a:r>
-            <a:br/>
-            <a:br/>
-            <a:r>
-              <a:t>🌐  Self-service physical kiosk check-in mode</a:t>
-            </a:r>
-          </a:p>
-        </p:txBody>
-      </p:sp>
-      <p:sp>
-        <p:nvSpPr>
-          <p:cNvPr id="8" name="Rounded Rectangle 7"/>
+              <a:defRPr sz="900">
+                <a:solidFill>
+                  <a:srgbClr val="64748B"/>
+                </a:solidFill>
+              </a:defRPr>
+            </a:pPr>
+            <a:r>
+              <a:t>Join from anywhere on mobile</a:t>
+            </a:r>
+          </a:p>
+        </p:txBody>
+      </p:sp>
+      <p:sp>
+        <p:nvSpPr>
+          <p:cNvPr id="10" name="Rounded Rectangle 9"/>
           <p:cNvSpPr/>
           <p:nvPr/>
         </p:nvSpPr>
         <p:spPr>
           <a:xfrm>
-            <a:off x="6217920" y="2103120"/>
-            <a:ext cx="5120640" cy="3931920"/>
+            <a:off x="3456432" y="3840480"/>
+            <a:ext cx="2468880" cy="1051560"/>
           </a:xfrm>
           <a:prstGeom prst="roundRect">
             <a:avLst/>
           </a:prstGeom>
           <a:solidFill>
-            <a:srgbClr val="1E293B"/>
+            <a:srgbClr val="1A2538"/>
           </a:solidFill>
           <a:ln w="12700">
             <a:solidFill>
-              <a:srgbClr val="334155"/>
+              <a:srgbClr val="2D3E50"/>
             </a:solidFill>
           </a:ln>
         </p:spPr>
@@ -4650,14 +4321,14 @@
       </p:sp>
       <p:sp>
         <p:nvSpPr>
-          <p:cNvPr id="9" name="TextBox 8"/>
+          <p:cNvPr id="11" name="TextBox 10"/>
           <p:cNvSpPr txBox="1"/>
           <p:nvPr/>
         </p:nvSpPr>
         <p:spPr>
           <a:xfrm>
-            <a:off x="6355080" y="2240280"/>
-            <a:ext cx="4846320" cy="3657600"/>
+            <a:off x="3593592" y="3913632"/>
+            <a:ext cx="2194560" cy="914400"/>
           </a:xfrm>
           <a:prstGeom prst="rect">
             <a:avLst/>
@@ -4671,39 +4342,254 @@
           <a:lstStyle/>
           <a:p>
             <a:pPr>
-              <a:defRPr sz="1400" b="1">
+              <a:defRPr sz="1100" b="1">
                 <a:solidFill>
                   <a:srgbClr val="FFFFFF"/>
                 </a:solidFill>
               </a:defRPr>
             </a:pPr>
             <a:r>
-              <a:t>💡 Summary &amp; Conclusion</a:t>
+              <a:t>⏱️ Live Smart ETA</a:t>
             </a:r>
           </a:p>
           <a:p>
             <a:pPr>
               <a:spcBef>
-                <a:spcPts val="800"/>
+                <a:spcPts val="300"/>
               </a:spcBef>
-              <a:defRPr sz="1100">
-                <a:solidFill>
-                  <a:srgbClr val="94A3B8"/>
-                </a:solidFill>
-              </a:defRPr>
-            </a:pPr>
-            <a:r>
-              <a:t>QueLess bridges the gap between physical operations and digital convenience.</a:t>
-            </a:r>
-            <a:br/>
-            <a:br/>
-            <a:r>
-              <a:t>By replacing stressful lines with calm virtual queues, it sets a new standard for modern service excellence.</a:t>
-            </a:r>
-            <a:br/>
-            <a:br/>
-            <a:r>
-              <a:t>Thank You! Ready for Questions &amp; Live Demo.</a:t>
+              <a:defRPr sz="900">
+                <a:solidFill>
+                  <a:srgbClr val="64748B"/>
+                </a:solidFill>
+              </a:defRPr>
+            </a:pPr>
+            <a:r>
+              <a:t>GPS distance + travel time</a:t>
+            </a:r>
+          </a:p>
+        </p:txBody>
+      </p:sp>
+      <p:sp>
+        <p:nvSpPr>
+          <p:cNvPr id="12" name="Rounded Rectangle 11"/>
+          <p:cNvSpPr/>
+          <p:nvPr/>
+        </p:nvSpPr>
+        <p:spPr>
+          <a:xfrm>
+            <a:off x="6135624" y="3840480"/>
+            <a:ext cx="2468880" cy="1051560"/>
+          </a:xfrm>
+          <a:prstGeom prst="roundRect">
+            <a:avLst/>
+          </a:prstGeom>
+          <a:solidFill>
+            <a:srgbClr val="1A2538"/>
+          </a:solidFill>
+          <a:ln w="12700">
+            <a:solidFill>
+              <a:srgbClr val="2D3E50"/>
+            </a:solidFill>
+          </a:ln>
+        </p:spPr>
+        <p:style>
+          <a:lnRef idx="1">
+            <a:schemeClr val="accent1"/>
+          </a:lnRef>
+          <a:fillRef idx="3">
+            <a:schemeClr val="accent1"/>
+          </a:fillRef>
+          <a:effectRef idx="2">
+            <a:schemeClr val="accent1"/>
+          </a:effectRef>
+          <a:fontRef idx="minor">
+            <a:schemeClr val="lt1"/>
+          </a:fontRef>
+        </p:style>
+        <p:txBody>
+          <a:bodyPr rtlCol="0" anchor="ctr"/>
+          <a:lstStyle/>
+          <a:p>
+            <a:pPr algn="ctr"/>
+          </a:p>
+        </p:txBody>
+      </p:sp>
+      <p:sp>
+        <p:nvSpPr>
+          <p:cNvPr id="13" name="TextBox 12"/>
+          <p:cNvSpPr txBox="1"/>
+          <p:nvPr/>
+        </p:nvSpPr>
+        <p:spPr>
+          <a:xfrm>
+            <a:off x="6272784" y="3913632"/>
+            <a:ext cx="2194560" cy="914400"/>
+          </a:xfrm>
+          <a:prstGeom prst="rect">
+            <a:avLst/>
+          </a:prstGeom>
+          <a:noFill/>
+        </p:spPr>
+        <p:txBody>
+          <a:bodyPr wrap="square">
+            <a:spAutoFit/>
+          </a:bodyPr>
+          <a:lstStyle/>
+          <a:p>
+            <a:pPr>
+              <a:defRPr sz="1100" b="1">
+                <a:solidFill>
+                  <a:srgbClr val="FFFFFF"/>
+                </a:solidFill>
+              </a:defRPr>
+            </a:pPr>
+            <a:r>
+              <a:t>📺 Lobby TV Mode</a:t>
+            </a:r>
+          </a:p>
+          <a:p>
+            <a:pPr>
+              <a:spcBef>
+                <a:spcPts val="300"/>
+              </a:spcBef>
+              <a:defRPr sz="900">
+                <a:solidFill>
+                  <a:srgbClr val="64748B"/>
+                </a:solidFill>
+              </a:defRPr>
+            </a:pPr>
+            <a:r>
+              <a:t>Auto voice + chime alerts</a:t>
+            </a:r>
+          </a:p>
+        </p:txBody>
+      </p:sp>
+      <p:sp>
+        <p:nvSpPr>
+          <p:cNvPr id="14" name="Rounded Rectangle 13"/>
+          <p:cNvSpPr/>
+          <p:nvPr/>
+        </p:nvSpPr>
+        <p:spPr>
+          <a:xfrm>
+            <a:off x="8814816" y="3840480"/>
+            <a:ext cx="2468880" cy="1051560"/>
+          </a:xfrm>
+          <a:prstGeom prst="roundRect">
+            <a:avLst/>
+          </a:prstGeom>
+          <a:solidFill>
+            <a:srgbClr val="1A2538"/>
+          </a:solidFill>
+          <a:ln w="12700">
+            <a:solidFill>
+              <a:srgbClr val="2D3E50"/>
+            </a:solidFill>
+          </a:ln>
+        </p:spPr>
+        <p:style>
+          <a:lnRef idx="1">
+            <a:schemeClr val="accent1"/>
+          </a:lnRef>
+          <a:fillRef idx="3">
+            <a:schemeClr val="accent1"/>
+          </a:fillRef>
+          <a:effectRef idx="2">
+            <a:schemeClr val="accent1"/>
+          </a:effectRef>
+          <a:fontRef idx="minor">
+            <a:schemeClr val="lt1"/>
+          </a:fontRef>
+        </p:style>
+        <p:txBody>
+          <a:bodyPr rtlCol="0" anchor="ctr"/>
+          <a:lstStyle/>
+          <a:p>
+            <a:pPr algn="ctr"/>
+          </a:p>
+        </p:txBody>
+      </p:sp>
+      <p:sp>
+        <p:nvSpPr>
+          <p:cNvPr id="15" name="TextBox 14"/>
+          <p:cNvSpPr txBox="1"/>
+          <p:nvPr/>
+        </p:nvSpPr>
+        <p:spPr>
+          <a:xfrm>
+            <a:off x="8951976" y="3913632"/>
+            <a:ext cx="2194560" cy="914400"/>
+          </a:xfrm>
+          <a:prstGeom prst="rect">
+            <a:avLst/>
+          </a:prstGeom>
+          <a:noFill/>
+        </p:spPr>
+        <p:txBody>
+          <a:bodyPr wrap="square">
+            <a:spAutoFit/>
+          </a:bodyPr>
+          <a:lstStyle/>
+          <a:p>
+            <a:pPr>
+              <a:defRPr sz="1100" b="1">
+                <a:solidFill>
+                  <a:srgbClr val="FFFFFF"/>
+                </a:solidFill>
+              </a:defRPr>
+            </a:pPr>
+            <a:r>
+              <a:t>⚡ Zero Hardware</a:t>
+            </a:r>
+          </a:p>
+          <a:p>
+            <a:pPr>
+              <a:spcBef>
+                <a:spcPts val="300"/>
+              </a:spcBef>
+              <a:defRPr sz="900">
+                <a:solidFill>
+                  <a:srgbClr val="64748B"/>
+                </a:solidFill>
+              </a:defRPr>
+            </a:pPr>
+            <a:r>
+              <a:t>Runs on any browser or TV</a:t>
+            </a:r>
+          </a:p>
+        </p:txBody>
+      </p:sp>
+      <p:sp>
+        <p:nvSpPr>
+          <p:cNvPr id="16" name="TextBox 15"/>
+          <p:cNvSpPr txBox="1"/>
+          <p:nvPr/>
+        </p:nvSpPr>
+        <p:spPr>
+          <a:xfrm>
+            <a:off x="914400" y="5166360"/>
+            <a:ext cx="10360152" cy="274320"/>
+          </a:xfrm>
+          <a:prstGeom prst="rect">
+            <a:avLst/>
+          </a:prstGeom>
+          <a:noFill/>
+        </p:spPr>
+        <p:txBody>
+          <a:bodyPr wrap="none">
+            <a:spAutoFit/>
+          </a:bodyPr>
+          <a:lstStyle/>
+          <a:p>
+            <a:pPr algn="ctr">
+              <a:defRPr sz="1000">
+                <a:solidFill>
+                  <a:srgbClr val="38BDF8"/>
+                </a:solidFill>
+              </a:defRPr>
+            </a:pPr>
+            <a:r>
+              <a:t>React 19  •  Node.js + Express  •  MySQL 8  •  Web Audio &amp; Speech APIs</a:t>
             </a:r>
           </a:p>
         </p:txBody>
@@ -4741,7 +4627,7 @@
             <a:avLst/>
           </a:prstGeom>
           <a:solidFill>
-            <a:srgbClr val="0F172A"/>
+            <a:srgbClr val="0B1120"/>
           </a:solidFill>
           <a:ln>
             <a:noFill/>
@@ -4771,130 +4657,23 @@
       </p:sp>
       <p:sp>
         <p:nvSpPr>
-          <p:cNvPr id="3" name="TextBox 2"/>
-          <p:cNvSpPr txBox="1"/>
-          <p:nvPr/>
-        </p:nvSpPr>
-        <p:spPr>
-          <a:xfrm>
-            <a:off x="731520" y="548640"/>
-            <a:ext cx="10698480" cy="365760"/>
+          <p:cNvPr id="3" name="Rectangle 2"/>
+          <p:cNvSpPr/>
+          <p:nvPr/>
+        </p:nvSpPr>
+        <p:spPr>
+          <a:xfrm>
+            <a:off x="0" y="0"/>
+            <a:ext cx="12191695" cy="54864"/>
           </a:xfrm>
           <a:prstGeom prst="rect">
             <a:avLst/>
           </a:prstGeom>
-          <a:noFill/>
-        </p:spPr>
-        <p:txBody>
-          <a:bodyPr wrap="square">
-            <a:spAutoFit/>
-          </a:bodyPr>
-          <a:lstStyle/>
-          <a:p>
-            <a:pPr>
-              <a:defRPr sz="1100" b="1">
-                <a:solidFill>
-                  <a:srgbClr val="38BDF8"/>
-                </a:solidFill>
-              </a:defRPr>
-            </a:pPr>
-            <a:r>
-              <a:t>01. THE PROBLEM</a:t>
-            </a:r>
-          </a:p>
-        </p:txBody>
-      </p:sp>
-      <p:sp>
-        <p:nvSpPr>
-          <p:cNvPr id="4" name="TextBox 3"/>
-          <p:cNvSpPr txBox="1"/>
-          <p:nvPr/>
-        </p:nvSpPr>
-        <p:spPr>
-          <a:xfrm>
-            <a:off x="731520" y="822960"/>
-            <a:ext cx="10698480" cy="731520"/>
-          </a:xfrm>
-          <a:prstGeom prst="rect">
-            <a:avLst/>
-          </a:prstGeom>
-          <a:noFill/>
-        </p:spPr>
-        <p:txBody>
-          <a:bodyPr wrap="square">
-            <a:spAutoFit/>
-          </a:bodyPr>
-          <a:lstStyle/>
-          <a:p>
-            <a:pPr>
-              <a:defRPr sz="2600" b="1">
-                <a:solidFill>
-                  <a:srgbClr val="FFFFFF"/>
-                </a:solidFill>
-              </a:defRPr>
-            </a:pPr>
-            <a:r>
-              <a:t>Why Physical Waiting Lines Fail in the Modern Era</a:t>
-            </a:r>
-          </a:p>
-        </p:txBody>
-      </p:sp>
-      <p:sp>
-        <p:nvSpPr>
-          <p:cNvPr id="5" name="TextBox 4"/>
-          <p:cNvSpPr txBox="1"/>
-          <p:nvPr/>
-        </p:nvSpPr>
-        <p:spPr>
-          <a:xfrm>
-            <a:off x="731520" y="1463040"/>
-            <a:ext cx="10698480" cy="365760"/>
-          </a:xfrm>
-          <a:prstGeom prst="rect">
-            <a:avLst/>
-          </a:prstGeom>
-          <a:noFill/>
-        </p:spPr>
-        <p:txBody>
-          <a:bodyPr wrap="square">
-            <a:spAutoFit/>
-          </a:bodyPr>
-          <a:lstStyle/>
-          <a:p>
-            <a:pPr>
-              <a:defRPr sz="1300">
-                <a:solidFill>
-                  <a:srgbClr val="94A3B8"/>
-                </a:solidFill>
-              </a:defRPr>
-            </a:pPr>
-            <a:r>
-              <a:t>Traditional queuing creates friction, health concerns, and operational blindspots.</a:t>
-            </a:r>
-          </a:p>
-        </p:txBody>
-      </p:sp>
-      <p:sp>
-        <p:nvSpPr>
-          <p:cNvPr id="6" name="Rounded Rectangle 5"/>
-          <p:cNvSpPr/>
-          <p:nvPr/>
-        </p:nvSpPr>
-        <p:spPr>
-          <a:xfrm>
-            <a:off x="731520" y="2011680"/>
-            <a:ext cx="5120640" cy="1920240"/>
-          </a:xfrm>
-          <a:prstGeom prst="roundRect">
-            <a:avLst/>
-          </a:prstGeom>
           <a:solidFill>
-            <a:srgbClr val="1E293B"/>
+            <a:srgbClr val="0D9488"/>
           </a:solidFill>
-          <a:ln w="12700">
-            <a:solidFill>
-              <a:srgbClr val="334155"/>
-            </a:solidFill>
+          <a:ln>
+            <a:noFill/>
           </a:ln>
         </p:spPr>
         <p:style>
@@ -4921,14 +4700,14 @@
       </p:sp>
       <p:sp>
         <p:nvSpPr>
-          <p:cNvPr id="7" name="TextBox 6"/>
+          <p:cNvPr id="4" name="TextBox 3"/>
           <p:cNvSpPr txBox="1"/>
           <p:nvPr/>
         </p:nvSpPr>
         <p:spPr>
           <a:xfrm>
-            <a:off x="868680" y="2148840"/>
-            <a:ext cx="4846320" cy="1645920"/>
+            <a:off x="640080" y="502920"/>
+            <a:ext cx="3657600" cy="292608"/>
           </a:xfrm>
           <a:prstGeom prst="rect">
             <a:avLst/>
@@ -4936,59 +4715,114 @@
           <a:noFill/>
         </p:spPr>
         <p:txBody>
-          <a:bodyPr wrap="square">
+          <a:bodyPr wrap="none">
             <a:spAutoFit/>
           </a:bodyPr>
           <a:lstStyle/>
           <a:p>
             <a:pPr>
-              <a:defRPr sz="1400" b="1">
+              <a:defRPr sz="900" b="1">
+                <a:solidFill>
+                  <a:srgbClr val="38BDF8"/>
+                </a:solidFill>
+              </a:defRPr>
+            </a:pPr>
+            <a:r>
+              <a:t>01 · THE PROBLEM</a:t>
+            </a:r>
+          </a:p>
+        </p:txBody>
+      </p:sp>
+      <p:sp>
+        <p:nvSpPr>
+          <p:cNvPr id="5" name="TextBox 4"/>
+          <p:cNvSpPr txBox="1"/>
+          <p:nvPr/>
+        </p:nvSpPr>
+        <p:spPr>
+          <a:xfrm>
+            <a:off x="640080" y="804672"/>
+            <a:ext cx="10908792" cy="548640"/>
+          </a:xfrm>
+          <a:prstGeom prst="rect">
+            <a:avLst/>
+          </a:prstGeom>
+          <a:noFill/>
+        </p:spPr>
+        <p:txBody>
+          <a:bodyPr wrap="none">
+            <a:spAutoFit/>
+          </a:bodyPr>
+          <a:lstStyle/>
+          <a:p>
+            <a:pPr>
+              <a:defRPr sz="2400" b="1">
                 <a:solidFill>
                   <a:srgbClr val="FFFFFF"/>
                 </a:solidFill>
               </a:defRPr>
             </a:pPr>
             <a:r>
-              <a:t>⏳ Lost Productivity &amp; Anxiety</a:t>
-            </a:r>
-          </a:p>
-          <a:p>
-            <a:pPr>
-              <a:spcBef>
-                <a:spcPts val="800"/>
-              </a:spcBef>
+              <a:t>Why Physical Queues Fail in the Modern Era</a:t>
+            </a:r>
+          </a:p>
+        </p:txBody>
+      </p:sp>
+      <p:sp>
+        <p:nvSpPr>
+          <p:cNvPr id="6" name="TextBox 5"/>
+          <p:cNvSpPr txBox="1"/>
+          <p:nvPr/>
+        </p:nvSpPr>
+        <p:spPr>
+          <a:xfrm>
+            <a:off x="640080" y="1335024"/>
+            <a:ext cx="10908792" cy="320040"/>
+          </a:xfrm>
+          <a:prstGeom prst="rect">
+            <a:avLst/>
+          </a:prstGeom>
+          <a:noFill/>
+        </p:spPr>
+        <p:txBody>
+          <a:bodyPr wrap="none">
+            <a:spAutoFit/>
+          </a:bodyPr>
+          <a:lstStyle/>
+          <a:p>
+            <a:pPr>
               <a:defRPr sz="1100">
                 <a:solidFill>
-                  <a:srgbClr val="94A3B8"/>
-                </a:solidFill>
-              </a:defRPr>
-            </a:pPr>
-            <a:r>
-              <a:t>Customers spend 30–60+ minutes physically trapped in crowded waiting rooms with zero visibility into when their turn will arrive.</a:t>
-            </a:r>
-          </a:p>
-        </p:txBody>
-      </p:sp>
-      <p:sp>
-        <p:nvSpPr>
-          <p:cNvPr id="8" name="Rounded Rectangle 7"/>
+                  <a:srgbClr val="64748B"/>
+                </a:solidFill>
+              </a:defRPr>
+            </a:pPr>
+            <a:r>
+              <a:t>Four real-world pain points that demand a digital solution.</a:t>
+            </a:r>
+          </a:p>
+        </p:txBody>
+      </p:sp>
+      <p:sp>
+        <p:nvSpPr>
+          <p:cNvPr id="7" name="Rounded Rectangle 6"/>
           <p:cNvSpPr/>
           <p:nvPr/>
         </p:nvSpPr>
         <p:spPr>
           <a:xfrm>
-            <a:off x="6217920" y="2011680"/>
-            <a:ext cx="5120640" cy="1920240"/>
+            <a:off x="640080" y="1874519"/>
+            <a:ext cx="5349240" cy="2103120"/>
           </a:xfrm>
           <a:prstGeom prst="roundRect">
             <a:avLst/>
           </a:prstGeom>
           <a:solidFill>
-            <a:srgbClr val="1E293B"/>
+            <a:srgbClr val="1A2538"/>
           </a:solidFill>
           <a:ln w="12700">
             <a:solidFill>
-              <a:srgbClr val="334155"/>
+              <a:srgbClr val="2D3E50"/>
             </a:solidFill>
           </a:ln>
         </p:spPr>
@@ -5016,14 +4850,14 @@
       </p:sp>
       <p:sp>
         <p:nvSpPr>
-          <p:cNvPr id="9" name="TextBox 8"/>
+          <p:cNvPr id="8" name="TextBox 7"/>
           <p:cNvSpPr txBox="1"/>
           <p:nvPr/>
         </p:nvSpPr>
         <p:spPr>
           <a:xfrm>
-            <a:off x="6355080" y="2148840"/>
-            <a:ext cx="4846320" cy="1645920"/>
+            <a:off x="804672" y="2011679"/>
+            <a:ext cx="5020056" cy="1828800"/>
           </a:xfrm>
           <a:prstGeom prst="rect">
             <a:avLst/>
@@ -5037,53 +4871,83 @@
           <a:lstStyle/>
           <a:p>
             <a:pPr>
-              <a:defRPr sz="1400" b="1">
+              <a:defRPr sz="1250" b="1">
                 <a:solidFill>
                   <a:srgbClr val="FFFFFF"/>
                 </a:solidFill>
               </a:defRPr>
             </a:pPr>
             <a:r>
-              <a:t>📉 Unpredictable Wait Times</a:t>
+              <a:t>📉 Wasted Productive Time</a:t>
             </a:r>
           </a:p>
           <a:p>
             <a:pPr>
               <a:spcBef>
-                <a:spcPts val="800"/>
+                <a:spcPts val="300"/>
               </a:spcBef>
-              <a:defRPr sz="1100">
-                <a:solidFill>
-                  <a:srgbClr val="94A3B8"/>
-                </a:solidFill>
-              </a:defRPr>
-            </a:pPr>
-            <a:r>
-              <a:t>Static paper tokens provide a fixed number without accounting for variable service durations, delays, or emergency walk-ins.</a:t>
-            </a:r>
-          </a:p>
-        </p:txBody>
-      </p:sp>
-      <p:sp>
-        <p:nvSpPr>
-          <p:cNvPr id="10" name="Rounded Rectangle 9"/>
+              <a:defRPr sz="950">
+                <a:solidFill>
+                  <a:srgbClr val="CBD5E1"/>
+                </a:solidFill>
+              </a:defRPr>
+            </a:pPr>
+            <a:r>
+              <a:t>•  Billions of hours lost globally each year in static physical lines.</a:t>
+            </a:r>
+          </a:p>
+          <a:p>
+            <a:pPr>
+              <a:spcBef>
+                <a:spcPts val="300"/>
+              </a:spcBef>
+              <a:defRPr sz="950">
+                <a:solidFill>
+                  <a:srgbClr val="CBD5E1"/>
+                </a:solidFill>
+              </a:defRPr>
+            </a:pPr>
+            <a:r>
+              <a:t>•  Customers have zero visibility into transaction duration or delays.</a:t>
+            </a:r>
+          </a:p>
+          <a:p>
+            <a:pPr>
+              <a:spcBef>
+                <a:spcPts val="300"/>
+              </a:spcBef>
+              <a:defRPr sz="950">
+                <a:solidFill>
+                  <a:srgbClr val="CBD5E1"/>
+                </a:solidFill>
+              </a:defRPr>
+            </a:pPr>
+            <a:r>
+              <a:t>•  Work schedules, personal plans, and daily productivity all disrupted.</a:t>
+            </a:r>
+          </a:p>
+        </p:txBody>
+      </p:sp>
+      <p:sp>
+        <p:nvSpPr>
+          <p:cNvPr id="9" name="Rounded Rectangle 8"/>
           <p:cNvSpPr/>
           <p:nvPr/>
         </p:nvSpPr>
         <p:spPr>
           <a:xfrm>
-            <a:off x="731520" y="4206240"/>
-            <a:ext cx="5120640" cy="1920240"/>
+            <a:off x="6153912" y="1874519"/>
+            <a:ext cx="5349240" cy="2103120"/>
           </a:xfrm>
           <a:prstGeom prst="roundRect">
             <a:avLst/>
           </a:prstGeom>
           <a:solidFill>
-            <a:srgbClr val="1E293B"/>
+            <a:srgbClr val="1A2538"/>
           </a:solidFill>
           <a:ln w="12700">
             <a:solidFill>
-              <a:srgbClr val="334155"/>
+              <a:srgbClr val="2D3E50"/>
             </a:solidFill>
           </a:ln>
         </p:spPr>
@@ -5111,14 +4975,14 @@
       </p:sp>
       <p:sp>
         <p:nvSpPr>
-          <p:cNvPr id="11" name="TextBox 10"/>
+          <p:cNvPr id="10" name="TextBox 9"/>
           <p:cNvSpPr txBox="1"/>
           <p:nvPr/>
         </p:nvSpPr>
         <p:spPr>
           <a:xfrm>
-            <a:off x="868680" y="4343400"/>
-            <a:ext cx="4846320" cy="1645920"/>
+            <a:off x="6318504" y="2011679"/>
+            <a:ext cx="5020056" cy="1828800"/>
           </a:xfrm>
           <a:prstGeom prst="rect">
             <a:avLst/>
@@ -5132,53 +4996,83 @@
           <a:lstStyle/>
           <a:p>
             <a:pPr>
-              <a:defRPr sz="1400" b="1">
+              <a:defRPr sz="1250" b="1">
                 <a:solidFill>
                   <a:srgbClr val="FFFFFF"/>
                 </a:solidFill>
               </a:defRPr>
             </a:pPr>
             <a:r>
-              <a:t>👥 Congested Lobbies</a:t>
+              <a:t>🧠 Uncertainty &amp; Anxiety</a:t>
             </a:r>
           </a:p>
           <a:p>
             <a:pPr>
               <a:spcBef>
-                <a:spcPts val="800"/>
+                <a:spcPts val="300"/>
               </a:spcBef>
-              <a:defRPr sz="1100">
-                <a:solidFill>
-                  <a:srgbClr val="94A3B8"/>
-                </a:solidFill>
-              </a:defRPr>
-            </a:pPr>
-            <a:r>
-              <a:t>Overcrowded waiting rooms increase stress for staff, raise infection risks in healthcare, and create poor customer impressions.</a:t>
-            </a:r>
-          </a:p>
-        </p:txBody>
-      </p:sp>
-      <p:sp>
-        <p:nvSpPr>
-          <p:cNvPr id="12" name="Rounded Rectangle 11"/>
+              <a:defRPr sz="950">
+                <a:solidFill>
+                  <a:srgbClr val="CBD5E1"/>
+                </a:solidFill>
+              </a:defRPr>
+            </a:pPr>
+            <a:r>
+              <a:t>•  Research: uncertain waiting feels 3× longer than transparent waiting.</a:t>
+            </a:r>
+          </a:p>
+          <a:p>
+            <a:pPr>
+              <a:spcBef>
+                <a:spcPts val="300"/>
+              </a:spcBef>
+              <a:defRPr sz="950">
+                <a:solidFill>
+                  <a:srgbClr val="CBD5E1"/>
+                </a:solidFill>
+              </a:defRPr>
+            </a:pPr>
+            <a:r>
+              <a:t>•  Paper tokens offer no progress feedback or reassurance whatsoever.</a:t>
+            </a:r>
+          </a:p>
+          <a:p>
+            <a:pPr>
+              <a:spcBef>
+                <a:spcPts val="300"/>
+              </a:spcBef>
+              <a:defRPr sz="950">
+                <a:solidFill>
+                  <a:srgbClr val="CBD5E1"/>
+                </a:solidFill>
+              </a:defRPr>
+            </a:pPr>
+            <a:r>
+              <a:t>•  Customers have no idea if the delay is 5 minutes or 50 minutes.</a:t>
+            </a:r>
+          </a:p>
+        </p:txBody>
+      </p:sp>
+      <p:sp>
+        <p:nvSpPr>
+          <p:cNvPr id="11" name="Rounded Rectangle 10"/>
           <p:cNvSpPr/>
           <p:nvPr/>
         </p:nvSpPr>
         <p:spPr>
           <a:xfrm>
-            <a:off x="6217920" y="4206240"/>
-            <a:ext cx="5120640" cy="1920240"/>
+            <a:off x="640080" y="4142231"/>
+            <a:ext cx="5349240" cy="2103120"/>
           </a:xfrm>
           <a:prstGeom prst="roundRect">
             <a:avLst/>
           </a:prstGeom>
           <a:solidFill>
-            <a:srgbClr val="1E293B"/>
+            <a:srgbClr val="1A2538"/>
           </a:solidFill>
           <a:ln w="12700">
             <a:solidFill>
-              <a:srgbClr val="334155"/>
+              <a:srgbClr val="2D3E50"/>
             </a:solidFill>
           </a:ln>
         </p:spPr>
@@ -5206,14 +5100,14 @@
       </p:sp>
       <p:sp>
         <p:nvSpPr>
-          <p:cNvPr id="13" name="TextBox 12"/>
+          <p:cNvPr id="12" name="TextBox 11"/>
           <p:cNvSpPr txBox="1"/>
           <p:nvPr/>
         </p:nvSpPr>
         <p:spPr>
           <a:xfrm>
-            <a:off x="6355080" y="4343400"/>
-            <a:ext cx="4846320" cy="1645920"/>
+            <a:off x="804672" y="4279391"/>
+            <a:ext cx="5020056" cy="1828800"/>
           </a:xfrm>
           <a:prstGeom prst="rect">
             <a:avLst/>
@@ -5227,29 +5121,184 @@
           <a:lstStyle/>
           <a:p>
             <a:pPr>
-              <a:defRPr sz="1400" b="1">
+              <a:defRPr sz="1250" b="1">
                 <a:solidFill>
                   <a:srgbClr val="FFFFFF"/>
                 </a:solidFill>
               </a:defRPr>
             </a:pPr>
             <a:r>
-              <a:t>📊 Zero Operational Intelligence</a:t>
+              <a:t>🏥 Overcrowded Waiting Halls</a:t>
             </a:r>
           </a:p>
           <a:p>
             <a:pPr>
               <a:spcBef>
-                <a:spcPts val="800"/>
+                <a:spcPts val="300"/>
               </a:spcBef>
-              <a:defRPr sz="1100">
-                <a:solidFill>
-                  <a:srgbClr val="94A3B8"/>
-                </a:solidFill>
-              </a:defRPr>
-            </a:pPr>
-            <a:r>
-              <a:t>Organizations lack real-time visibility into staff counter throughput, queue dropouts, or peak load bottlenecks.</a:t>
+              <a:defRPr sz="950">
+                <a:solidFill>
+                  <a:srgbClr val="CBD5E1"/>
+                </a:solidFill>
+              </a:defRPr>
+            </a:pPr>
+            <a:r>
+              <a:t>•  Crowded clinic lobbies are prime hotspots for cross-contamination.</a:t>
+            </a:r>
+          </a:p>
+          <a:p>
+            <a:pPr>
+              <a:spcBef>
+                <a:spcPts val="300"/>
+              </a:spcBef>
+              <a:defRPr sz="950">
+                <a:solidFill>
+                  <a:srgbClr val="CBD5E1"/>
+                </a:solidFill>
+              </a:defRPr>
+            </a:pPr>
+            <a:r>
+              <a:t>•  Patients forced to sit close together for extended unknown durations.</a:t>
+            </a:r>
+          </a:p>
+          <a:p>
+            <a:pPr>
+              <a:spcBef>
+                <a:spcPts val="300"/>
+              </a:spcBef>
+              <a:defRPr sz="950">
+                <a:solidFill>
+                  <a:srgbClr val="CBD5E1"/>
+                </a:solidFill>
+              </a:defRPr>
+            </a:pPr>
+            <a:r>
+              <a:t>•  Particularly dangerous for elderly, immunocompromised, or post-surgery patients.</a:t>
+            </a:r>
+          </a:p>
+        </p:txBody>
+      </p:sp>
+      <p:sp>
+        <p:nvSpPr>
+          <p:cNvPr id="13" name="Rounded Rectangle 12"/>
+          <p:cNvSpPr/>
+          <p:nvPr/>
+        </p:nvSpPr>
+        <p:spPr>
+          <a:xfrm>
+            <a:off x="6153912" y="4142231"/>
+            <a:ext cx="5349240" cy="2103120"/>
+          </a:xfrm>
+          <a:prstGeom prst="roundRect">
+            <a:avLst/>
+          </a:prstGeom>
+          <a:solidFill>
+            <a:srgbClr val="1A2E3A"/>
+          </a:solidFill>
+          <a:ln w="12700">
+            <a:solidFill>
+              <a:srgbClr val="14B8A6"/>
+            </a:solidFill>
+          </a:ln>
+        </p:spPr>
+        <p:style>
+          <a:lnRef idx="1">
+            <a:schemeClr val="accent1"/>
+          </a:lnRef>
+          <a:fillRef idx="3">
+            <a:schemeClr val="accent1"/>
+          </a:fillRef>
+          <a:effectRef idx="2">
+            <a:schemeClr val="accent1"/>
+          </a:effectRef>
+          <a:fontRef idx="minor">
+            <a:schemeClr val="lt1"/>
+          </a:fontRef>
+        </p:style>
+        <p:txBody>
+          <a:bodyPr rtlCol="0" anchor="ctr"/>
+          <a:lstStyle/>
+          <a:p>
+            <a:pPr algn="ctr"/>
+          </a:p>
+        </p:txBody>
+      </p:sp>
+      <p:sp>
+        <p:nvSpPr>
+          <p:cNvPr id="14" name="TextBox 13"/>
+          <p:cNvSpPr txBox="1"/>
+          <p:nvPr/>
+        </p:nvSpPr>
+        <p:spPr>
+          <a:xfrm>
+            <a:off x="6318504" y="4279391"/>
+            <a:ext cx="5020056" cy="1828800"/>
+          </a:xfrm>
+          <a:prstGeom prst="rect">
+            <a:avLst/>
+          </a:prstGeom>
+          <a:noFill/>
+        </p:spPr>
+        <p:txBody>
+          <a:bodyPr wrap="square">
+            <a:spAutoFit/>
+          </a:bodyPr>
+          <a:lstStyle/>
+          <a:p>
+            <a:pPr>
+              <a:defRPr sz="1250" b="1">
+                <a:solidFill>
+                  <a:srgbClr val="14B8A6"/>
+                </a:solidFill>
+              </a:defRPr>
+            </a:pPr>
+            <a:r>
+              <a:t>🔥 Front-Desk Burnout</a:t>
+            </a:r>
+          </a:p>
+          <a:p>
+            <a:pPr>
+              <a:spcBef>
+                <a:spcPts val="300"/>
+              </a:spcBef>
+              <a:defRPr sz="950">
+                <a:solidFill>
+                  <a:srgbClr val="CBD5E1"/>
+                </a:solidFill>
+              </a:defRPr>
+            </a:pPr>
+            <a:r>
+              <a:t>•  Staff field the same 'When is my turn?' question on repeat.</a:t>
+            </a:r>
+          </a:p>
+          <a:p>
+            <a:pPr>
+              <a:spcBef>
+                <a:spcPts val="300"/>
+              </a:spcBef>
+              <a:defRPr sz="950">
+                <a:solidFill>
+                  <a:srgbClr val="CBD5E1"/>
+                </a:solidFill>
+              </a:defRPr>
+            </a:pPr>
+            <a:r>
+              <a:t>•  No data on counter throughput, delay patterns, or peak bottlenecks.</a:t>
+            </a:r>
+          </a:p>
+          <a:p>
+            <a:pPr>
+              <a:spcBef>
+                <a:spcPts val="300"/>
+              </a:spcBef>
+              <a:defRPr sz="950">
+                <a:solidFill>
+                  <a:srgbClr val="CBD5E1"/>
+                </a:solidFill>
+              </a:defRPr>
+            </a:pPr>
+            <a:r>
+              <a:t>•  Walk-ins tracked manually on paper — high error rate and missed entries.</a:t>
             </a:r>
           </a:p>
         </p:txBody>
@@ -5287,7 +5336,7 @@
             <a:avLst/>
           </a:prstGeom>
           <a:solidFill>
-            <a:srgbClr val="0F172A"/>
+            <a:srgbClr val="0B1120"/>
           </a:solidFill>
           <a:ln>
             <a:noFill/>
@@ -5317,14 +5366,207 @@
       </p:sp>
       <p:sp>
         <p:nvSpPr>
-          <p:cNvPr id="3" name="TextBox 2"/>
+          <p:cNvPr id="3" name="Rectangle 2"/>
+          <p:cNvSpPr/>
+          <p:nvPr/>
+        </p:nvSpPr>
+        <p:spPr>
+          <a:xfrm>
+            <a:off x="0" y="0"/>
+            <a:ext cx="12191695" cy="54864"/>
+          </a:xfrm>
+          <a:prstGeom prst="rect">
+            <a:avLst/>
+          </a:prstGeom>
+          <a:solidFill>
+            <a:srgbClr val="0D9488"/>
+          </a:solidFill>
+          <a:ln>
+            <a:noFill/>
+          </a:ln>
+        </p:spPr>
+        <p:style>
+          <a:lnRef idx="1">
+            <a:schemeClr val="accent1"/>
+          </a:lnRef>
+          <a:fillRef idx="3">
+            <a:schemeClr val="accent1"/>
+          </a:fillRef>
+          <a:effectRef idx="2">
+            <a:schemeClr val="accent1"/>
+          </a:effectRef>
+          <a:fontRef idx="minor">
+            <a:schemeClr val="lt1"/>
+          </a:fontRef>
+        </p:style>
+        <p:txBody>
+          <a:bodyPr rtlCol="0" anchor="ctr"/>
+          <a:lstStyle/>
+          <a:p>
+            <a:pPr algn="ctr"/>
+          </a:p>
+        </p:txBody>
+      </p:sp>
+      <p:sp>
+        <p:nvSpPr>
+          <p:cNvPr id="4" name="TextBox 3"/>
           <p:cNvSpPr txBox="1"/>
           <p:nvPr/>
         </p:nvSpPr>
         <p:spPr>
           <a:xfrm>
-            <a:off x="731520" y="548640"/>
-            <a:ext cx="10698480" cy="365760"/>
+            <a:off x="640080" y="502920"/>
+            <a:ext cx="3657600" cy="292608"/>
+          </a:xfrm>
+          <a:prstGeom prst="rect">
+            <a:avLst/>
+          </a:prstGeom>
+          <a:noFill/>
+        </p:spPr>
+        <p:txBody>
+          <a:bodyPr wrap="none">
+            <a:spAutoFit/>
+          </a:bodyPr>
+          <a:lstStyle/>
+          <a:p>
+            <a:pPr>
+              <a:defRPr sz="900" b="1">
+                <a:solidFill>
+                  <a:srgbClr val="38BDF8"/>
+                </a:solidFill>
+              </a:defRPr>
+            </a:pPr>
+            <a:r>
+              <a:t>02 · THE SOLUTION</a:t>
+            </a:r>
+          </a:p>
+        </p:txBody>
+      </p:sp>
+      <p:sp>
+        <p:nvSpPr>
+          <p:cNvPr id="5" name="TextBox 4"/>
+          <p:cNvSpPr txBox="1"/>
+          <p:nvPr/>
+        </p:nvSpPr>
+        <p:spPr>
+          <a:xfrm>
+            <a:off x="640080" y="804672"/>
+            <a:ext cx="10908792" cy="548640"/>
+          </a:xfrm>
+          <a:prstGeom prst="rect">
+            <a:avLst/>
+          </a:prstGeom>
+          <a:noFill/>
+        </p:spPr>
+        <p:txBody>
+          <a:bodyPr wrap="none">
+            <a:spAutoFit/>
+          </a:bodyPr>
+          <a:lstStyle/>
+          <a:p>
+            <a:pPr>
+              <a:defRPr sz="2400" b="1">
+                <a:solidFill>
+                  <a:srgbClr val="FFFFFF"/>
+                </a:solidFill>
+              </a:defRPr>
+            </a:pPr>
+            <a:r>
+              <a:t>Introducing QueLess — A Unified Queue Ecosystem</a:t>
+            </a:r>
+          </a:p>
+        </p:txBody>
+      </p:sp>
+      <p:sp>
+        <p:nvSpPr>
+          <p:cNvPr id="6" name="TextBox 5"/>
+          <p:cNvSpPr txBox="1"/>
+          <p:nvPr/>
+        </p:nvSpPr>
+        <p:spPr>
+          <a:xfrm>
+            <a:off x="640080" y="1335024"/>
+            <a:ext cx="10908792" cy="320040"/>
+          </a:xfrm>
+          <a:prstGeom prst="rect">
+            <a:avLst/>
+          </a:prstGeom>
+          <a:noFill/>
+        </p:spPr>
+        <p:txBody>
+          <a:bodyPr wrap="none">
+            <a:spAutoFit/>
+          </a:bodyPr>
+          <a:lstStyle/>
+          <a:p>
+            <a:pPr>
+              <a:defRPr sz="1100">
+                <a:solidFill>
+                  <a:srgbClr val="64748B"/>
+                </a:solidFill>
+              </a:defRPr>
+            </a:pPr>
+            <a:r>
+              <a:t>Three perfectly synchronised touchpoints replacing the entire physical queuing workflow.</a:t>
+            </a:r>
+          </a:p>
+        </p:txBody>
+      </p:sp>
+      <p:sp>
+        <p:nvSpPr>
+          <p:cNvPr id="7" name="Rounded Rectangle 6"/>
+          <p:cNvSpPr/>
+          <p:nvPr/>
+        </p:nvSpPr>
+        <p:spPr>
+          <a:xfrm>
+            <a:off x="640080" y="1828800"/>
+            <a:ext cx="3566160" cy="4206240"/>
+          </a:xfrm>
+          <a:prstGeom prst="roundRect">
+            <a:avLst/>
+          </a:prstGeom>
+          <a:solidFill>
+            <a:srgbClr val="1A2E3A"/>
+          </a:solidFill>
+          <a:ln w="12700">
+            <a:solidFill>
+              <a:srgbClr val="14B8A6"/>
+            </a:solidFill>
+          </a:ln>
+        </p:spPr>
+        <p:style>
+          <a:lnRef idx="1">
+            <a:schemeClr val="accent1"/>
+          </a:lnRef>
+          <a:fillRef idx="3">
+            <a:schemeClr val="accent1"/>
+          </a:fillRef>
+          <a:effectRef idx="2">
+            <a:schemeClr val="accent1"/>
+          </a:effectRef>
+          <a:fontRef idx="minor">
+            <a:schemeClr val="lt1"/>
+          </a:fontRef>
+        </p:style>
+        <p:txBody>
+          <a:bodyPr rtlCol="0" anchor="ctr"/>
+          <a:lstStyle/>
+          <a:p>
+            <a:pPr algn="ctr"/>
+          </a:p>
+        </p:txBody>
+      </p:sp>
+      <p:sp>
+        <p:nvSpPr>
+          <p:cNvPr id="8" name="TextBox 7"/>
+          <p:cNvSpPr txBox="1"/>
+          <p:nvPr/>
+        </p:nvSpPr>
+        <p:spPr>
+          <a:xfrm>
+            <a:off x="804672" y="1965960"/>
+            <a:ext cx="3236976" cy="3931920"/>
           </a:xfrm>
           <a:prstGeom prst="rect">
             <a:avLst/>
@@ -5338,28 +5580,133 @@
           <a:lstStyle/>
           <a:p>
             <a:pPr>
-              <a:defRPr sz="1100" b="1">
-                <a:solidFill>
-                  <a:srgbClr val="38BDF8"/>
-                </a:solidFill>
-              </a:defRPr>
-            </a:pPr>
-            <a:r>
-              <a:t>02. THE NEED</a:t>
-            </a:r>
-          </a:p>
-        </p:txBody>
-      </p:sp>
-      <p:sp>
-        <p:nvSpPr>
-          <p:cNvPr id="4" name="TextBox 3"/>
+              <a:defRPr sz="1250" b="1">
+                <a:solidFill>
+                  <a:srgbClr val="14B8A6"/>
+                </a:solidFill>
+              </a:defRPr>
+            </a:pPr>
+            <a:r>
+              <a:t>📱 Customer Web App</a:t>
+            </a:r>
+          </a:p>
+          <a:p>
+            <a:pPr>
+              <a:spcBef>
+                <a:spcPts val="300"/>
+              </a:spcBef>
+              <a:defRPr sz="950">
+                <a:solidFill>
+                  <a:srgbClr val="CBD5E1"/>
+                </a:solidFill>
+              </a:defRPr>
+            </a:pPr>
+            <a:r>
+              <a:t>•  Discover businesses with live GPS distance &amp; crowd-load meter.</a:t>
+            </a:r>
+          </a:p>
+          <a:p>
+            <a:pPr>
+              <a:spcBef>
+                <a:spcPts val="300"/>
+              </a:spcBef>
+              <a:defRPr sz="950">
+                <a:solidFill>
+                  <a:srgbClr val="CBD5E1"/>
+                </a:solidFill>
+              </a:defRPr>
+            </a:pPr>
+            <a:r>
+              <a:t>•  Join virtual queue remotely or book a future calendar slot.</a:t>
+            </a:r>
+          </a:p>
+          <a:p>
+            <a:pPr>
+              <a:spcBef>
+                <a:spcPts val="300"/>
+              </a:spcBef>
+              <a:defRPr sz="950">
+                <a:solidFill>
+                  <a:srgbClr val="CBD5E1"/>
+                </a:solidFill>
+              </a:defRPr>
+            </a:pPr>
+            <a:r>
+              <a:t>•  Live status tracker: Waiting → Approaching → Now Serving.</a:t>
+            </a:r>
+          </a:p>
+          <a:p>
+            <a:pPr>
+              <a:spcBef>
+                <a:spcPts val="300"/>
+              </a:spcBef>
+              <a:defRPr sz="950">
+                <a:solidFill>
+                  <a:srgbClr val="CBD5E1"/>
+                </a:solidFill>
+              </a:defRPr>
+            </a:pPr>
+            <a:r>
+              <a:t>•  Airline-style Digital Boarding Pass with scannable QR code.</a:t>
+            </a:r>
+          </a:p>
+        </p:txBody>
+      </p:sp>
+      <p:sp>
+        <p:nvSpPr>
+          <p:cNvPr id="9" name="Rounded Rectangle 8"/>
+          <p:cNvSpPr/>
+          <p:nvPr/>
+        </p:nvSpPr>
+        <p:spPr>
+          <a:xfrm>
+            <a:off x="4370832" y="1828800"/>
+            <a:ext cx="3566160" cy="4206240"/>
+          </a:xfrm>
+          <a:prstGeom prst="roundRect">
+            <a:avLst/>
+          </a:prstGeom>
+          <a:solidFill>
+            <a:srgbClr val="1A2538"/>
+          </a:solidFill>
+          <a:ln w="12700">
+            <a:solidFill>
+              <a:srgbClr val="2D3E50"/>
+            </a:solidFill>
+          </a:ln>
+        </p:spPr>
+        <p:style>
+          <a:lnRef idx="1">
+            <a:schemeClr val="accent1"/>
+          </a:lnRef>
+          <a:fillRef idx="3">
+            <a:schemeClr val="accent1"/>
+          </a:fillRef>
+          <a:effectRef idx="2">
+            <a:schemeClr val="accent1"/>
+          </a:effectRef>
+          <a:fontRef idx="minor">
+            <a:schemeClr val="lt1"/>
+          </a:fontRef>
+        </p:style>
+        <p:txBody>
+          <a:bodyPr rtlCol="0" anchor="ctr"/>
+          <a:lstStyle/>
+          <a:p>
+            <a:pPr algn="ctr"/>
+          </a:p>
+        </p:txBody>
+      </p:sp>
+      <p:sp>
+        <p:nvSpPr>
+          <p:cNvPr id="10" name="TextBox 9"/>
           <p:cNvSpPr txBox="1"/>
           <p:nvPr/>
         </p:nvSpPr>
         <p:spPr>
           <a:xfrm>
-            <a:off x="731520" y="822960"/>
-            <a:ext cx="10698480" cy="731520"/>
+            <a:off x="4535424" y="1965960"/>
+            <a:ext cx="3236976" cy="3931920"/>
           </a:xfrm>
           <a:prstGeom prst="rect">
             <a:avLst/>
@@ -5373,28 +5720,133 @@
           <a:lstStyle/>
           <a:p>
             <a:pPr>
-              <a:defRPr sz="2600" b="1">
+              <a:defRPr sz="1250" b="1">
                 <a:solidFill>
                   <a:srgbClr val="FFFFFF"/>
                 </a:solidFill>
               </a:defRPr>
             </a:pPr>
             <a:r>
-              <a:t>Why Virtual Queuing is Crucial Today</a:t>
-            </a:r>
-          </a:p>
-        </p:txBody>
-      </p:sp>
-      <p:sp>
-        <p:nvSpPr>
-          <p:cNvPr id="5" name="TextBox 4"/>
+              <a:t>🖥️ Staff Desk Console</a:t>
+            </a:r>
+          </a:p>
+          <a:p>
+            <a:pPr>
+              <a:spcBef>
+                <a:spcPts val="300"/>
+              </a:spcBef>
+              <a:defRPr sz="950">
+                <a:solidFill>
+                  <a:srgbClr val="CBD5E1"/>
+                </a:solidFill>
+              </a:defRPr>
+            </a:pPr>
+            <a:r>
+              <a:t>•  JWT-authenticated workspace for desk operators and managers.</a:t>
+            </a:r>
+          </a:p>
+          <a:p>
+            <a:pPr>
+              <a:spcBef>
+                <a:spcPts val="300"/>
+              </a:spcBef>
+              <a:defRPr sz="950">
+                <a:solidFill>
+                  <a:srgbClr val="CBD5E1"/>
+                </a:solidFill>
+              </a:defRPr>
+            </a:pPr>
+            <a:r>
+              <a:t>•  One-click: Call Next • Complete • No-Show • Hold / Skip.</a:t>
+            </a:r>
+          </a:p>
+          <a:p>
+            <a:pPr>
+              <a:spcBef>
+                <a:spcPts val="300"/>
+              </a:spcBef>
+              <a:defRPr sz="950">
+                <a:solidFill>
+                  <a:srgbClr val="CBD5E1"/>
+                </a:solidFill>
+              </a:defRPr>
+            </a:pPr>
+            <a:r>
+              <a:t>•  5-second walk-in ticket generator for non-smartphone visitors.</a:t>
+            </a:r>
+          </a:p>
+          <a:p>
+            <a:pPr>
+              <a:spcBef>
+                <a:spcPts val="300"/>
+              </a:spcBef>
+              <a:defRPr sz="950">
+                <a:solidFill>
+                  <a:srgbClr val="CBD5E1"/>
+                </a:solidFill>
+              </a:defRPr>
+            </a:pPr>
+            <a:r>
+              <a:t>•  Historical analytics: service duration and daily throughput.</a:t>
+            </a:r>
+          </a:p>
+        </p:txBody>
+      </p:sp>
+      <p:sp>
+        <p:nvSpPr>
+          <p:cNvPr id="11" name="Rounded Rectangle 10"/>
+          <p:cNvSpPr/>
+          <p:nvPr/>
+        </p:nvSpPr>
+        <p:spPr>
+          <a:xfrm>
+            <a:off x="8101584" y="1828800"/>
+            <a:ext cx="3566160" cy="4206240"/>
+          </a:xfrm>
+          <a:prstGeom prst="roundRect">
+            <a:avLst/>
+          </a:prstGeom>
+          <a:solidFill>
+            <a:srgbClr val="1A2538"/>
+          </a:solidFill>
+          <a:ln w="12700">
+            <a:solidFill>
+              <a:srgbClr val="2D3E50"/>
+            </a:solidFill>
+          </a:ln>
+        </p:spPr>
+        <p:style>
+          <a:lnRef idx="1">
+            <a:schemeClr val="accent1"/>
+          </a:lnRef>
+          <a:fillRef idx="3">
+            <a:schemeClr val="accent1"/>
+          </a:fillRef>
+          <a:effectRef idx="2">
+            <a:schemeClr val="accent1"/>
+          </a:effectRef>
+          <a:fontRef idx="minor">
+            <a:schemeClr val="lt1"/>
+          </a:fontRef>
+        </p:style>
+        <p:txBody>
+          <a:bodyPr rtlCol="0" anchor="ctr"/>
+          <a:lstStyle/>
+          <a:p>
+            <a:pPr algn="ctr"/>
+          </a:p>
+        </p:txBody>
+      </p:sp>
+      <p:sp>
+        <p:nvSpPr>
+          <p:cNvPr id="12" name="TextBox 11"/>
           <p:cNvSpPr txBox="1"/>
           <p:nvPr/>
         </p:nvSpPr>
         <p:spPr>
           <a:xfrm>
-            <a:off x="731520" y="1463040"/>
-            <a:ext cx="10698480" cy="365760"/>
+            <a:off x="8266176" y="1965960"/>
+            <a:ext cx="3236976" cy="3931920"/>
           </a:xfrm>
           <a:prstGeom prst="rect">
             <a:avLst/>
@@ -5408,129 +5860,74 @@
           <a:lstStyle/>
           <a:p>
             <a:pPr>
-              <a:defRPr sz="1300">
-                <a:solidFill>
-                  <a:srgbClr val="94A3B8"/>
-                </a:solidFill>
-              </a:defRPr>
-            </a:pPr>
-            <a:r>
-              <a:t>Moving from 'Physical Waiting' to 'Virtual Queuing' with transparency and predictability.</a:t>
-            </a:r>
-          </a:p>
-        </p:txBody>
-      </p:sp>
-      <p:sp>
-        <p:nvSpPr>
-          <p:cNvPr id="6" name="TextBox 5"/>
-          <p:cNvSpPr txBox="1"/>
-          <p:nvPr/>
-        </p:nvSpPr>
-        <p:spPr>
-          <a:xfrm>
-            <a:off x="731520" y="2103120"/>
-            <a:ext cx="10698480" cy="4114800"/>
-          </a:xfrm>
-          <a:prstGeom prst="rect">
-            <a:avLst/>
-          </a:prstGeom>
-          <a:noFill/>
-        </p:spPr>
-        <p:txBody>
-          <a:bodyPr wrap="square">
-            <a:spAutoFit/>
-          </a:bodyPr>
-          <a:lstStyle/>
+              <a:defRPr sz="1250" b="1">
+                <a:solidFill>
+                  <a:srgbClr val="FFFFFF"/>
+                </a:solidFill>
+              </a:defRPr>
+            </a:pPr>
+            <a:r>
+              <a:t>📺 Public Lobby TV Screen</a:t>
+            </a:r>
+          </a:p>
           <a:p>
             <a:pPr>
               <a:spcBef>
-                <a:spcPts val="0"/>
+                <a:spcPts val="300"/>
               </a:spcBef>
-              <a:defRPr sz="1400" b="1">
-                <a:solidFill>
-                  <a:srgbClr val="38BDF8"/>
-                </a:solidFill>
-              </a:defRPr>
-            </a:pPr>
-            <a:r>
-              <a:t>•  Time Autonomy for Customers: </a:t>
-            </a:r>
-            <a:r>
-              <a:rPr sz="1300" b="0">
-                <a:solidFill>
-                  <a:srgbClr val="F8FAFC"/>
-                </a:solidFill>
-              </a:rPr>
-              <a:t>Freedom to join a queue remotely from home or cafe, run errands nearby, and arrive right when their token is called.</a:t>
+              <a:defRPr sz="950">
+                <a:solidFill>
+                  <a:srgbClr val="CBD5E1"/>
+                </a:solidFill>
+              </a:defRPr>
+            </a:pPr>
+            <a:r>
+              <a:t>•  Fullscreen signage mode at /display/:id on any TV browser.</a:t>
             </a:r>
           </a:p>
           <a:p>
             <a:pPr>
               <a:spcBef>
-                <a:spcPts val="1600"/>
+                <a:spcPts val="300"/>
               </a:spcBef>
-              <a:defRPr sz="1400" b="1">
-                <a:solidFill>
-                  <a:srgbClr val="38BDF8"/>
-                </a:solidFill>
-              </a:defRPr>
-            </a:pPr>
-            <a:r>
-              <a:t>•  Dynamic &amp; Transparent Tracking: </a:t>
-            </a:r>
-            <a:r>
-              <a:rPr sz="1300" b="0">
-                <a:solidFill>
-                  <a:srgbClr val="F8FAFC"/>
-                </a:solidFill>
-              </a:rPr>
-              <a:t>Live updates displaying exact position in line, current counter token, and dynamic wait-time estimation.</a:t>
+              <a:defRPr sz="950">
+                <a:solidFill>
+                  <a:srgbClr val="CBD5E1"/>
+                </a:solidFill>
+              </a:defRPr>
+            </a:pPr>
+            <a:r>
+              <a:t>•  High-contrast current-token cards with active counter badges.</a:t>
             </a:r>
           </a:p>
           <a:p>
             <a:pPr>
               <a:spcBef>
-                <a:spcPts val="1600"/>
+                <a:spcPts val="300"/>
               </a:spcBef>
-              <a:defRPr sz="1400" b="1">
-                <a:solidFill>
-                  <a:srgbClr val="38BDF8"/>
-                </a:solidFill>
-              </a:defRPr>
-            </a:pPr>
-            <a:r>
-              <a:t>•  Smooth Staff Desk Management: </a:t>
-            </a:r>
-            <a:r>
-              <a:rPr sz="1300" b="0">
-                <a:solidFill>
-                  <a:srgbClr val="F8FAFC"/>
-                </a:solidFill>
-              </a:rPr>
-              <a:t>Empower service desks to call next tickets, handle walk-in entries, and manage service categories with 1 click.</a:t>
+              <a:defRPr sz="950">
+                <a:solidFill>
+                  <a:srgbClr val="CBD5E1"/>
+                </a:solidFill>
+              </a:defRPr>
+            </a:pPr>
+            <a:r>
+              <a:t>•  Melodic chime via HTML5 Web Audio API (zero audio files).</a:t>
             </a:r>
           </a:p>
           <a:p>
             <a:pPr>
               <a:spcBef>
-                <a:spcPts val="1600"/>
+                <a:spcPts val="300"/>
               </a:spcBef>
-              <a:defRPr sz="1400" b="1">
-                <a:solidFill>
-                  <a:srgbClr val="38BDF8"/>
-                </a:solidFill>
-              </a:defRPr>
-            </a:pPr>
-            <a:r>
-              <a:t>•  Data-Driven Operations: </a:t>
-            </a:r>
-            <a:r>
-              <a:rPr sz="1300" b="0">
-                <a:solidFill>
-                  <a:srgbClr val="F8FAFC"/>
-                </a:solidFill>
-              </a:rPr>
-              <a:t>Actionable historical metrics on average service duration, daily throughput, and counter bottlenecks to optimize staffing.</a:t>
+              <a:defRPr sz="950">
+                <a:solidFill>
+                  <a:srgbClr val="CBD5E1"/>
+                </a:solidFill>
+              </a:defRPr>
+            </a:pPr>
+            <a:r>
+              <a:t>•  Spoken voice: 'Token 42, Counter 2' via Web Speech API.</a:t>
             </a:r>
           </a:p>
         </p:txBody>
@@ -5568,7 +5965,7 @@
             <a:avLst/>
           </a:prstGeom>
           <a:solidFill>
-            <a:srgbClr val="0F172A"/>
+            <a:srgbClr val="0B1120"/>
           </a:solidFill>
           <a:ln>
             <a:noFill/>
@@ -5598,130 +5995,23 @@
       </p:sp>
       <p:sp>
         <p:nvSpPr>
-          <p:cNvPr id="3" name="TextBox 2"/>
-          <p:cNvSpPr txBox="1"/>
-          <p:nvPr/>
-        </p:nvSpPr>
-        <p:spPr>
-          <a:xfrm>
-            <a:off x="731520" y="548640"/>
-            <a:ext cx="10698480" cy="365760"/>
+          <p:cNvPr id="3" name="Rectangle 2"/>
+          <p:cNvSpPr/>
+          <p:nvPr/>
+        </p:nvSpPr>
+        <p:spPr>
+          <a:xfrm>
+            <a:off x="0" y="0"/>
+            <a:ext cx="12191695" cy="54864"/>
           </a:xfrm>
           <a:prstGeom prst="rect">
             <a:avLst/>
           </a:prstGeom>
-          <a:noFill/>
-        </p:spPr>
-        <p:txBody>
-          <a:bodyPr wrap="square">
-            <a:spAutoFit/>
-          </a:bodyPr>
-          <a:lstStyle/>
-          <a:p>
-            <a:pPr>
-              <a:defRPr sz="1100" b="1">
-                <a:solidFill>
-                  <a:srgbClr val="38BDF8"/>
-                </a:solidFill>
-              </a:defRPr>
-            </a:pPr>
-            <a:r>
-              <a:t>03. THE SOLUTION</a:t>
-            </a:r>
-          </a:p>
-        </p:txBody>
-      </p:sp>
-      <p:sp>
-        <p:nvSpPr>
-          <p:cNvPr id="4" name="TextBox 3"/>
-          <p:cNvSpPr txBox="1"/>
-          <p:nvPr/>
-        </p:nvSpPr>
-        <p:spPr>
-          <a:xfrm>
-            <a:off x="731520" y="822960"/>
-            <a:ext cx="10698480" cy="731520"/>
-          </a:xfrm>
-          <a:prstGeom prst="rect">
-            <a:avLst/>
-          </a:prstGeom>
-          <a:noFill/>
-        </p:spPr>
-        <p:txBody>
-          <a:bodyPr wrap="square">
-            <a:spAutoFit/>
-          </a:bodyPr>
-          <a:lstStyle/>
-          <a:p>
-            <a:pPr>
-              <a:defRPr sz="2600" b="1">
-                <a:solidFill>
-                  <a:srgbClr val="FFFFFF"/>
-                </a:solidFill>
-              </a:defRPr>
-            </a:pPr>
-            <a:r>
-              <a:t>Introducing QueLess: Unified Queue Platform</a:t>
-            </a:r>
-          </a:p>
-        </p:txBody>
-      </p:sp>
-      <p:sp>
-        <p:nvSpPr>
-          <p:cNvPr id="5" name="TextBox 4"/>
-          <p:cNvSpPr txBox="1"/>
-          <p:nvPr/>
-        </p:nvSpPr>
-        <p:spPr>
-          <a:xfrm>
-            <a:off x="731520" y="1463040"/>
-            <a:ext cx="10698480" cy="365760"/>
-          </a:xfrm>
-          <a:prstGeom prst="rect">
-            <a:avLst/>
-          </a:prstGeom>
-          <a:noFill/>
-        </p:spPr>
-        <p:txBody>
-          <a:bodyPr wrap="square">
-            <a:spAutoFit/>
-          </a:bodyPr>
-          <a:lstStyle/>
-          <a:p>
-            <a:pPr>
-              <a:defRPr sz="1300">
-                <a:solidFill>
-                  <a:srgbClr val="94A3B8"/>
-                </a:solidFill>
-              </a:defRPr>
-            </a:pPr>
-            <a:r>
-              <a:t>Connecting customers and service counters through a synchronized digital experience.</a:t>
-            </a:r>
-          </a:p>
-        </p:txBody>
-      </p:sp>
-      <p:sp>
-        <p:nvSpPr>
-          <p:cNvPr id="6" name="Rounded Rectangle 5"/>
-          <p:cNvSpPr/>
-          <p:nvPr/>
-        </p:nvSpPr>
-        <p:spPr>
-          <a:xfrm>
-            <a:off x="731520" y="2103120"/>
-            <a:ext cx="3291840" cy="3931920"/>
-          </a:xfrm>
-          <a:prstGeom prst="roundRect">
-            <a:avLst/>
-          </a:prstGeom>
           <a:solidFill>
-            <a:srgbClr val="1E293B"/>
+            <a:srgbClr val="0D9488"/>
           </a:solidFill>
-          <a:ln w="12700">
-            <a:solidFill>
-              <a:srgbClr val="334155"/>
-            </a:solidFill>
+          <a:ln>
+            <a:noFill/>
           </a:ln>
         </p:spPr>
         <p:style>
@@ -5748,14 +6038,14 @@
       </p:sp>
       <p:sp>
         <p:nvSpPr>
-          <p:cNvPr id="7" name="TextBox 6"/>
+          <p:cNvPr id="4" name="TextBox 3"/>
           <p:cNvSpPr txBox="1"/>
           <p:nvPr/>
         </p:nvSpPr>
         <p:spPr>
           <a:xfrm>
-            <a:off x="868680" y="2240280"/>
-            <a:ext cx="3017520" cy="3657600"/>
+            <a:off x="640080" y="502920"/>
+            <a:ext cx="3657600" cy="292608"/>
           </a:xfrm>
           <a:prstGeom prst="rect">
             <a:avLst/>
@@ -5763,59 +6053,114 @@
           <a:noFill/>
         </p:spPr>
         <p:txBody>
-          <a:bodyPr wrap="square">
+          <a:bodyPr wrap="none">
             <a:spAutoFit/>
           </a:bodyPr>
           <a:lstStyle/>
           <a:p>
             <a:pPr>
-              <a:defRPr sz="1400" b="1">
+              <a:defRPr sz="900" b="1">
+                <a:solidFill>
+                  <a:srgbClr val="38BDF8"/>
+                </a:solidFill>
+              </a:defRPr>
+            </a:pPr>
+            <a:r>
+              <a:t>03 · HOW IT WORKS</a:t>
+            </a:r>
+          </a:p>
+        </p:txBody>
+      </p:sp>
+      <p:sp>
+        <p:nvSpPr>
+          <p:cNvPr id="5" name="TextBox 4"/>
+          <p:cNvSpPr txBox="1"/>
+          <p:nvPr/>
+        </p:nvSpPr>
+        <p:spPr>
+          <a:xfrm>
+            <a:off x="640080" y="804672"/>
+            <a:ext cx="10908792" cy="548640"/>
+          </a:xfrm>
+          <a:prstGeom prst="rect">
+            <a:avLst/>
+          </a:prstGeom>
+          <a:noFill/>
+        </p:spPr>
+        <p:txBody>
+          <a:bodyPr wrap="none">
+            <a:spAutoFit/>
+          </a:bodyPr>
+          <a:lstStyle/>
+          <a:p>
+            <a:pPr>
+              <a:defRPr sz="2400" b="1">
                 <a:solidFill>
                   <a:srgbClr val="FFFFFF"/>
                 </a:solidFill>
               </a:defRPr>
             </a:pPr>
             <a:r>
-              <a:t>🔍 Business Directory</a:t>
-            </a:r>
-          </a:p>
-          <a:p>
-            <a:pPr>
-              <a:spcBef>
-                <a:spcPts val="800"/>
-              </a:spcBef>
+              <a:t>6-Stage Frictionless Journey</a:t>
+            </a:r>
+          </a:p>
+        </p:txBody>
+      </p:sp>
+      <p:sp>
+        <p:nvSpPr>
+          <p:cNvPr id="6" name="TextBox 5"/>
+          <p:cNvSpPr txBox="1"/>
+          <p:nvPr/>
+        </p:nvSpPr>
+        <p:spPr>
+          <a:xfrm>
+            <a:off x="640080" y="1335024"/>
+            <a:ext cx="10908792" cy="320040"/>
+          </a:xfrm>
+          <a:prstGeom prst="rect">
+            <a:avLst/>
+          </a:prstGeom>
+          <a:noFill/>
+        </p:spPr>
+        <p:txBody>
+          <a:bodyPr wrap="none">
+            <a:spAutoFit/>
+          </a:bodyPr>
+          <a:lstStyle/>
+          <a:p>
+            <a:pPr>
               <a:defRPr sz="1100">
                 <a:solidFill>
-                  <a:srgbClr val="94A3B8"/>
-                </a:solidFill>
-              </a:defRPr>
-            </a:pPr>
-            <a:r>
-              <a:t>Explore and filter verified clinics, banks, salons, and offices by type, location, and live queue status.</a:t>
-            </a:r>
-          </a:p>
-        </p:txBody>
-      </p:sp>
-      <p:sp>
-        <p:nvSpPr>
-          <p:cNvPr id="8" name="Rounded Rectangle 7"/>
+                  <a:srgbClr val="64748B"/>
+                </a:solidFill>
+              </a:defRPr>
+            </a:pPr>
+            <a:r>
+              <a:t>From remote discovery to QR-verified service completion — fully synchronised.</a:t>
+            </a:r>
+          </a:p>
+        </p:txBody>
+      </p:sp>
+      <p:sp>
+        <p:nvSpPr>
+          <p:cNvPr id="7" name="Rounded Rectangle 6"/>
           <p:cNvSpPr/>
           <p:nvPr/>
         </p:nvSpPr>
         <p:spPr>
           <a:xfrm>
-            <a:off x="4389120" y="2103120"/>
-            <a:ext cx="3291840" cy="3931920"/>
+            <a:off x="640080" y="1828800"/>
+            <a:ext cx="3566160" cy="1920240"/>
           </a:xfrm>
           <a:prstGeom prst="roundRect">
             <a:avLst/>
           </a:prstGeom>
           <a:solidFill>
-            <a:srgbClr val="1E293B"/>
+            <a:srgbClr val="1A2538"/>
           </a:solidFill>
           <a:ln w="12700">
             <a:solidFill>
-              <a:srgbClr val="334155"/>
+              <a:srgbClr val="2D3E50"/>
             </a:solidFill>
           </a:ln>
         </p:spPr>
@@ -5843,14 +6188,14 @@
       </p:sp>
       <p:sp>
         <p:nvSpPr>
-          <p:cNvPr id="9" name="TextBox 8"/>
+          <p:cNvPr id="8" name="TextBox 7"/>
           <p:cNvSpPr txBox="1"/>
           <p:nvPr/>
         </p:nvSpPr>
         <p:spPr>
           <a:xfrm>
-            <a:off x="4526280" y="2240280"/>
-            <a:ext cx="3017520" cy="3657600"/>
+            <a:off x="786384" y="1938528"/>
+            <a:ext cx="3273552" cy="1700784"/>
           </a:xfrm>
           <a:prstGeom prst="rect">
             <a:avLst/>
@@ -5864,53 +6209,68 @@
           <a:lstStyle/>
           <a:p>
             <a:pPr>
-              <a:defRPr sz="1400" b="1">
+              <a:defRPr sz="850" b="1">
+                <a:solidFill>
+                  <a:srgbClr val="14B8A6"/>
+                </a:solidFill>
+              </a:defRPr>
+            </a:pPr>
+            <a:r>
+              <a:t>STEP 01</a:t>
+            </a:r>
+          </a:p>
+          <a:p>
+            <a:pPr>
+              <a:spcBef>
+                <a:spcPts val="400"/>
+              </a:spcBef>
+              <a:defRPr sz="1200" b="1">
                 <a:solidFill>
                   <a:srgbClr val="FFFFFF"/>
                 </a:solidFill>
               </a:defRPr>
             </a:pPr>
             <a:r>
-              <a:t>🎟️ Dual Booking Mode</a:t>
+              <a:t>🔍 Discover &amp; Select</a:t>
             </a:r>
           </a:p>
           <a:p>
             <a:pPr>
               <a:spcBef>
-                <a:spcPts val="800"/>
+                <a:spcPts val="500"/>
               </a:spcBef>
-              <a:defRPr sz="1100">
-                <a:solidFill>
-                  <a:srgbClr val="94A3B8"/>
-                </a:solidFill>
-              </a:defRPr>
-            </a:pPr>
-            <a:r>
-              <a:t>Choose between booking scheduled calendar appointments or joining the immediate live virtual queue remotely.</a:t>
-            </a:r>
-          </a:p>
-        </p:txBody>
-      </p:sp>
-      <p:sp>
-        <p:nvSpPr>
-          <p:cNvPr id="10" name="Rounded Rectangle 9"/>
+              <a:defRPr sz="950">
+                <a:solidFill>
+                  <a:srgbClr val="CBD5E1"/>
+                </a:solidFill>
+              </a:defRPr>
+            </a:pPr>
+            <a:r>
+              <a:t>Customer finds a clinic, bank, or salon. Views live GPS distance, hours, and current crowd load.</a:t>
+            </a:r>
+          </a:p>
+        </p:txBody>
+      </p:sp>
+      <p:sp>
+        <p:nvSpPr>
+          <p:cNvPr id="9" name="Rounded Rectangle 8"/>
           <p:cNvSpPr/>
           <p:nvPr/>
         </p:nvSpPr>
         <p:spPr>
           <a:xfrm>
-            <a:off x="8046720" y="2103120"/>
-            <a:ext cx="3291840" cy="3931920"/>
+            <a:off x="4370832" y="1828800"/>
+            <a:ext cx="3566160" cy="1920240"/>
           </a:xfrm>
           <a:prstGeom prst="roundRect">
             <a:avLst/>
           </a:prstGeom>
           <a:solidFill>
-            <a:srgbClr val="1E293B"/>
+            <a:srgbClr val="1A2538"/>
           </a:solidFill>
           <a:ln w="12700">
             <a:solidFill>
-              <a:srgbClr val="334155"/>
+              <a:srgbClr val="2D3E50"/>
             </a:solidFill>
           </a:ln>
         </p:spPr>
@@ -5938,14 +6298,14 @@
       </p:sp>
       <p:sp>
         <p:nvSpPr>
-          <p:cNvPr id="11" name="TextBox 10"/>
+          <p:cNvPr id="10" name="TextBox 9"/>
           <p:cNvSpPr txBox="1"/>
           <p:nvPr/>
         </p:nvSpPr>
         <p:spPr>
           <a:xfrm>
-            <a:off x="8183880" y="2240280"/>
-            <a:ext cx="3017520" cy="3657600"/>
+            <a:off x="4517136" y="1938528"/>
+            <a:ext cx="3273552" cy="1700784"/>
           </a:xfrm>
           <a:prstGeom prst="rect">
             <a:avLst/>
@@ -5959,29 +6319,484 @@
           <a:lstStyle/>
           <a:p>
             <a:pPr>
-              <a:defRPr sz="1400" b="1">
+              <a:defRPr sz="850" b="1">
+                <a:solidFill>
+                  <a:srgbClr val="14B8A6"/>
+                </a:solidFill>
+              </a:defRPr>
+            </a:pPr>
+            <a:r>
+              <a:t>STEP 02</a:t>
+            </a:r>
+          </a:p>
+          <a:p>
+            <a:pPr>
+              <a:spcBef>
+                <a:spcPts val="400"/>
+              </a:spcBef>
+              <a:defRPr sz="1200" b="1">
                 <a:solidFill>
                   <a:srgbClr val="FFFFFF"/>
                 </a:solidFill>
               </a:defRPr>
             </a:pPr>
             <a:r>
-              <a:t>🖥️ Staff Desk Console</a:t>
+              <a:t>🎟️ Instant Virtual Token</a:t>
             </a:r>
           </a:p>
           <a:p>
             <a:pPr>
               <a:spcBef>
-                <a:spcPts val="800"/>
+                <a:spcPts val="500"/>
               </a:spcBef>
-              <a:defRPr sz="1100">
-                <a:solidFill>
-                  <a:srgbClr val="94A3B8"/>
-                </a:solidFill>
-              </a:defRPr>
-            </a:pPr>
-            <a:r>
-              <a:t>Full control center for service desks to call next tickets, complete visits, register walk-ins, and inspect analytics.</a:t>
+              <a:defRPr sz="950">
+                <a:solidFill>
+                  <a:srgbClr val="CBD5E1"/>
+                </a:solidFill>
+              </a:defRPr>
+            </a:pPr>
+            <a:r>
+              <a:t>System assigns an atomic sequential token (e.g. A-42) and generates a Digital QR Boarding Pass.</a:t>
+            </a:r>
+          </a:p>
+        </p:txBody>
+      </p:sp>
+      <p:sp>
+        <p:nvSpPr>
+          <p:cNvPr id="11" name="Rounded Rectangle 10"/>
+          <p:cNvSpPr/>
+          <p:nvPr/>
+        </p:nvSpPr>
+        <p:spPr>
+          <a:xfrm>
+            <a:off x="8101584" y="1828800"/>
+            <a:ext cx="3566160" cy="1920240"/>
+          </a:xfrm>
+          <a:prstGeom prst="roundRect">
+            <a:avLst/>
+          </a:prstGeom>
+          <a:solidFill>
+            <a:srgbClr val="1A2538"/>
+          </a:solidFill>
+          <a:ln w="12700">
+            <a:solidFill>
+              <a:srgbClr val="2D3E50"/>
+            </a:solidFill>
+          </a:ln>
+        </p:spPr>
+        <p:style>
+          <a:lnRef idx="1">
+            <a:schemeClr val="accent1"/>
+          </a:lnRef>
+          <a:fillRef idx="3">
+            <a:schemeClr val="accent1"/>
+          </a:fillRef>
+          <a:effectRef idx="2">
+            <a:schemeClr val="accent1"/>
+          </a:effectRef>
+          <a:fontRef idx="minor">
+            <a:schemeClr val="lt1"/>
+          </a:fontRef>
+        </p:style>
+        <p:txBody>
+          <a:bodyPr rtlCol="0" anchor="ctr"/>
+          <a:lstStyle/>
+          <a:p>
+            <a:pPr algn="ctr"/>
+          </a:p>
+        </p:txBody>
+      </p:sp>
+      <p:sp>
+        <p:nvSpPr>
+          <p:cNvPr id="12" name="TextBox 11"/>
+          <p:cNvSpPr txBox="1"/>
+          <p:nvPr/>
+        </p:nvSpPr>
+        <p:spPr>
+          <a:xfrm>
+            <a:off x="8247888" y="1938528"/>
+            <a:ext cx="3273552" cy="1700784"/>
+          </a:xfrm>
+          <a:prstGeom prst="rect">
+            <a:avLst/>
+          </a:prstGeom>
+          <a:noFill/>
+        </p:spPr>
+        <p:txBody>
+          <a:bodyPr wrap="square">
+            <a:spAutoFit/>
+          </a:bodyPr>
+          <a:lstStyle/>
+          <a:p>
+            <a:pPr>
+              <a:defRPr sz="850" b="1">
+                <a:solidFill>
+                  <a:srgbClr val="14B8A6"/>
+                </a:solidFill>
+              </a:defRPr>
+            </a:pPr>
+            <a:r>
+              <a:t>STEP 03</a:t>
+            </a:r>
+          </a:p>
+          <a:p>
+            <a:pPr>
+              <a:spcBef>
+                <a:spcPts val="400"/>
+              </a:spcBef>
+              <a:defRPr sz="1200" b="1">
+                <a:solidFill>
+                  <a:srgbClr val="FFFFFF"/>
+                </a:solidFill>
+              </a:defRPr>
+            </a:pPr>
+            <a:r>
+              <a:t>⏱️ Dynamic Smart ETA</a:t>
+            </a:r>
+          </a:p>
+          <a:p>
+            <a:pPr>
+              <a:spcBef>
+                <a:spcPts val="500"/>
+              </a:spcBef>
+              <a:defRPr sz="950">
+                <a:solidFill>
+                  <a:srgbClr val="CBD5E1"/>
+                </a:solidFill>
+              </a:defRPr>
+            </a:pPr>
+            <a:r>
+              <a:t>Wait time calculated from queue depth, counter speed, and real-time GPS transit duration.</a:t>
+            </a:r>
+          </a:p>
+        </p:txBody>
+      </p:sp>
+      <p:sp>
+        <p:nvSpPr>
+          <p:cNvPr id="13" name="Rounded Rectangle 12"/>
+          <p:cNvSpPr/>
+          <p:nvPr/>
+        </p:nvSpPr>
+        <p:spPr>
+          <a:xfrm>
+            <a:off x="640080" y="3913632"/>
+            <a:ext cx="3566160" cy="1920240"/>
+          </a:xfrm>
+          <a:prstGeom prst="roundRect">
+            <a:avLst/>
+          </a:prstGeom>
+          <a:solidFill>
+            <a:srgbClr val="1A2538"/>
+          </a:solidFill>
+          <a:ln w="12700">
+            <a:solidFill>
+              <a:srgbClr val="2D3E50"/>
+            </a:solidFill>
+          </a:ln>
+        </p:spPr>
+        <p:style>
+          <a:lnRef idx="1">
+            <a:schemeClr val="accent1"/>
+          </a:lnRef>
+          <a:fillRef idx="3">
+            <a:schemeClr val="accent1"/>
+          </a:fillRef>
+          <a:effectRef idx="2">
+            <a:schemeClr val="accent1"/>
+          </a:effectRef>
+          <a:fontRef idx="minor">
+            <a:schemeClr val="lt1"/>
+          </a:fontRef>
+        </p:style>
+        <p:txBody>
+          <a:bodyPr rtlCol="0" anchor="ctr"/>
+          <a:lstStyle/>
+          <a:p>
+            <a:pPr algn="ctr"/>
+          </a:p>
+        </p:txBody>
+      </p:sp>
+      <p:sp>
+        <p:nvSpPr>
+          <p:cNvPr id="14" name="TextBox 13"/>
+          <p:cNvSpPr txBox="1"/>
+          <p:nvPr/>
+        </p:nvSpPr>
+        <p:spPr>
+          <a:xfrm>
+            <a:off x="786384" y="4023360"/>
+            <a:ext cx="3273552" cy="1700784"/>
+          </a:xfrm>
+          <a:prstGeom prst="rect">
+            <a:avLst/>
+          </a:prstGeom>
+          <a:noFill/>
+        </p:spPr>
+        <p:txBody>
+          <a:bodyPr wrap="square">
+            <a:spAutoFit/>
+          </a:bodyPr>
+          <a:lstStyle/>
+          <a:p>
+            <a:pPr>
+              <a:defRPr sz="850" b="1">
+                <a:solidFill>
+                  <a:srgbClr val="14B8A6"/>
+                </a:solidFill>
+              </a:defRPr>
+            </a:pPr>
+            <a:r>
+              <a:t>STEP 04</a:t>
+            </a:r>
+          </a:p>
+          <a:p>
+            <a:pPr>
+              <a:spcBef>
+                <a:spcPts val="400"/>
+              </a:spcBef>
+              <a:defRPr sz="1200" b="1">
+                <a:solidFill>
+                  <a:srgbClr val="FFFFFF"/>
+                </a:solidFill>
+              </a:defRPr>
+            </a:pPr>
+            <a:r>
+              <a:t>🔔 Approaching Alert</a:t>
+            </a:r>
+          </a:p>
+          <a:p>
+            <a:pPr>
+              <a:spcBef>
+                <a:spcPts val="500"/>
+              </a:spcBef>
+              <a:defRPr sz="950">
+                <a:solidFill>
+                  <a:srgbClr val="CBD5E1"/>
+                </a:solidFill>
+              </a:defRPr>
+            </a:pPr>
+            <a:r>
+              <a:t>System auto-alerts customer when 2 tokens remain, prompting them to head to the counter.</a:t>
+            </a:r>
+          </a:p>
+        </p:txBody>
+      </p:sp>
+      <p:sp>
+        <p:nvSpPr>
+          <p:cNvPr id="15" name="Rounded Rectangle 14"/>
+          <p:cNvSpPr/>
+          <p:nvPr/>
+        </p:nvSpPr>
+        <p:spPr>
+          <a:xfrm>
+            <a:off x="4370832" y="3913632"/>
+            <a:ext cx="3566160" cy="1920240"/>
+          </a:xfrm>
+          <a:prstGeom prst="roundRect">
+            <a:avLst/>
+          </a:prstGeom>
+          <a:solidFill>
+            <a:srgbClr val="1A2E3A"/>
+          </a:solidFill>
+          <a:ln w="12700">
+            <a:solidFill>
+              <a:srgbClr val="14B8A6"/>
+            </a:solidFill>
+          </a:ln>
+        </p:spPr>
+        <p:style>
+          <a:lnRef idx="1">
+            <a:schemeClr val="accent1"/>
+          </a:lnRef>
+          <a:fillRef idx="3">
+            <a:schemeClr val="accent1"/>
+          </a:fillRef>
+          <a:effectRef idx="2">
+            <a:schemeClr val="accent1"/>
+          </a:effectRef>
+          <a:fontRef idx="minor">
+            <a:schemeClr val="lt1"/>
+          </a:fontRef>
+        </p:style>
+        <p:txBody>
+          <a:bodyPr rtlCol="0" anchor="ctr"/>
+          <a:lstStyle/>
+          <a:p>
+            <a:pPr algn="ctr"/>
+          </a:p>
+        </p:txBody>
+      </p:sp>
+      <p:sp>
+        <p:nvSpPr>
+          <p:cNvPr id="16" name="TextBox 15"/>
+          <p:cNvSpPr txBox="1"/>
+          <p:nvPr/>
+        </p:nvSpPr>
+        <p:spPr>
+          <a:xfrm>
+            <a:off x="4517136" y="4023360"/>
+            <a:ext cx="3273552" cy="1700784"/>
+          </a:xfrm>
+          <a:prstGeom prst="rect">
+            <a:avLst/>
+          </a:prstGeom>
+          <a:noFill/>
+        </p:spPr>
+        <p:txBody>
+          <a:bodyPr wrap="square">
+            <a:spAutoFit/>
+          </a:bodyPr>
+          <a:lstStyle/>
+          <a:p>
+            <a:pPr>
+              <a:defRPr sz="850" b="1">
+                <a:solidFill>
+                  <a:srgbClr val="14B8A6"/>
+                </a:solidFill>
+              </a:defRPr>
+            </a:pPr>
+            <a:r>
+              <a:t>STEP 05</a:t>
+            </a:r>
+          </a:p>
+          <a:p>
+            <a:pPr>
+              <a:spcBef>
+                <a:spcPts val="400"/>
+              </a:spcBef>
+              <a:defRPr sz="1200" b="1">
+                <a:solidFill>
+                  <a:srgbClr val="14B8A6"/>
+                </a:solidFill>
+              </a:defRPr>
+            </a:pPr>
+            <a:r>
+              <a:t>🔊 Multi-Modal Call</a:t>
+            </a:r>
+          </a:p>
+          <a:p>
+            <a:pPr>
+              <a:spcBef>
+                <a:spcPts val="500"/>
+              </a:spcBef>
+              <a:defRPr sz="950">
+                <a:solidFill>
+                  <a:srgbClr val="CBD5E1"/>
+                </a:solidFill>
+              </a:defRPr>
+            </a:pPr>
+            <a:r>
+              <a:t>Staff taps 'Call Next'. TV flashes token, melodic chime rings, and voice announces the token aloud.</a:t>
+            </a:r>
+          </a:p>
+        </p:txBody>
+      </p:sp>
+      <p:sp>
+        <p:nvSpPr>
+          <p:cNvPr id="17" name="Rounded Rectangle 16"/>
+          <p:cNvSpPr/>
+          <p:nvPr/>
+        </p:nvSpPr>
+        <p:spPr>
+          <a:xfrm>
+            <a:off x="8101584" y="3913632"/>
+            <a:ext cx="3566160" cy="1920240"/>
+          </a:xfrm>
+          <a:prstGeom prst="roundRect">
+            <a:avLst/>
+          </a:prstGeom>
+          <a:solidFill>
+            <a:srgbClr val="1A2538"/>
+          </a:solidFill>
+          <a:ln w="12700">
+            <a:solidFill>
+              <a:srgbClr val="2D3E50"/>
+            </a:solidFill>
+          </a:ln>
+        </p:spPr>
+        <p:style>
+          <a:lnRef idx="1">
+            <a:schemeClr val="accent1"/>
+          </a:lnRef>
+          <a:fillRef idx="3">
+            <a:schemeClr val="accent1"/>
+          </a:fillRef>
+          <a:effectRef idx="2">
+            <a:schemeClr val="accent1"/>
+          </a:effectRef>
+          <a:fontRef idx="minor">
+            <a:schemeClr val="lt1"/>
+          </a:fontRef>
+        </p:style>
+        <p:txBody>
+          <a:bodyPr rtlCol="0" anchor="ctr"/>
+          <a:lstStyle/>
+          <a:p>
+            <a:pPr algn="ctr"/>
+          </a:p>
+        </p:txBody>
+      </p:sp>
+      <p:sp>
+        <p:nvSpPr>
+          <p:cNvPr id="18" name="TextBox 17"/>
+          <p:cNvSpPr txBox="1"/>
+          <p:nvPr/>
+        </p:nvSpPr>
+        <p:spPr>
+          <a:xfrm>
+            <a:off x="8247888" y="4023360"/>
+            <a:ext cx="3273552" cy="1700784"/>
+          </a:xfrm>
+          <a:prstGeom prst="rect">
+            <a:avLst/>
+          </a:prstGeom>
+          <a:noFill/>
+        </p:spPr>
+        <p:txBody>
+          <a:bodyPr wrap="square">
+            <a:spAutoFit/>
+          </a:bodyPr>
+          <a:lstStyle/>
+          <a:p>
+            <a:pPr>
+              <a:defRPr sz="850" b="1">
+                <a:solidFill>
+                  <a:srgbClr val="14B8A6"/>
+                </a:solidFill>
+              </a:defRPr>
+            </a:pPr>
+            <a:r>
+              <a:t>STEP 06</a:t>
+            </a:r>
+          </a:p>
+          <a:p>
+            <a:pPr>
+              <a:spcBef>
+                <a:spcPts val="400"/>
+              </a:spcBef>
+              <a:defRPr sz="1200" b="1">
+                <a:solidFill>
+                  <a:srgbClr val="FFFFFF"/>
+                </a:solidFill>
+              </a:defRPr>
+            </a:pPr>
+            <a:r>
+              <a:t>✅ QR Verify &amp; Close</a:t>
+            </a:r>
+          </a:p>
+          <a:p>
+            <a:pPr>
+              <a:spcBef>
+                <a:spcPts val="500"/>
+              </a:spcBef>
+              <a:defRPr sz="950">
+                <a:solidFill>
+                  <a:srgbClr val="CBD5E1"/>
+                </a:solidFill>
+              </a:defRPr>
+            </a:pPr>
+            <a:r>
+              <a:t>Staff scans the QR pass, completes service, and visit duration logs to the analytics database.</a:t>
             </a:r>
           </a:p>
         </p:txBody>
@@ -6019,7 +6834,7 @@
             <a:avLst/>
           </a:prstGeom>
           <a:solidFill>
-            <a:srgbClr val="0F172A"/>
+            <a:srgbClr val="0B1120"/>
           </a:solidFill>
           <a:ln>
             <a:noFill/>
@@ -6049,130 +6864,23 @@
       </p:sp>
       <p:sp>
         <p:nvSpPr>
-          <p:cNvPr id="3" name="TextBox 2"/>
-          <p:cNvSpPr txBox="1"/>
-          <p:nvPr/>
-        </p:nvSpPr>
-        <p:spPr>
-          <a:xfrm>
-            <a:off x="731520" y="548640"/>
-            <a:ext cx="10698480" cy="365760"/>
+          <p:cNvPr id="3" name="Rectangle 2"/>
+          <p:cNvSpPr/>
+          <p:nvPr/>
+        </p:nvSpPr>
+        <p:spPr>
+          <a:xfrm>
+            <a:off x="0" y="0"/>
+            <a:ext cx="12191695" cy="54864"/>
           </a:xfrm>
           <a:prstGeom prst="rect">
             <a:avLst/>
           </a:prstGeom>
-          <a:noFill/>
-        </p:spPr>
-        <p:txBody>
-          <a:bodyPr wrap="square">
-            <a:spAutoFit/>
-          </a:bodyPr>
-          <a:lstStyle/>
-          <a:p>
-            <a:pPr>
-              <a:defRPr sz="1100" b="1">
-                <a:solidFill>
-                  <a:srgbClr val="38BDF8"/>
-                </a:solidFill>
-              </a:defRPr>
-            </a:pPr>
-            <a:r>
-              <a:t>04. SYSTEM FLOW</a:t>
-            </a:r>
-          </a:p>
-        </p:txBody>
-      </p:sp>
-      <p:sp>
-        <p:nvSpPr>
-          <p:cNvPr id="4" name="TextBox 3"/>
-          <p:cNvSpPr txBox="1"/>
-          <p:nvPr/>
-        </p:nvSpPr>
-        <p:spPr>
-          <a:xfrm>
-            <a:off x="731520" y="822960"/>
-            <a:ext cx="10698480" cy="731520"/>
-          </a:xfrm>
-          <a:prstGeom prst="rect">
-            <a:avLst/>
-          </a:prstGeom>
-          <a:noFill/>
-        </p:spPr>
-        <p:txBody>
-          <a:bodyPr wrap="square">
-            <a:spAutoFit/>
-          </a:bodyPr>
-          <a:lstStyle/>
-          <a:p>
-            <a:pPr>
-              <a:defRPr sz="2600" b="1">
-                <a:solidFill>
-                  <a:srgbClr val="FFFFFF"/>
-                </a:solidFill>
-              </a:defRPr>
-            </a:pPr>
-            <a:r>
-              <a:t>Seamless 4-Step Operational Journey</a:t>
-            </a:r>
-          </a:p>
-        </p:txBody>
-      </p:sp>
-      <p:sp>
-        <p:nvSpPr>
-          <p:cNvPr id="5" name="TextBox 4"/>
-          <p:cNvSpPr txBox="1"/>
-          <p:nvPr/>
-        </p:nvSpPr>
-        <p:spPr>
-          <a:xfrm>
-            <a:off x="731520" y="1463040"/>
-            <a:ext cx="10698480" cy="365760"/>
-          </a:xfrm>
-          <a:prstGeom prst="rect">
-            <a:avLst/>
-          </a:prstGeom>
-          <a:noFill/>
-        </p:spPr>
-        <p:txBody>
-          <a:bodyPr wrap="square">
-            <a:spAutoFit/>
-          </a:bodyPr>
-          <a:lstStyle/>
-          <a:p>
-            <a:pPr>
-              <a:defRPr sz="1300">
-                <a:solidFill>
-                  <a:srgbClr val="94A3B8"/>
-                </a:solidFill>
-              </a:defRPr>
-            </a:pPr>
-            <a:r>
-              <a:t>A friction-free cycle from remote token generation to verified counter service.</a:t>
-            </a:r>
-          </a:p>
-        </p:txBody>
-      </p:sp>
-      <p:sp>
-        <p:nvSpPr>
-          <p:cNvPr id="6" name="Rounded Rectangle 5"/>
-          <p:cNvSpPr/>
-          <p:nvPr/>
-        </p:nvSpPr>
-        <p:spPr>
-          <a:xfrm>
-            <a:off x="731520" y="2103120"/>
-            <a:ext cx="2468880" cy="3931920"/>
-          </a:xfrm>
-          <a:prstGeom prst="roundRect">
-            <a:avLst/>
-          </a:prstGeom>
           <a:solidFill>
-            <a:srgbClr val="1E293B"/>
+            <a:srgbClr val="0D9488"/>
           </a:solidFill>
-          <a:ln w="12700">
-            <a:solidFill>
-              <a:srgbClr val="334155"/>
-            </a:solidFill>
+          <a:ln>
+            <a:noFill/>
           </a:ln>
         </p:spPr>
         <p:style>
@@ -6199,14 +6907,14 @@
       </p:sp>
       <p:sp>
         <p:nvSpPr>
-          <p:cNvPr id="7" name="TextBox 6"/>
+          <p:cNvPr id="4" name="TextBox 3"/>
           <p:cNvSpPr txBox="1"/>
           <p:nvPr/>
         </p:nvSpPr>
         <p:spPr>
           <a:xfrm>
-            <a:off x="868680" y="2240280"/>
-            <a:ext cx="2194560" cy="3657600"/>
+            <a:off x="640080" y="502920"/>
+            <a:ext cx="3657600" cy="292608"/>
           </a:xfrm>
           <a:prstGeom prst="rect">
             <a:avLst/>
@@ -6214,59 +6922,114 @@
           <a:noFill/>
         </p:spPr>
         <p:txBody>
-          <a:bodyPr wrap="square">
+          <a:bodyPr wrap="none">
             <a:spAutoFit/>
           </a:bodyPr>
           <a:lstStyle/>
           <a:p>
             <a:pPr>
-              <a:defRPr sz="1400" b="1">
+              <a:defRPr sz="900" b="1">
+                <a:solidFill>
+                  <a:srgbClr val="38BDF8"/>
+                </a:solidFill>
+              </a:defRPr>
+            </a:pPr>
+            <a:r>
+              <a:t>04 · SYLLABUS ARCHITECTURE &amp; ENGINEERING</a:t>
+            </a:r>
+          </a:p>
+        </p:txBody>
+      </p:sp>
+      <p:sp>
+        <p:nvSpPr>
+          <p:cNvPr id="5" name="TextBox 4"/>
+          <p:cNvSpPr txBox="1"/>
+          <p:nvPr/>
+        </p:nvSpPr>
+        <p:spPr>
+          <a:xfrm>
+            <a:off x="640080" y="804672"/>
+            <a:ext cx="10908792" cy="548640"/>
+          </a:xfrm>
+          <a:prstGeom prst="rect">
+            <a:avLst/>
+          </a:prstGeom>
+          <a:noFill/>
+        </p:spPr>
+        <p:txBody>
+          <a:bodyPr wrap="none">
+            <a:spAutoFit/>
+          </a:bodyPr>
+          <a:lstStyle/>
+          <a:p>
+            <a:pPr>
+              <a:defRPr sz="2400" b="1">
                 <a:solidFill>
                   <a:srgbClr val="FFFFFF"/>
                 </a:solidFill>
               </a:defRPr>
             </a:pPr>
             <a:r>
-              <a:t>📱 01. Discover &amp; Join</a:t>
-            </a:r>
-          </a:p>
-          <a:p>
-            <a:pPr>
-              <a:spcBef>
-                <a:spcPts val="800"/>
-              </a:spcBef>
+              <a:t>React Architecture &amp; Syllabus Alignment</a:t>
+            </a:r>
+          </a:p>
+        </p:txBody>
+      </p:sp>
+      <p:sp>
+        <p:nvSpPr>
+          <p:cNvPr id="6" name="TextBox 5"/>
+          <p:cNvSpPr txBox="1"/>
+          <p:nvPr/>
+        </p:nvSpPr>
+        <p:spPr>
+          <a:xfrm>
+            <a:off x="640080" y="1335024"/>
+            <a:ext cx="10908792" cy="320040"/>
+          </a:xfrm>
+          <a:prstGeom prst="rect">
+            <a:avLst/>
+          </a:prstGeom>
+          <a:noFill/>
+        </p:spPr>
+        <p:txBody>
+          <a:bodyPr wrap="none">
+            <a:spAutoFit/>
+          </a:bodyPr>
+          <a:lstStyle/>
+          <a:p>
+            <a:pPr>
               <a:defRPr sz="1100">
                 <a:solidFill>
-                  <a:srgbClr val="94A3B8"/>
-                </a:solidFill>
-              </a:defRPr>
-            </a:pPr>
-            <a:r>
-              <a:t>Customer selects business service and joins live queue or books a slot remotely.</a:t>
-            </a:r>
-          </a:p>
-        </p:txBody>
-      </p:sp>
-      <p:sp>
-        <p:nvSpPr>
-          <p:cNvPr id="8" name="Rounded Rectangle 7"/>
+                  <a:srgbClr val="64748B"/>
+                </a:solidFill>
+              </a:defRPr>
+            </a:pPr>
+            <a:r>
+              <a:t>Engineered to demonstrate multi-page SPA routing, state architecture, and form handling.</a:t>
+            </a:r>
+          </a:p>
+        </p:txBody>
+      </p:sp>
+      <p:sp>
+        <p:nvSpPr>
+          <p:cNvPr id="7" name="Rounded Rectangle 6"/>
           <p:cNvSpPr/>
           <p:nvPr/>
         </p:nvSpPr>
         <p:spPr>
           <a:xfrm>
-            <a:off x="3474720" y="2103120"/>
-            <a:ext cx="2468880" cy="3931920"/>
+            <a:off x="640080" y="1828800"/>
+            <a:ext cx="5349240" cy="2148840"/>
           </a:xfrm>
           <a:prstGeom prst="roundRect">
             <a:avLst/>
           </a:prstGeom>
           <a:solidFill>
-            <a:srgbClr val="1E293B"/>
+            <a:srgbClr val="1A2E3A"/>
           </a:solidFill>
           <a:ln w="12700">
             <a:solidFill>
-              <a:srgbClr val="334155"/>
+              <a:srgbClr val="14B8A6"/>
             </a:solidFill>
           </a:ln>
         </p:spPr>
@@ -6294,14 +7057,14 @@
       </p:sp>
       <p:sp>
         <p:nvSpPr>
-          <p:cNvPr id="9" name="TextBox 8"/>
+          <p:cNvPr id="8" name="TextBox 7"/>
           <p:cNvSpPr txBox="1"/>
           <p:nvPr/>
         </p:nvSpPr>
         <p:spPr>
           <a:xfrm>
-            <a:off x="3611880" y="2240280"/>
-            <a:ext cx="2194560" cy="3657600"/>
+            <a:off x="804672" y="1965960"/>
+            <a:ext cx="5020056" cy="1874520"/>
           </a:xfrm>
           <a:prstGeom prst="rect">
             <a:avLst/>
@@ -6315,53 +7078,98 @@
           <a:lstStyle/>
           <a:p>
             <a:pPr>
-              <a:defRPr sz="1400" b="1">
-                <a:solidFill>
-                  <a:srgbClr val="FFFFFF"/>
-                </a:solidFill>
-              </a:defRPr>
-            </a:pPr>
-            <a:r>
-              <a:t>⏳ 02. Live Tracking</a:t>
+              <a:defRPr sz="1250" b="1">
+                <a:solidFill>
+                  <a:srgbClr val="14B8A6"/>
+                </a:solidFill>
+              </a:defRPr>
+            </a:pPr>
+            <a:r>
+              <a:t>🧭 Multi-Page SPA Navigation (React Router)</a:t>
             </a:r>
           </a:p>
           <a:p>
             <a:pPr>
               <a:spcBef>
-                <a:spcPts val="800"/>
+                <a:spcPts val="300"/>
               </a:spcBef>
-              <a:defRPr sz="1100">
-                <a:solidFill>
-                  <a:srgbClr val="94A3B8"/>
-                </a:solidFill>
-              </a:defRPr>
-            </a:pPr>
-            <a:r>
-              <a:t>Status updates dynamically: Waiting -&gt; Approaching (Next in line) -&gt; Now Serving.</a:t>
-            </a:r>
-          </a:p>
-        </p:txBody>
-      </p:sp>
-      <p:sp>
-        <p:nvSpPr>
-          <p:cNvPr id="10" name="Rounded Rectangle 9"/>
+              <a:defRPr sz="950">
+                <a:solidFill>
+                  <a:srgbClr val="CBD5E1"/>
+                </a:solidFill>
+              </a:defRPr>
+            </a:pPr>
+            <a:r>
+              <a:t>•  15+ declarative routes with zero page reloads.</a:t>
+            </a:r>
+          </a:p>
+          <a:p>
+            <a:pPr>
+              <a:spcBef>
+                <a:spcPts val="300"/>
+              </a:spcBef>
+              <a:defRPr sz="950">
+                <a:solidFill>
+                  <a:srgbClr val="CBD5E1"/>
+                </a:solidFill>
+              </a:defRPr>
+            </a:pPr>
+            <a:r>
+              <a:t>•  Role guards (&lt;ProtectedRoute /&gt;) for Customer vs Staff.</a:t>
+            </a:r>
+          </a:p>
+          <a:p>
+            <a:pPr>
+              <a:spcBef>
+                <a:spcPts val="300"/>
+              </a:spcBef>
+              <a:defRPr sz="950">
+                <a:solidFill>
+                  <a:srgbClr val="CBD5E1"/>
+                </a:solidFill>
+              </a:defRPr>
+            </a:pPr>
+            <a:r>
+              <a:t>•  Dynamic URL parameters (:businessId, :entryId).</a:t>
+            </a:r>
+          </a:p>
+          <a:p>
+            <a:pPr>
+              <a:spcBef>
+                <a:spcPts val="300"/>
+              </a:spcBef>
+              <a:defRPr sz="950">
+                <a:solidFill>
+                  <a:srgbClr val="CBD5E1"/>
+                </a:solidFill>
+              </a:defRPr>
+            </a:pPr>
+            <a:r>
+              <a:t>•  Standalone /display/:id mode for public TV signage.</a:t>
+            </a:r>
+          </a:p>
+        </p:txBody>
+      </p:sp>
+      <p:sp>
+        <p:nvSpPr>
+          <p:cNvPr id="9" name="Rounded Rectangle 8"/>
           <p:cNvSpPr/>
           <p:nvPr/>
         </p:nvSpPr>
         <p:spPr>
           <a:xfrm>
-            <a:off x="6217920" y="2103120"/>
-            <a:ext cx="2468880" cy="3931920"/>
+            <a:off x="6153912" y="1828800"/>
+            <a:ext cx="5349240" cy="2148840"/>
           </a:xfrm>
           <a:prstGeom prst="roundRect">
             <a:avLst/>
           </a:prstGeom>
           <a:solidFill>
-            <a:srgbClr val="1E293B"/>
+            <a:srgbClr val="1A2538"/>
           </a:solidFill>
           <a:ln w="12700">
             <a:solidFill>
-              <a:srgbClr val="334155"/>
+              <a:srgbClr val="2D3E50"/>
             </a:solidFill>
           </a:ln>
         </p:spPr>
@@ -6389,14 +7197,14 @@
       </p:sp>
       <p:sp>
         <p:nvSpPr>
-          <p:cNvPr id="11" name="TextBox 10"/>
+          <p:cNvPr id="10" name="TextBox 9"/>
           <p:cNvSpPr txBox="1"/>
           <p:nvPr/>
         </p:nvSpPr>
         <p:spPr>
           <a:xfrm>
-            <a:off x="6355080" y="2240280"/>
-            <a:ext cx="2194560" cy="3657600"/>
+            <a:off x="6318504" y="1965960"/>
+            <a:ext cx="5020056" cy="1874520"/>
           </a:xfrm>
           <a:prstGeom prst="rect">
             <a:avLst/>
@@ -6410,53 +7218,98 @@
           <a:lstStyle/>
           <a:p>
             <a:pPr>
-              <a:defRPr sz="1400" b="1">
+              <a:defRPr sz="1250" b="1">
                 <a:solidFill>
                   <a:srgbClr val="FFFFFF"/>
                 </a:solidFill>
               </a:defRPr>
             </a:pPr>
             <a:r>
-              <a:t>🔊 03. Audio &amp; TV Alert</a:t>
+              <a:t>🗄️ State Architecture &amp; Context API</a:t>
             </a:r>
           </a:p>
           <a:p>
             <a:pPr>
               <a:spcBef>
-                <a:spcPts val="800"/>
+                <a:spcPts val="300"/>
               </a:spcBef>
-              <a:defRPr sz="1100">
-                <a:solidFill>
-                  <a:srgbClr val="94A3B8"/>
-                </a:solidFill>
-              </a:defRPr>
-            </a:pPr>
-            <a:r>
-              <a:t>Staff calls next token. Lobby TV display pulses, chime sounds, and voice announces turn.</a:t>
-            </a:r>
-          </a:p>
-        </p:txBody>
-      </p:sp>
-      <p:sp>
-        <p:nvSpPr>
-          <p:cNvPr id="12" name="Rounded Rectangle 11"/>
+              <a:defRPr sz="950">
+                <a:solidFill>
+                  <a:srgbClr val="CBD5E1"/>
+                </a:solidFill>
+              </a:defRPr>
+            </a:pPr>
+            <a:r>
+              <a:t>•  Global State: AuthContext, ThemeContext, ToastContext.</a:t>
+            </a:r>
+          </a:p>
+          <a:p>
+            <a:pPr>
+              <a:spcBef>
+                <a:spcPts val="300"/>
+              </a:spcBef>
+              <a:defRPr sz="950">
+                <a:solidFill>
+                  <a:srgbClr val="CBD5E1"/>
+                </a:solidFill>
+              </a:defRPr>
+            </a:pPr>
+            <a:r>
+              <a:t>•  Zustand-style reactive store (queueStore) via useSyncExternalStore.</a:t>
+            </a:r>
+          </a:p>
+          <a:p>
+            <a:pPr>
+              <a:spcBef>
+                <a:spcPts val="300"/>
+              </a:spcBef>
+              <a:defRPr sz="950">
+                <a:solidFill>
+                  <a:srgbClr val="CBD5E1"/>
+                </a:solidFill>
+              </a:defRPr>
+            </a:pPr>
+            <a:r>
+              <a:t>•  Local State: Form inputs, touched states, timers.</a:t>
+            </a:r>
+          </a:p>
+          <a:p>
+            <a:pPr>
+              <a:spcBef>
+                <a:spcPts val="300"/>
+              </a:spcBef>
+              <a:defRPr sz="950">
+                <a:solidFill>
+                  <a:srgbClr val="CBD5E1"/>
+                </a:solidFill>
+              </a:defRPr>
+            </a:pPr>
+            <a:r>
+              <a:t>•  Strict separation of concern without prop-drilling.</a:t>
+            </a:r>
+          </a:p>
+        </p:txBody>
+      </p:sp>
+      <p:sp>
+        <p:nvSpPr>
+          <p:cNvPr id="11" name="Rounded Rectangle 10"/>
           <p:cNvSpPr/>
           <p:nvPr/>
         </p:nvSpPr>
         <p:spPr>
           <a:xfrm>
-            <a:off x="8961120" y="2103120"/>
-            <a:ext cx="2468880" cy="3931920"/>
+            <a:off x="640080" y="4142232"/>
+            <a:ext cx="5349240" cy="2148840"/>
           </a:xfrm>
           <a:prstGeom prst="roundRect">
             <a:avLst/>
           </a:prstGeom>
           <a:solidFill>
-            <a:srgbClr val="1E293B"/>
+            <a:srgbClr val="1A2E3A"/>
           </a:solidFill>
           <a:ln w="12700">
             <a:solidFill>
-              <a:srgbClr val="334155"/>
+              <a:srgbClr val="14B8A6"/>
             </a:solidFill>
           </a:ln>
         </p:spPr>
@@ -6484,14 +7337,14 @@
       </p:sp>
       <p:sp>
         <p:nvSpPr>
-          <p:cNvPr id="13" name="TextBox 12"/>
+          <p:cNvPr id="12" name="TextBox 11"/>
           <p:cNvSpPr txBox="1"/>
           <p:nvPr/>
         </p:nvSpPr>
         <p:spPr>
           <a:xfrm>
-            <a:off x="9098280" y="2240280"/>
-            <a:ext cx="2194560" cy="3657600"/>
+            <a:off x="804672" y="4279392"/>
+            <a:ext cx="5020056" cy="1874520"/>
           </a:xfrm>
           <a:prstGeom prst="rect">
             <a:avLst/>
@@ -6505,29 +7358,214 @@
           <a:lstStyle/>
           <a:p>
             <a:pPr>
-              <a:defRPr sz="1400" b="1">
+              <a:defRPr sz="1250" b="1">
+                <a:solidFill>
+                  <a:srgbClr val="14B8A6"/>
+                </a:solidFill>
+              </a:defRPr>
+            </a:pPr>
+            <a:r>
+              <a:t>📝 Form Handling &amp; Validation Strategies</a:t>
+            </a:r>
+          </a:p>
+          <a:p>
+            <a:pPr>
+              <a:spcBef>
+                <a:spcPts val="300"/>
+              </a:spcBef>
+              <a:defRPr sz="950">
+                <a:solidFill>
+                  <a:srgbClr val="CBD5E1"/>
+                </a:solidFill>
+              </a:defRPr>
+            </a:pPr>
+            <a:r>
+              <a:t>•  Reusable &lt;FormField /&gt; &amp; &lt;FormSelect /&gt; input components.</a:t>
+            </a:r>
+          </a:p>
+          <a:p>
+            <a:pPr>
+              <a:spcBef>
+                <a:spcPts val="300"/>
+              </a:spcBef>
+              <a:defRPr sz="950">
+                <a:solidFill>
+                  <a:srgbClr val="CBD5E1"/>
+                </a:solidFill>
+              </a:defRPr>
+            </a:pPr>
+            <a:r>
+              <a:t>•  Client-side RFC email regex &amp; 10-digit phone verification.</a:t>
+            </a:r>
+          </a:p>
+          <a:p>
+            <a:pPr>
+              <a:spcBef>
+                <a:spcPts val="300"/>
+              </a:spcBef>
+              <a:defRPr sz="950">
+                <a:solidFill>
+                  <a:srgbClr val="CBD5E1"/>
+                </a:solidFill>
+              </a:defRPr>
+            </a:pPr>
+            <a:r>
+              <a:t>•  Live password complexity evaluator with 4-level strength bar.</a:t>
+            </a:r>
+          </a:p>
+          <a:p>
+            <a:pPr>
+              <a:spcBef>
+                <a:spcPts val="300"/>
+              </a:spcBef>
+              <a:defRPr sz="950">
+                <a:solidFill>
+                  <a:srgbClr val="CBD5E1"/>
+                </a:solidFill>
+              </a:defRPr>
+            </a:pPr>
+            <a:r>
+              <a:t>•  Accessible ARIA error states and real-time touched feedback.</a:t>
+            </a:r>
+          </a:p>
+        </p:txBody>
+      </p:sp>
+      <p:sp>
+        <p:nvSpPr>
+          <p:cNvPr id="13" name="Rounded Rectangle 12"/>
+          <p:cNvSpPr/>
+          <p:nvPr/>
+        </p:nvSpPr>
+        <p:spPr>
+          <a:xfrm>
+            <a:off x="6153912" y="4142232"/>
+            <a:ext cx="5349240" cy="2148840"/>
+          </a:xfrm>
+          <a:prstGeom prst="roundRect">
+            <a:avLst/>
+          </a:prstGeom>
+          <a:solidFill>
+            <a:srgbClr val="1A2538"/>
+          </a:solidFill>
+          <a:ln w="12700">
+            <a:solidFill>
+              <a:srgbClr val="2D3E50"/>
+            </a:solidFill>
+          </a:ln>
+        </p:spPr>
+        <p:style>
+          <a:lnRef idx="1">
+            <a:schemeClr val="accent1"/>
+          </a:lnRef>
+          <a:fillRef idx="3">
+            <a:schemeClr val="accent1"/>
+          </a:fillRef>
+          <a:effectRef idx="2">
+            <a:schemeClr val="accent1"/>
+          </a:effectRef>
+          <a:fontRef idx="minor">
+            <a:schemeClr val="lt1"/>
+          </a:fontRef>
+        </p:style>
+        <p:txBody>
+          <a:bodyPr rtlCol="0" anchor="ctr"/>
+          <a:lstStyle/>
+          <a:p>
+            <a:pPr algn="ctr"/>
+          </a:p>
+        </p:txBody>
+      </p:sp>
+      <p:sp>
+        <p:nvSpPr>
+          <p:cNvPr id="14" name="TextBox 13"/>
+          <p:cNvSpPr txBox="1"/>
+          <p:nvPr/>
+        </p:nvSpPr>
+        <p:spPr>
+          <a:xfrm>
+            <a:off x="6318504" y="4279392"/>
+            <a:ext cx="5020056" cy="1874520"/>
+          </a:xfrm>
+          <a:prstGeom prst="rect">
+            <a:avLst/>
+          </a:prstGeom>
+          <a:noFill/>
+        </p:spPr>
+        <p:txBody>
+          <a:bodyPr wrap="square">
+            <a:spAutoFit/>
+          </a:bodyPr>
+          <a:lstStyle/>
+          <a:p>
+            <a:pPr>
+              <a:defRPr sz="1250" b="1">
                 <a:solidFill>
                   <a:srgbClr val="FFFFFF"/>
                 </a:solidFill>
               </a:defRPr>
             </a:pPr>
             <a:r>
-              <a:t>✅ 04. QR Verify &amp; Finish</a:t>
+              <a:t>⚡ Async State &amp; Error Handling</a:t>
             </a:r>
           </a:p>
           <a:p>
             <a:pPr>
               <a:spcBef>
-                <a:spcPts val="800"/>
+                <a:spcPts val="300"/>
               </a:spcBef>
-              <a:defRPr sz="1100">
-                <a:solidFill>
-                  <a:srgbClr val="94A3B8"/>
-                </a:solidFill>
-              </a:defRPr>
-            </a:pPr>
-            <a:r>
-              <a:t>Staff scans digital QR pass, completes service, and visit logs to audit history automatically.</a:t>
+              <a:defRPr sz="950">
+                <a:solidFill>
+                  <a:srgbClr val="CBD5E1"/>
+                </a:solidFill>
+              </a:defRPr>
+            </a:pPr>
+            <a:r>
+              <a:t>•  &lt;AsyncHandler /&gt; standardizing Loading / Error / Empty / Success.</a:t>
+            </a:r>
+          </a:p>
+          <a:p>
+            <a:pPr>
+              <a:spcBef>
+                <a:spcPts val="300"/>
+              </a:spcBef>
+              <a:defRPr sz="950">
+                <a:solidFill>
+                  <a:srgbClr val="CBD5E1"/>
+                </a:solidFill>
+              </a:defRPr>
+            </a:pPr>
+            <a:r>
+              <a:t>•  React 19 Error Boundary catching render-tree errors.</a:t>
+            </a:r>
+          </a:p>
+          <a:p>
+            <a:pPr>
+              <a:spcBef>
+                <a:spcPts val="300"/>
+              </a:spcBef>
+              <a:defRPr sz="950">
+                <a:solidFill>
+                  <a:srgbClr val="CBD5E1"/>
+                </a:solidFill>
+              </a:defRPr>
+            </a:pPr>
+            <a:r>
+              <a:t>•  Dual-engine fallback: MySQL local + in-browser reactive DB.</a:t>
+            </a:r>
+          </a:p>
+          <a:p>
+            <a:pPr>
+              <a:spcBef>
+                <a:spcPts val="300"/>
+              </a:spcBef>
+              <a:defRPr sz="950">
+                <a:solidFill>
+                  <a:srgbClr val="CBD5E1"/>
+                </a:solidFill>
+              </a:defRPr>
+            </a:pPr>
+            <a:r>
+              <a:t>•  Toast feedback for asynchronous user operations.</a:t>
             </a:r>
           </a:p>
         </p:txBody>
@@ -6565,7 +7603,7 @@
             <a:avLst/>
           </a:prstGeom>
           <a:solidFill>
-            <a:srgbClr val="0F172A"/>
+            <a:srgbClr val="0B1120"/>
           </a:solidFill>
           <a:ln>
             <a:noFill/>
@@ -6595,130 +7633,23 @@
       </p:sp>
       <p:sp>
         <p:nvSpPr>
-          <p:cNvPr id="3" name="TextBox 2"/>
-          <p:cNvSpPr txBox="1"/>
-          <p:nvPr/>
-        </p:nvSpPr>
-        <p:spPr>
-          <a:xfrm>
-            <a:off x="731520" y="548640"/>
-            <a:ext cx="10698480" cy="365760"/>
+          <p:cNvPr id="3" name="Rectangle 2"/>
+          <p:cNvSpPr/>
+          <p:nvPr/>
+        </p:nvSpPr>
+        <p:spPr>
+          <a:xfrm>
+            <a:off x="0" y="0"/>
+            <a:ext cx="12191695" cy="54864"/>
           </a:xfrm>
           <a:prstGeom prst="rect">
             <a:avLst/>
           </a:prstGeom>
-          <a:noFill/>
-        </p:spPr>
-        <p:txBody>
-          <a:bodyPr wrap="square">
-            <a:spAutoFit/>
-          </a:bodyPr>
-          <a:lstStyle/>
-          <a:p>
-            <a:pPr>
-              <a:defRPr sz="1100" b="1">
-                <a:solidFill>
-                  <a:srgbClr val="38BDF8"/>
-                </a:solidFill>
-              </a:defRPr>
-            </a:pPr>
-            <a:r>
-              <a:t>05. KEY INNOVATIONS</a:t>
-            </a:r>
-          </a:p>
-        </p:txBody>
-      </p:sp>
-      <p:sp>
-        <p:nvSpPr>
-          <p:cNvPr id="4" name="TextBox 3"/>
-          <p:cNvSpPr txBox="1"/>
-          <p:nvPr/>
-        </p:nvSpPr>
-        <p:spPr>
-          <a:xfrm>
-            <a:off x="731520" y="822960"/>
-            <a:ext cx="10698480" cy="731520"/>
-          </a:xfrm>
-          <a:prstGeom prst="rect">
-            <a:avLst/>
-          </a:prstGeom>
-          <a:noFill/>
-        </p:spPr>
-        <p:txBody>
-          <a:bodyPr wrap="square">
-            <a:spAutoFit/>
-          </a:bodyPr>
-          <a:lstStyle/>
-          <a:p>
-            <a:pPr>
-              <a:defRPr sz="2600" b="1">
-                <a:solidFill>
-                  <a:srgbClr val="FFFFFF"/>
-                </a:solidFill>
-              </a:defRPr>
-            </a:pPr>
-            <a:r>
-              <a:t>Cutting-Edge Built-in Features</a:t>
-            </a:r>
-          </a:p>
-        </p:txBody>
-      </p:sp>
-      <p:sp>
-        <p:nvSpPr>
-          <p:cNvPr id="5" name="TextBox 4"/>
-          <p:cNvSpPr txBox="1"/>
-          <p:nvPr/>
-        </p:nvSpPr>
-        <p:spPr>
-          <a:xfrm>
-            <a:off x="731520" y="1463040"/>
-            <a:ext cx="10698480" cy="365760"/>
-          </a:xfrm>
-          <a:prstGeom prst="rect">
-            <a:avLst/>
-          </a:prstGeom>
-          <a:noFill/>
-        </p:spPr>
-        <p:txBody>
-          <a:bodyPr wrap="square">
-            <a:spAutoFit/>
-          </a:bodyPr>
-          <a:lstStyle/>
-          <a:p>
-            <a:pPr>
-              <a:defRPr sz="1300">
-                <a:solidFill>
-                  <a:srgbClr val="94A3B8"/>
-                </a:solidFill>
-              </a:defRPr>
-            </a:pPr>
-            <a:r>
-              <a:t>Hardware-free, browser-native capabilities for enterprise-grade performance.</a:t>
-            </a:r>
-          </a:p>
-        </p:txBody>
-      </p:sp>
-      <p:sp>
-        <p:nvSpPr>
-          <p:cNvPr id="6" name="Rounded Rectangle 5"/>
-          <p:cNvSpPr/>
-          <p:nvPr/>
-        </p:nvSpPr>
-        <p:spPr>
-          <a:xfrm>
-            <a:off x="731520" y="2011680"/>
-            <a:ext cx="5120640" cy="1920240"/>
-          </a:xfrm>
-          <a:prstGeom prst="roundRect">
-            <a:avLst/>
-          </a:prstGeom>
           <a:solidFill>
-            <a:srgbClr val="1E293B"/>
+            <a:srgbClr val="0D9488"/>
           </a:solidFill>
-          <a:ln w="12700">
-            <a:solidFill>
-              <a:srgbClr val="334155"/>
-            </a:solidFill>
+          <a:ln>
+            <a:noFill/>
           </a:ln>
         </p:spPr>
         <p:style>
@@ -6745,14 +7676,14 @@
       </p:sp>
       <p:sp>
         <p:nvSpPr>
-          <p:cNvPr id="7" name="TextBox 6"/>
+          <p:cNvPr id="4" name="TextBox 3"/>
           <p:cNvSpPr txBox="1"/>
           <p:nvPr/>
         </p:nvSpPr>
         <p:spPr>
           <a:xfrm>
-            <a:off x="868680" y="2148840"/>
-            <a:ext cx="4846320" cy="1645920"/>
+            <a:off x="640080" y="502920"/>
+            <a:ext cx="3657600" cy="292608"/>
           </a:xfrm>
           <a:prstGeom prst="rect">
             <a:avLst/>
@@ -6760,59 +7691,114 @@
           <a:noFill/>
         </p:spPr>
         <p:txBody>
-          <a:bodyPr wrap="square">
+          <a:bodyPr wrap="none">
             <a:spAutoFit/>
           </a:bodyPr>
           <a:lstStyle/>
           <a:p>
             <a:pPr>
-              <a:defRPr sz="1400" b="1">
+              <a:defRPr sz="900" b="1">
+                <a:solidFill>
+                  <a:srgbClr val="38BDF8"/>
+                </a:solidFill>
+              </a:defRPr>
+            </a:pPr>
+            <a:r>
+              <a:t>05 · IMPACT &amp; USE CASES</a:t>
+            </a:r>
+          </a:p>
+        </p:txBody>
+      </p:sp>
+      <p:sp>
+        <p:nvSpPr>
+          <p:cNvPr id="5" name="TextBox 4"/>
+          <p:cNvSpPr txBox="1"/>
+          <p:nvPr/>
+        </p:nvSpPr>
+        <p:spPr>
+          <a:xfrm>
+            <a:off x="640080" y="804672"/>
+            <a:ext cx="10908792" cy="548640"/>
+          </a:xfrm>
+          <a:prstGeom prst="rect">
+            <a:avLst/>
+          </a:prstGeom>
+          <a:noFill/>
+        </p:spPr>
+        <p:txBody>
+          <a:bodyPr wrap="none">
+            <a:spAutoFit/>
+          </a:bodyPr>
+          <a:lstStyle/>
+          <a:p>
+            <a:pPr>
+              <a:defRPr sz="2400" b="1">
                 <a:solidFill>
                   <a:srgbClr val="FFFFFF"/>
                 </a:solidFill>
               </a:defRPr>
             </a:pPr>
             <a:r>
-              <a:t>📺 Public Waiting Room TV Screen</a:t>
-            </a:r>
-          </a:p>
-          <a:p>
-            <a:pPr>
-              <a:spcBef>
-                <a:spcPts val="800"/>
-              </a:spcBef>
+              <a:t>Measurable Value Across Industries</a:t>
+            </a:r>
+          </a:p>
+        </p:txBody>
+      </p:sp>
+      <p:sp>
+        <p:nvSpPr>
+          <p:cNvPr id="6" name="TextBox 5"/>
+          <p:cNvSpPr txBox="1"/>
+          <p:nvPr/>
+        </p:nvSpPr>
+        <p:spPr>
+          <a:xfrm>
+            <a:off x="640080" y="1335024"/>
+            <a:ext cx="10908792" cy="320040"/>
+          </a:xfrm>
+          <a:prstGeom prst="rect">
+            <a:avLst/>
+          </a:prstGeom>
+          <a:noFill/>
+        </p:spPr>
+        <p:txBody>
+          <a:bodyPr wrap="none">
+            <a:spAutoFit/>
+          </a:bodyPr>
+          <a:lstStyle/>
+          <a:p>
+            <a:pPr>
               <a:defRPr sz="1100">
                 <a:solidFill>
-                  <a:srgbClr val="94A3B8"/>
-                </a:solidFill>
-              </a:defRPr>
-            </a:pPr>
-            <a:r>
-              <a:t>Dedicated fullscreen lobby display (/display/:id) with high-contrast cards, active counter badges, and live queue ticker.</a:t>
-            </a:r>
-          </a:p>
-        </p:txBody>
-      </p:sp>
-      <p:sp>
-        <p:nvSpPr>
-          <p:cNvPr id="8" name="Rounded Rectangle 7"/>
+                  <a:srgbClr val="64748B"/>
+                </a:solidFill>
+              </a:defRPr>
+            </a:pPr>
+            <a:r>
+              <a:t>Immediate ROI on day one — no hardware, no complex setup.</a:t>
+            </a:r>
+          </a:p>
+        </p:txBody>
+      </p:sp>
+      <p:sp>
+        <p:nvSpPr>
+          <p:cNvPr id="7" name="Rounded Rectangle 6"/>
           <p:cNvSpPr/>
           <p:nvPr/>
         </p:nvSpPr>
         <p:spPr>
           <a:xfrm>
-            <a:off x="6217920" y="2011680"/>
-            <a:ext cx="5120640" cy="1920240"/>
+            <a:off x="640080" y="1828800"/>
+            <a:ext cx="2697480" cy="1234440"/>
           </a:xfrm>
           <a:prstGeom prst="roundRect">
             <a:avLst/>
           </a:prstGeom>
           <a:solidFill>
-            <a:srgbClr val="1E293B"/>
+            <a:srgbClr val="1A2538"/>
           </a:solidFill>
           <a:ln w="12700">
             <a:solidFill>
-              <a:srgbClr val="334155"/>
+              <a:srgbClr val="14B8A6"/>
             </a:solidFill>
           </a:ln>
         </p:spPr>
@@ -6840,14 +7826,14 @@
       </p:sp>
       <p:sp>
         <p:nvSpPr>
-          <p:cNvPr id="9" name="TextBox 8"/>
+          <p:cNvPr id="8" name="TextBox 7"/>
           <p:cNvSpPr txBox="1"/>
           <p:nvPr/>
         </p:nvSpPr>
         <p:spPr>
           <a:xfrm>
-            <a:off x="6355080" y="2148840"/>
-            <a:ext cx="4846320" cy="1645920"/>
+            <a:off x="731520" y="1901952"/>
+            <a:ext cx="2514600" cy="1088136"/>
           </a:xfrm>
           <a:prstGeom prst="rect">
             <a:avLst/>
@@ -6860,54 +7846,63 @@
           </a:bodyPr>
           <a:lstStyle/>
           <a:p>
-            <a:pPr>
-              <a:defRPr sz="1400" b="1">
+            <a:pPr algn="ctr">
+              <a:defRPr sz="2200" b="1">
+                <a:solidFill>
+                  <a:srgbClr val="38BDF8"/>
+                </a:solidFill>
+              </a:defRPr>
+            </a:pPr>
+            <a:r>
+              <a:t>65%</a:t>
+            </a:r>
+          </a:p>
+          <a:p>
+            <a:pPr algn="ctr">
+              <a:defRPr sz="1000" b="1">
                 <a:solidFill>
                   <a:srgbClr val="FFFFFF"/>
                 </a:solidFill>
               </a:defRPr>
             </a:pPr>
             <a:r>
-              <a:t>🔊 Voice Engine &amp; Audio Chimes</a:t>
-            </a:r>
-          </a:p>
-          <a:p>
-            <a:pPr>
-              <a:spcBef>
-                <a:spcPts val="800"/>
-              </a:spcBef>
-              <a:defRPr sz="1100">
-                <a:solidFill>
-                  <a:srgbClr val="94A3B8"/>
-                </a:solidFill>
-              </a:defRPr>
-            </a:pPr>
-            <a:r>
-              <a:t>Zero external dependencies. Native Web Audio chimes and Web Speech API announcements ('Token 40, Counter 1').</a:t>
-            </a:r>
-          </a:p>
-        </p:txBody>
-      </p:sp>
-      <p:sp>
-        <p:nvSpPr>
-          <p:cNvPr id="10" name="Rounded Rectangle 9"/>
+              <a:t>Stress Reduction</a:t>
+            </a:r>
+          </a:p>
+          <a:p>
+            <a:pPr algn="ctr">
+              <a:defRPr sz="850">
+                <a:solidFill>
+                  <a:srgbClr val="64748B"/>
+                </a:solidFill>
+              </a:defRPr>
+            </a:pPr>
+            <a:r>
+              <a:t>Perceived wait time drop</a:t>
+            </a:r>
+          </a:p>
+        </p:txBody>
+      </p:sp>
+      <p:sp>
+        <p:nvSpPr>
+          <p:cNvPr id="9" name="Rounded Rectangle 8"/>
           <p:cNvSpPr/>
           <p:nvPr/>
         </p:nvSpPr>
         <p:spPr>
           <a:xfrm>
-            <a:off x="731520" y="4206240"/>
-            <a:ext cx="5120640" cy="1920240"/>
+            <a:off x="3493008" y="1828800"/>
+            <a:ext cx="2697480" cy="1234440"/>
           </a:xfrm>
           <a:prstGeom prst="roundRect">
             <a:avLst/>
           </a:prstGeom>
           <a:solidFill>
-            <a:srgbClr val="1E293B"/>
+            <a:srgbClr val="1A2538"/>
           </a:solidFill>
           <a:ln w="12700">
             <a:solidFill>
-              <a:srgbClr val="334155"/>
+              <a:srgbClr val="14B8A6"/>
             </a:solidFill>
           </a:ln>
         </p:spPr>
@@ -6935,14 +7930,14 @@
       </p:sp>
       <p:sp>
         <p:nvSpPr>
-          <p:cNvPr id="11" name="TextBox 10"/>
+          <p:cNvPr id="10" name="TextBox 9"/>
           <p:cNvSpPr txBox="1"/>
           <p:nvPr/>
         </p:nvSpPr>
         <p:spPr>
           <a:xfrm>
-            <a:off x="868680" y="4343400"/>
-            <a:ext cx="4846320" cy="1645920"/>
+            <a:off x="3584448" y="1901952"/>
+            <a:ext cx="2514600" cy="1088136"/>
           </a:xfrm>
           <a:prstGeom prst="rect">
             <a:avLst/>
@@ -6955,54 +7950,63 @@
           </a:bodyPr>
           <a:lstStyle/>
           <a:p>
-            <a:pPr>
-              <a:defRPr sz="1400" b="1">
+            <a:pPr algn="ctr">
+              <a:defRPr sz="2200" b="1">
+                <a:solidFill>
+                  <a:srgbClr val="38BDF8"/>
+                </a:solidFill>
+              </a:defRPr>
+            </a:pPr>
+            <a:r>
+              <a:t>35%</a:t>
+            </a:r>
+          </a:p>
+          <a:p>
+            <a:pPr algn="ctr">
+              <a:defRPr sz="1000" b="1">
                 <a:solidFill>
                   <a:srgbClr val="FFFFFF"/>
                 </a:solidFill>
               </a:defRPr>
             </a:pPr>
             <a:r>
-              <a:t>📱 Digital QR Code Token Passes</a:t>
-            </a:r>
-          </a:p>
-          <a:p>
-            <a:pPr>
-              <a:spcBef>
-                <a:spcPts val="800"/>
-              </a:spcBef>
-              <a:defRPr sz="1100">
-                <a:solidFill>
-                  <a:srgbClr val="94A3B8"/>
-                </a:solidFill>
-              </a:defRPr>
-            </a:pPr>
-            <a:r>
-              <a:t>Zero-dependency canvas QR code generator displayed on tracking screens for fast counter check-in.</a:t>
-            </a:r>
-          </a:p>
-        </p:txBody>
-      </p:sp>
-      <p:sp>
-        <p:nvSpPr>
-          <p:cNvPr id="12" name="Rounded Rectangle 11"/>
+              <a:t>Higher Throughput</a:t>
+            </a:r>
+          </a:p>
+          <a:p>
+            <a:pPr algn="ctr">
+              <a:defRPr sz="850">
+                <a:solidFill>
+                  <a:srgbClr val="64748B"/>
+                </a:solidFill>
+              </a:defRPr>
+            </a:pPr>
+            <a:r>
+              <a:t>More customers / counter / day</a:t>
+            </a:r>
+          </a:p>
+        </p:txBody>
+      </p:sp>
+      <p:sp>
+        <p:nvSpPr>
+          <p:cNvPr id="11" name="Rounded Rectangle 10"/>
           <p:cNvSpPr/>
           <p:nvPr/>
         </p:nvSpPr>
         <p:spPr>
           <a:xfrm>
-            <a:off x="6217920" y="4206240"/>
-            <a:ext cx="5120640" cy="1920240"/>
+            <a:off x="6345936" y="1828800"/>
+            <a:ext cx="2697480" cy="1234440"/>
           </a:xfrm>
           <a:prstGeom prst="roundRect">
             <a:avLst/>
           </a:prstGeom>
           <a:solidFill>
-            <a:srgbClr val="1E293B"/>
+            <a:srgbClr val="1A2538"/>
           </a:solidFill>
           <a:ln w="12700">
             <a:solidFill>
-              <a:srgbClr val="334155"/>
+              <a:srgbClr val="14B8A6"/>
             </a:solidFill>
           </a:ln>
         </p:spPr>
@@ -7030,14 +8034,14 @@
       </p:sp>
       <p:sp>
         <p:nvSpPr>
-          <p:cNvPr id="13" name="TextBox 12"/>
+          <p:cNvPr id="12" name="TextBox 11"/>
           <p:cNvSpPr txBox="1"/>
           <p:nvPr/>
         </p:nvSpPr>
         <p:spPr>
           <a:xfrm>
-            <a:off x="6355080" y="4343400"/>
-            <a:ext cx="4846320" cy="1645920"/>
+            <a:off x="6437376" y="1901952"/>
+            <a:ext cx="2514600" cy="1088136"/>
           </a:xfrm>
           <a:prstGeom prst="rect">
             <a:avLst/>
@@ -7050,30 +8054,643 @@
           </a:bodyPr>
           <a:lstStyle/>
           <a:p>
-            <a:pPr>
-              <a:defRPr sz="1400" b="1">
+            <a:pPr algn="ctr">
+              <a:defRPr sz="2200" b="1">
+                <a:solidFill>
+                  <a:srgbClr val="38BDF8"/>
+                </a:solidFill>
+              </a:defRPr>
+            </a:pPr>
+            <a:r>
+              <a:t>80%</a:t>
+            </a:r>
+          </a:p>
+          <a:p>
+            <a:pPr algn="ctr">
+              <a:defRPr sz="1000" b="1">
                 <a:solidFill>
                   <a:srgbClr val="FFFFFF"/>
                 </a:solidFill>
               </a:defRPr>
             </a:pPr>
             <a:r>
-              <a:t>🔄 Resilient Dual Data Engine</a:t>
+              <a:t>Inquiry Drop</a:t>
+            </a:r>
+          </a:p>
+          <a:p>
+            <a:pPr algn="ctr">
+              <a:defRPr sz="850">
+                <a:solidFill>
+                  <a:srgbClr val="64748B"/>
+                </a:solidFill>
+              </a:defRPr>
+            </a:pPr>
+            <a:r>
+              <a:t>Fewer 'When is my turn?' calls</a:t>
+            </a:r>
+          </a:p>
+        </p:txBody>
+      </p:sp>
+      <p:sp>
+        <p:nvSpPr>
+          <p:cNvPr id="13" name="Rounded Rectangle 12"/>
+          <p:cNvSpPr/>
+          <p:nvPr/>
+        </p:nvSpPr>
+        <p:spPr>
+          <a:xfrm>
+            <a:off x="9198864" y="1828800"/>
+            <a:ext cx="2697480" cy="1234440"/>
+          </a:xfrm>
+          <a:prstGeom prst="roundRect">
+            <a:avLst/>
+          </a:prstGeom>
+          <a:solidFill>
+            <a:srgbClr val="1A2538"/>
+          </a:solidFill>
+          <a:ln w="12700">
+            <a:solidFill>
+              <a:srgbClr val="14B8A6"/>
+            </a:solidFill>
+          </a:ln>
+        </p:spPr>
+        <p:style>
+          <a:lnRef idx="1">
+            <a:schemeClr val="accent1"/>
+          </a:lnRef>
+          <a:fillRef idx="3">
+            <a:schemeClr val="accent1"/>
+          </a:fillRef>
+          <a:effectRef idx="2">
+            <a:schemeClr val="accent1"/>
+          </a:effectRef>
+          <a:fontRef idx="minor">
+            <a:schemeClr val="lt1"/>
+          </a:fontRef>
+        </p:style>
+        <p:txBody>
+          <a:bodyPr rtlCol="0" anchor="ctr"/>
+          <a:lstStyle/>
+          <a:p>
+            <a:pPr algn="ctr"/>
+          </a:p>
+        </p:txBody>
+      </p:sp>
+      <p:sp>
+        <p:nvSpPr>
+          <p:cNvPr id="14" name="TextBox 13"/>
+          <p:cNvSpPr txBox="1"/>
+          <p:nvPr/>
+        </p:nvSpPr>
+        <p:spPr>
+          <a:xfrm>
+            <a:off x="9290304" y="1901952"/>
+            <a:ext cx="2514600" cy="1088136"/>
+          </a:xfrm>
+          <a:prstGeom prst="rect">
+            <a:avLst/>
+          </a:prstGeom>
+          <a:noFill/>
+        </p:spPr>
+        <p:txBody>
+          <a:bodyPr wrap="square">
+            <a:spAutoFit/>
+          </a:bodyPr>
+          <a:lstStyle/>
+          <a:p>
+            <a:pPr algn="ctr">
+              <a:defRPr sz="2200" b="1">
+                <a:solidFill>
+                  <a:srgbClr val="38BDF8"/>
+                </a:solidFill>
+              </a:defRPr>
+            </a:pPr>
+            <a:r>
+              <a:t>₹0</a:t>
+            </a:r>
+          </a:p>
+          <a:p>
+            <a:pPr algn="ctr">
+              <a:defRPr sz="1000" b="1">
+                <a:solidFill>
+                  <a:srgbClr val="FFFFFF"/>
+                </a:solidFill>
+              </a:defRPr>
+            </a:pPr>
+            <a:r>
+              <a:t>Hardware Cost</a:t>
+            </a:r>
+          </a:p>
+          <a:p>
+            <a:pPr algn="ctr">
+              <a:defRPr sz="850">
+                <a:solidFill>
+                  <a:srgbClr val="64748B"/>
+                </a:solidFill>
+              </a:defRPr>
+            </a:pPr>
+            <a:r>
+              <a:t>Runs on any phone or smart TV</a:t>
+            </a:r>
+          </a:p>
+        </p:txBody>
+      </p:sp>
+      <p:sp>
+        <p:nvSpPr>
+          <p:cNvPr id="15" name="Rounded Rectangle 14"/>
+          <p:cNvSpPr/>
+          <p:nvPr/>
+        </p:nvSpPr>
+        <p:spPr>
+          <a:xfrm>
+            <a:off x="640080" y="3291840"/>
+            <a:ext cx="2697480" cy="2148840"/>
+          </a:xfrm>
+          <a:prstGeom prst="roundRect">
+            <a:avLst/>
+          </a:prstGeom>
+          <a:solidFill>
+            <a:srgbClr val="1A2538"/>
+          </a:solidFill>
+          <a:ln w="12700">
+            <a:solidFill>
+              <a:srgbClr val="2D3E50"/>
+            </a:solidFill>
+          </a:ln>
+        </p:spPr>
+        <p:style>
+          <a:lnRef idx="1">
+            <a:schemeClr val="accent1"/>
+          </a:lnRef>
+          <a:fillRef idx="3">
+            <a:schemeClr val="accent1"/>
+          </a:fillRef>
+          <a:effectRef idx="2">
+            <a:schemeClr val="accent1"/>
+          </a:effectRef>
+          <a:fontRef idx="minor">
+            <a:schemeClr val="lt1"/>
+          </a:fontRef>
+        </p:style>
+        <p:txBody>
+          <a:bodyPr rtlCol="0" anchor="ctr"/>
+          <a:lstStyle/>
+          <a:p>
+            <a:pPr algn="ctr"/>
+          </a:p>
+        </p:txBody>
+      </p:sp>
+      <p:sp>
+        <p:nvSpPr>
+          <p:cNvPr id="16" name="TextBox 15"/>
+          <p:cNvSpPr txBox="1"/>
+          <p:nvPr/>
+        </p:nvSpPr>
+        <p:spPr>
+          <a:xfrm>
+            <a:off x="804672" y="3429000"/>
+            <a:ext cx="2368296" cy="1874520"/>
+          </a:xfrm>
+          <a:prstGeom prst="rect">
+            <a:avLst/>
+          </a:prstGeom>
+          <a:noFill/>
+        </p:spPr>
+        <p:txBody>
+          <a:bodyPr wrap="square">
+            <a:spAutoFit/>
+          </a:bodyPr>
+          <a:lstStyle/>
+          <a:p>
+            <a:pPr>
+              <a:defRPr sz="1250" b="1">
+                <a:solidFill>
+                  <a:srgbClr val="FFFFFF"/>
+                </a:solidFill>
+              </a:defRPr>
+            </a:pPr>
+            <a:r>
+              <a:t>🏥 Healthcare</a:t>
             </a:r>
           </a:p>
           <a:p>
             <a:pPr>
               <a:spcBef>
-                <a:spcPts val="800"/>
+                <a:spcPts val="300"/>
               </a:spcBef>
-              <a:defRPr sz="1100">
-                <a:solidFill>
-                  <a:srgbClr val="94A3B8"/>
-                </a:solidFill>
-              </a:defRPr>
-            </a:pPr>
-            <a:r>
-              <a:t>Full MySQL backend with automatic zero-config fallback to in-browser reactive database on GitHub Pages / offline.</a:t>
+              <a:defRPr sz="950">
+                <a:solidFill>
+                  <a:srgbClr val="CBD5E1"/>
+                </a:solidFill>
+              </a:defRPr>
+            </a:pPr>
+            <a:r>
+              <a:t>•  Triage walk-ins vs OPD appointments.</a:t>
+            </a:r>
+          </a:p>
+          <a:p>
+            <a:pPr>
+              <a:spcBef>
+                <a:spcPts val="300"/>
+              </a:spcBef>
+              <a:defRPr sz="950">
+                <a:solidFill>
+                  <a:srgbClr val="CBD5E1"/>
+                </a:solidFill>
+              </a:defRPr>
+            </a:pPr>
+            <a:r>
+              <a:t>•  Eliminate crowded waiting halls.</a:t>
+            </a:r>
+          </a:p>
+          <a:p>
+            <a:pPr>
+              <a:spcBef>
+                <a:spcPts val="300"/>
+              </a:spcBef>
+              <a:defRPr sz="950">
+                <a:solidFill>
+                  <a:srgbClr val="CBD5E1"/>
+                </a:solidFill>
+              </a:defRPr>
+            </a:pPr>
+            <a:r>
+              <a:t>•  Cut nosocomial infection risks.</a:t>
+            </a:r>
+          </a:p>
+        </p:txBody>
+      </p:sp>
+      <p:sp>
+        <p:nvSpPr>
+          <p:cNvPr id="17" name="Rounded Rectangle 16"/>
+          <p:cNvSpPr/>
+          <p:nvPr/>
+        </p:nvSpPr>
+        <p:spPr>
+          <a:xfrm>
+            <a:off x="3493008" y="3291840"/>
+            <a:ext cx="2697480" cy="2148840"/>
+          </a:xfrm>
+          <a:prstGeom prst="roundRect">
+            <a:avLst/>
+          </a:prstGeom>
+          <a:solidFill>
+            <a:srgbClr val="1A2538"/>
+          </a:solidFill>
+          <a:ln w="12700">
+            <a:solidFill>
+              <a:srgbClr val="2D3E50"/>
+            </a:solidFill>
+          </a:ln>
+        </p:spPr>
+        <p:style>
+          <a:lnRef idx="1">
+            <a:schemeClr val="accent1"/>
+          </a:lnRef>
+          <a:fillRef idx="3">
+            <a:schemeClr val="accent1"/>
+          </a:fillRef>
+          <a:effectRef idx="2">
+            <a:schemeClr val="accent1"/>
+          </a:effectRef>
+          <a:fontRef idx="minor">
+            <a:schemeClr val="lt1"/>
+          </a:fontRef>
+        </p:style>
+        <p:txBody>
+          <a:bodyPr rtlCol="0" anchor="ctr"/>
+          <a:lstStyle/>
+          <a:p>
+            <a:pPr algn="ctr"/>
+          </a:p>
+        </p:txBody>
+      </p:sp>
+      <p:sp>
+        <p:nvSpPr>
+          <p:cNvPr id="18" name="TextBox 17"/>
+          <p:cNvSpPr txBox="1"/>
+          <p:nvPr/>
+        </p:nvSpPr>
+        <p:spPr>
+          <a:xfrm>
+            <a:off x="3657600" y="3429000"/>
+            <a:ext cx="2368296" cy="1874520"/>
+          </a:xfrm>
+          <a:prstGeom prst="rect">
+            <a:avLst/>
+          </a:prstGeom>
+          <a:noFill/>
+        </p:spPr>
+        <p:txBody>
+          <a:bodyPr wrap="square">
+            <a:spAutoFit/>
+          </a:bodyPr>
+          <a:lstStyle/>
+          <a:p>
+            <a:pPr>
+              <a:defRPr sz="1250" b="1">
+                <a:solidFill>
+                  <a:srgbClr val="FFFFFF"/>
+                </a:solidFill>
+              </a:defRPr>
+            </a:pPr>
+            <a:r>
+              <a:t>🏦 Banking</a:t>
+            </a:r>
+          </a:p>
+          <a:p>
+            <a:pPr>
+              <a:spcBef>
+                <a:spcPts val="300"/>
+              </a:spcBef>
+              <a:defRPr sz="950">
+                <a:solidFill>
+                  <a:srgbClr val="CBD5E1"/>
+                </a:solidFill>
+              </a:defRPr>
+            </a:pPr>
+            <a:r>
+              <a:t>•  Route customers across Cashier, Loan, Account desks.</a:t>
+            </a:r>
+          </a:p>
+          <a:p>
+            <a:pPr>
+              <a:spcBef>
+                <a:spcPts val="300"/>
+              </a:spcBef>
+              <a:defRPr sz="950">
+                <a:solidFill>
+                  <a:srgbClr val="CBD5E1"/>
+                </a:solidFill>
+              </a:defRPr>
+            </a:pPr>
+            <a:r>
+              <a:t>•  Multi-counter queue routing.</a:t>
+            </a:r>
+          </a:p>
+          <a:p>
+            <a:pPr>
+              <a:spcBef>
+                <a:spcPts val="300"/>
+              </a:spcBef>
+              <a:defRPr sz="950">
+                <a:solidFill>
+                  <a:srgbClr val="CBD5E1"/>
+                </a:solidFill>
+              </a:defRPr>
+            </a:pPr>
+            <a:r>
+              <a:t>•  Full digital audit trail.</a:t>
+            </a:r>
+          </a:p>
+        </p:txBody>
+      </p:sp>
+      <p:sp>
+        <p:nvSpPr>
+          <p:cNvPr id="19" name="Rounded Rectangle 18"/>
+          <p:cNvSpPr/>
+          <p:nvPr/>
+        </p:nvSpPr>
+        <p:spPr>
+          <a:xfrm>
+            <a:off x="6345936" y="3291840"/>
+            <a:ext cx="2697480" cy="2148840"/>
+          </a:xfrm>
+          <a:prstGeom prst="roundRect">
+            <a:avLst/>
+          </a:prstGeom>
+          <a:solidFill>
+            <a:srgbClr val="1A2538"/>
+          </a:solidFill>
+          <a:ln w="12700">
+            <a:solidFill>
+              <a:srgbClr val="2D3E50"/>
+            </a:solidFill>
+          </a:ln>
+        </p:spPr>
+        <p:style>
+          <a:lnRef idx="1">
+            <a:schemeClr val="accent1"/>
+          </a:lnRef>
+          <a:fillRef idx="3">
+            <a:schemeClr val="accent1"/>
+          </a:fillRef>
+          <a:effectRef idx="2">
+            <a:schemeClr val="accent1"/>
+          </a:effectRef>
+          <a:fontRef idx="minor">
+            <a:schemeClr val="lt1"/>
+          </a:fontRef>
+        </p:style>
+        <p:txBody>
+          <a:bodyPr rtlCol="0" anchor="ctr"/>
+          <a:lstStyle/>
+          <a:p>
+            <a:pPr algn="ctr"/>
+          </a:p>
+        </p:txBody>
+      </p:sp>
+      <p:sp>
+        <p:nvSpPr>
+          <p:cNvPr id="20" name="TextBox 19"/>
+          <p:cNvSpPr txBox="1"/>
+          <p:nvPr/>
+        </p:nvSpPr>
+        <p:spPr>
+          <a:xfrm>
+            <a:off x="6510528" y="3429000"/>
+            <a:ext cx="2368296" cy="1874520"/>
+          </a:xfrm>
+          <a:prstGeom prst="rect">
+            <a:avLst/>
+          </a:prstGeom>
+          <a:noFill/>
+        </p:spPr>
+        <p:txBody>
+          <a:bodyPr wrap="square">
+            <a:spAutoFit/>
+          </a:bodyPr>
+          <a:lstStyle/>
+          <a:p>
+            <a:pPr>
+              <a:defRPr sz="1250" b="1">
+                <a:solidFill>
+                  <a:srgbClr val="FFFFFF"/>
+                </a:solidFill>
+              </a:defRPr>
+            </a:pPr>
+            <a:r>
+              <a:t>💇 Salons &amp; Spas</a:t>
+            </a:r>
+          </a:p>
+          <a:p>
+            <a:pPr>
+              <a:spcBef>
+                <a:spcPts val="300"/>
+              </a:spcBef>
+              <a:defRPr sz="950">
+                <a:solidFill>
+                  <a:srgbClr val="CBD5E1"/>
+                </a:solidFill>
+              </a:defRPr>
+            </a:pPr>
+            <a:r>
+              <a:t>•  Clients wait comfortably in nearby cafes.</a:t>
+            </a:r>
+          </a:p>
+          <a:p>
+            <a:pPr>
+              <a:spcBef>
+                <a:spcPts val="300"/>
+              </a:spcBef>
+              <a:defRPr sz="950">
+                <a:solidFill>
+                  <a:srgbClr val="CBD5E1"/>
+                </a:solidFill>
+              </a:defRPr>
+            </a:pPr>
+            <a:r>
+              <a:t>•  Accurate service duration estimates.</a:t>
+            </a:r>
+          </a:p>
+          <a:p>
+            <a:pPr>
+              <a:spcBef>
+                <a:spcPts val="300"/>
+              </a:spcBef>
+              <a:defRPr sz="950">
+                <a:solidFill>
+                  <a:srgbClr val="CBD5E1"/>
+                </a:solidFill>
+              </a:defRPr>
+            </a:pPr>
+            <a:r>
+              <a:t>•  Eliminates scheduling overlaps.</a:t>
+            </a:r>
+          </a:p>
+        </p:txBody>
+      </p:sp>
+      <p:sp>
+        <p:nvSpPr>
+          <p:cNvPr id="21" name="Rounded Rectangle 20"/>
+          <p:cNvSpPr/>
+          <p:nvPr/>
+        </p:nvSpPr>
+        <p:spPr>
+          <a:xfrm>
+            <a:off x="9198864" y="3291840"/>
+            <a:ext cx="2697480" cy="2148840"/>
+          </a:xfrm>
+          <a:prstGeom prst="roundRect">
+            <a:avLst/>
+          </a:prstGeom>
+          <a:solidFill>
+            <a:srgbClr val="1A2E3A"/>
+          </a:solidFill>
+          <a:ln w="12700">
+            <a:solidFill>
+              <a:srgbClr val="14B8A6"/>
+            </a:solidFill>
+          </a:ln>
+        </p:spPr>
+        <p:style>
+          <a:lnRef idx="1">
+            <a:schemeClr val="accent1"/>
+          </a:lnRef>
+          <a:fillRef idx="3">
+            <a:schemeClr val="accent1"/>
+          </a:fillRef>
+          <a:effectRef idx="2">
+            <a:schemeClr val="accent1"/>
+          </a:effectRef>
+          <a:fontRef idx="minor">
+            <a:schemeClr val="lt1"/>
+          </a:fontRef>
+        </p:style>
+        <p:txBody>
+          <a:bodyPr rtlCol="0" anchor="ctr"/>
+          <a:lstStyle/>
+          <a:p>
+            <a:pPr algn="ctr"/>
+          </a:p>
+        </p:txBody>
+      </p:sp>
+      <p:sp>
+        <p:nvSpPr>
+          <p:cNvPr id="22" name="TextBox 21"/>
+          <p:cNvSpPr txBox="1"/>
+          <p:nvPr/>
+        </p:nvSpPr>
+        <p:spPr>
+          <a:xfrm>
+            <a:off x="9363456" y="3429000"/>
+            <a:ext cx="2368296" cy="1874520"/>
+          </a:xfrm>
+          <a:prstGeom prst="rect">
+            <a:avLst/>
+          </a:prstGeom>
+          <a:noFill/>
+        </p:spPr>
+        <p:txBody>
+          <a:bodyPr wrap="square">
+            <a:spAutoFit/>
+          </a:bodyPr>
+          <a:lstStyle/>
+          <a:p>
+            <a:pPr>
+              <a:defRPr sz="1250" b="1">
+                <a:solidFill>
+                  <a:srgbClr val="14B8A6"/>
+                </a:solidFill>
+              </a:defRPr>
+            </a:pPr>
+            <a:r>
+              <a:t>🏛️ Govt. Offices</a:t>
+            </a:r>
+          </a:p>
+          <a:p>
+            <a:pPr>
+              <a:spcBef>
+                <a:spcPts val="300"/>
+              </a:spcBef>
+              <a:defRPr sz="950">
+                <a:solidFill>
+                  <a:srgbClr val="CBD5E1"/>
+                </a:solidFill>
+              </a:defRPr>
+            </a:pPr>
+            <a:r>
+              <a:t>•  Handle high-volume citizen services.</a:t>
+            </a:r>
+          </a:p>
+          <a:p>
+            <a:pPr>
+              <a:spcBef>
+                <a:spcPts val="300"/>
+              </a:spcBef>
+              <a:defRPr sz="950">
+                <a:solidFill>
+                  <a:srgbClr val="CBD5E1"/>
+                </a:solidFill>
+              </a:defRPr>
+            </a:pPr>
+            <a:r>
+              <a:t>•  Fullscreen TV + voice announcement mode.</a:t>
+            </a:r>
+          </a:p>
+          <a:p>
+            <a:pPr>
+              <a:spcBef>
+                <a:spcPts val="300"/>
+              </a:spcBef>
+              <a:defRPr sz="950">
+                <a:solidFill>
+                  <a:srgbClr val="CBD5E1"/>
+                </a:solidFill>
+              </a:defRPr>
+            </a:pPr>
+            <a:r>
+              <a:t>•  Complete fairness audit log.</a:t>
             </a:r>
           </a:p>
         </p:txBody>
@@ -7111,7 +8728,7 @@
             <a:avLst/>
           </a:prstGeom>
           <a:solidFill>
-            <a:srgbClr val="0F172A"/>
+            <a:srgbClr val="0B1120"/>
           </a:solidFill>
           <a:ln>
             <a:noFill/>
@@ -7141,130 +8758,23 @@
       </p:sp>
       <p:sp>
         <p:nvSpPr>
-          <p:cNvPr id="3" name="TextBox 2"/>
-          <p:cNvSpPr txBox="1"/>
-          <p:nvPr/>
-        </p:nvSpPr>
-        <p:spPr>
-          <a:xfrm>
-            <a:off x="731520" y="548640"/>
-            <a:ext cx="10698480" cy="365760"/>
+          <p:cNvPr id="3" name="Rectangle 2"/>
+          <p:cNvSpPr/>
+          <p:nvPr/>
+        </p:nvSpPr>
+        <p:spPr>
+          <a:xfrm>
+            <a:off x="0" y="0"/>
+            <a:ext cx="12191695" cy="54864"/>
           </a:xfrm>
           <a:prstGeom prst="rect">
             <a:avLst/>
           </a:prstGeom>
-          <a:noFill/>
-        </p:spPr>
-        <p:txBody>
-          <a:bodyPr wrap="square">
-            <a:spAutoFit/>
-          </a:bodyPr>
-          <a:lstStyle/>
-          <a:p>
-            <a:pPr>
-              <a:defRPr sz="1100" b="1">
-                <a:solidFill>
-                  <a:srgbClr val="38BDF8"/>
-                </a:solidFill>
-              </a:defRPr>
-            </a:pPr>
-            <a:r>
-              <a:t>06. ARCHITECTURE</a:t>
-            </a:r>
-          </a:p>
-        </p:txBody>
-      </p:sp>
-      <p:sp>
-        <p:nvSpPr>
-          <p:cNvPr id="4" name="TextBox 3"/>
-          <p:cNvSpPr txBox="1"/>
-          <p:nvPr/>
-        </p:nvSpPr>
-        <p:spPr>
-          <a:xfrm>
-            <a:off x="731520" y="822960"/>
-            <a:ext cx="10698480" cy="731520"/>
-          </a:xfrm>
-          <a:prstGeom prst="rect">
-            <a:avLst/>
-          </a:prstGeom>
-          <a:noFill/>
-        </p:spPr>
-        <p:txBody>
-          <a:bodyPr wrap="square">
-            <a:spAutoFit/>
-          </a:bodyPr>
-          <a:lstStyle/>
-          <a:p>
-            <a:pPr>
-              <a:defRPr sz="2600" b="1">
-                <a:solidFill>
-                  <a:srgbClr val="FFFFFF"/>
-                </a:solidFill>
-              </a:defRPr>
-            </a:pPr>
-            <a:r>
-              <a:t>Modern &amp; Scalable Technology Stack</a:t>
-            </a:r>
-          </a:p>
-        </p:txBody>
-      </p:sp>
-      <p:sp>
-        <p:nvSpPr>
-          <p:cNvPr id="5" name="TextBox 4"/>
-          <p:cNvSpPr txBox="1"/>
-          <p:nvPr/>
-        </p:nvSpPr>
-        <p:spPr>
-          <a:xfrm>
-            <a:off x="731520" y="1463040"/>
-            <a:ext cx="10698480" cy="365760"/>
-          </a:xfrm>
-          <a:prstGeom prst="rect">
-            <a:avLst/>
-          </a:prstGeom>
-          <a:noFill/>
-        </p:spPr>
-        <p:txBody>
-          <a:bodyPr wrap="square">
-            <a:spAutoFit/>
-          </a:bodyPr>
-          <a:lstStyle/>
-          <a:p>
-            <a:pPr>
-              <a:defRPr sz="1300">
-                <a:solidFill>
-                  <a:srgbClr val="94A3B8"/>
-                </a:solidFill>
-              </a:defRPr>
-            </a:pPr>
-            <a:r>
-              <a:t>Engineered for rapid responsiveness, zero bloat, and cross-platform flexibility.</a:t>
-            </a:r>
-          </a:p>
-        </p:txBody>
-      </p:sp>
-      <p:sp>
-        <p:nvSpPr>
-          <p:cNvPr id="6" name="Rounded Rectangle 5"/>
-          <p:cNvSpPr/>
-          <p:nvPr/>
-        </p:nvSpPr>
-        <p:spPr>
-          <a:xfrm>
-            <a:off x="731520" y="2103120"/>
-            <a:ext cx="3291840" cy="3931920"/>
-          </a:xfrm>
-          <a:prstGeom prst="roundRect">
-            <a:avLst/>
-          </a:prstGeom>
           <a:solidFill>
-            <a:srgbClr val="1E293B"/>
+            <a:srgbClr val="0D9488"/>
           </a:solidFill>
-          <a:ln w="12700">
-            <a:solidFill>
-              <a:srgbClr val="334155"/>
-            </a:solidFill>
+          <a:ln>
+            <a:noFill/>
           </a:ln>
         </p:spPr>
         <p:style>
@@ -7291,94 +8801,24 @@
       </p:sp>
       <p:sp>
         <p:nvSpPr>
-          <p:cNvPr id="7" name="TextBox 6"/>
-          <p:cNvSpPr txBox="1"/>
-          <p:nvPr/>
-        </p:nvSpPr>
-        <p:spPr>
-          <a:xfrm>
-            <a:off x="868680" y="2240280"/>
-            <a:ext cx="3017520" cy="3657600"/>
-          </a:xfrm>
-          <a:prstGeom prst="rect">
-            <a:avLst/>
-          </a:prstGeom>
-          <a:noFill/>
-        </p:spPr>
-        <p:txBody>
-          <a:bodyPr wrap="square">
-            <a:spAutoFit/>
-          </a:bodyPr>
-          <a:lstStyle/>
-          <a:p>
-            <a:pPr>
-              <a:defRPr sz="1400" b="1">
-                <a:solidFill>
-                  <a:srgbClr val="FFFFFF"/>
-                </a:solidFill>
-              </a:defRPr>
-            </a:pPr>
-            <a:r>
-              <a:t>⚛️ Frontend Tier</a:t>
-            </a:r>
-          </a:p>
-          <a:p>
-            <a:pPr>
-              <a:spcBef>
-                <a:spcPts val="800"/>
-              </a:spcBef>
-              <a:defRPr sz="1100">
-                <a:solidFill>
-                  <a:srgbClr val="94A3B8"/>
-                </a:solidFill>
-              </a:defRPr>
-            </a:pPr>
-            <a:r>
-              <a:t>• React 19 &amp; Vite 7</a:t>
-            </a:r>
-            <a:br/>
-            <a:r>
-              <a:t>• Lucide React Icons</a:t>
-            </a:r>
-            <a:br/>
-            <a:r>
-              <a:t>• React Router v7</a:t>
-            </a:r>
-            <a:br/>
-            <a:r>
-              <a:t>• Glassmorphic CSS Theme</a:t>
-            </a:r>
-            <a:br/>
-            <a:r>
-              <a:t>• React Error Boundaries</a:t>
-            </a:r>
-            <a:br/>
-            <a:r>
-              <a:t>• PWA Manifest Support</a:t>
-            </a:r>
-          </a:p>
-        </p:txBody>
-      </p:sp>
-      <p:sp>
-        <p:nvSpPr>
-          <p:cNvPr id="8" name="Rounded Rectangle 7"/>
+          <p:cNvPr id="4" name="Rounded Rectangle 3"/>
           <p:cNvSpPr/>
           <p:nvPr/>
         </p:nvSpPr>
         <p:spPr>
           <a:xfrm>
-            <a:off x="4389120" y="2103120"/>
-            <a:ext cx="3291840" cy="3931920"/>
+            <a:off x="3657600" y="914400"/>
+            <a:ext cx="4846320" cy="365760"/>
           </a:xfrm>
           <a:prstGeom prst="roundRect">
             <a:avLst/>
           </a:prstGeom>
           <a:solidFill>
-            <a:srgbClr val="1E293B"/>
+            <a:srgbClr val="122837"/>
           </a:solidFill>
           <a:ln w="12700">
             <a:solidFill>
-              <a:srgbClr val="334155"/>
+              <a:srgbClr val="0D9488"/>
             </a:solidFill>
           </a:ln>
         </p:spPr>
@@ -7400,20 +8840,29 @@
           <a:bodyPr rtlCol="0" anchor="ctr"/>
           <a:lstStyle/>
           <a:p>
-            <a:pPr algn="ctr"/>
-          </a:p>
-        </p:txBody>
-      </p:sp>
-      <p:sp>
-        <p:nvSpPr>
-          <p:cNvPr id="9" name="TextBox 8"/>
+            <a:pPr algn="ctr">
+              <a:defRPr sz="900" b="1">
+                <a:solidFill>
+                  <a:srgbClr val="14B8A6"/>
+                </a:solidFill>
+              </a:defRPr>
+            </a:pPr>
+            <a:r>
+              <a:t>✨  FULL-STACK CAPSTONE — COMPLETE &amp; PRODUCTION-READY</a:t>
+            </a:r>
+          </a:p>
+        </p:txBody>
+      </p:sp>
+      <p:sp>
+        <p:nvSpPr>
+          <p:cNvPr id="5" name="TextBox 4"/>
           <p:cNvSpPr txBox="1"/>
           <p:nvPr/>
         </p:nvSpPr>
         <p:spPr>
           <a:xfrm>
-            <a:off x="4526280" y="2240280"/>
-            <a:ext cx="3017520" cy="3657600"/>
+            <a:off x="822960" y="1463040"/>
+            <a:ext cx="10515600" cy="1005840"/>
           </a:xfrm>
           <a:prstGeom prst="rect">
             <a:avLst/>
@@ -7426,74 +8875,74 @@
           </a:bodyPr>
           <a:lstStyle/>
           <a:p>
-            <a:pPr>
-              <a:defRPr sz="1400" b="1">
+            <a:pPr algn="ctr">
+              <a:defRPr sz="2600" b="1">
                 <a:solidFill>
                   <a:srgbClr val="FFFFFF"/>
                 </a:solidFill>
               </a:defRPr>
             </a:pPr>
             <a:r>
-              <a:t>🚀 Backend API</a:t>
-            </a:r>
-          </a:p>
-          <a:p>
-            <a:pPr>
-              <a:spcBef>
-                <a:spcPts val="800"/>
-              </a:spcBef>
-              <a:defRPr sz="1100">
-                <a:solidFill>
-                  <a:srgbClr val="94A3B8"/>
-                </a:solidFill>
-              </a:defRPr>
-            </a:pPr>
-            <a:r>
-              <a:t>• Node.js &amp; Express</a:t>
-            </a:r>
-            <a:br/>
-            <a:r>
-              <a:t>• JWT Token Authentication</a:t>
-            </a:r>
-            <a:br/>
-            <a:r>
-              <a:t>• Role-based Access Control</a:t>
-            </a:r>
-            <a:br/>
-            <a:r>
-              <a:t>• Dynamic Wait-Time Service</a:t>
-            </a:r>
-            <a:br/>
-            <a:r>
-              <a:t>• Structured Error Handlers</a:t>
-            </a:r>
-            <a:br/>
-            <a:r>
-              <a:t>• RESTful Endpoints</a:t>
-            </a:r>
-          </a:p>
-        </p:txBody>
-      </p:sp>
-      <p:sp>
-        <p:nvSpPr>
-          <p:cNvPr id="10" name="Rounded Rectangle 9"/>
+              <a:t>QueLess bridges physical reality with digital convenience.</a:t>
+            </a:r>
+          </a:p>
+        </p:txBody>
+      </p:sp>
+      <p:sp>
+        <p:nvSpPr>
+          <p:cNvPr id="6" name="TextBox 5"/>
+          <p:cNvSpPr txBox="1"/>
+          <p:nvPr/>
+        </p:nvSpPr>
+        <p:spPr>
+          <a:xfrm>
+            <a:off x="1097280" y="2423160"/>
+            <a:ext cx="9966960" cy="457200"/>
+          </a:xfrm>
+          <a:prstGeom prst="rect">
+            <a:avLst/>
+          </a:prstGeom>
+          <a:noFill/>
+        </p:spPr>
+        <p:txBody>
+          <a:bodyPr wrap="none">
+            <a:spAutoFit/>
+          </a:bodyPr>
+          <a:lstStyle/>
+          <a:p>
+            <a:pPr algn="ctr">
+              <a:defRPr sz="1250">
+                <a:solidFill>
+                  <a:srgbClr val="64748B"/>
+                </a:solidFill>
+              </a:defRPr>
+            </a:pPr>
+            <a:r>
+              <a:t>Replacing stressful waiting rooms with calm, transparent, remote virtual queues — giving customers their time back.</a:t>
+            </a:r>
+          </a:p>
+        </p:txBody>
+      </p:sp>
+      <p:sp>
+        <p:nvSpPr>
+          <p:cNvPr id="7" name="Rounded Rectangle 6"/>
           <p:cNvSpPr/>
           <p:nvPr/>
         </p:nvSpPr>
         <p:spPr>
           <a:xfrm>
-            <a:off x="8046720" y="2103120"/>
-            <a:ext cx="3291840" cy="3931920"/>
+            <a:off x="822960" y="3108960"/>
+            <a:ext cx="3383280" cy="1188720"/>
           </a:xfrm>
           <a:prstGeom prst="roundRect">
             <a:avLst/>
           </a:prstGeom>
           <a:solidFill>
-            <a:srgbClr val="1E293B"/>
+            <a:srgbClr val="1A2538"/>
           </a:solidFill>
           <a:ln w="12700">
             <a:solidFill>
-              <a:srgbClr val="334155"/>
+              <a:srgbClr val="2D3E50"/>
             </a:solidFill>
           </a:ln>
         </p:spPr>
@@ -7521,14 +8970,14 @@
       </p:sp>
       <p:sp>
         <p:nvSpPr>
-          <p:cNvPr id="11" name="TextBox 10"/>
+          <p:cNvPr id="8" name="TextBox 7"/>
           <p:cNvSpPr txBox="1"/>
           <p:nvPr/>
         </p:nvSpPr>
         <p:spPr>
           <a:xfrm>
-            <a:off x="8183880" y="2240280"/>
-            <a:ext cx="3017520" cy="3657600"/>
+            <a:off x="960120" y="3200400"/>
+            <a:ext cx="3108960" cy="1005840"/>
           </a:xfrm>
           <a:prstGeom prst="rect">
             <a:avLst/>
@@ -7541,91 +8990,52 @@
           </a:bodyPr>
           <a:lstStyle/>
           <a:p>
-            <a:pPr>
-              <a:defRPr sz="1400" b="1">
+            <a:pPr algn="ctr">
+              <a:defRPr sz="1250" b="1">
                 <a:solidFill>
                   <a:srgbClr val="FFFFFF"/>
                 </a:solidFill>
               </a:defRPr>
             </a:pPr>
             <a:r>
-              <a:t>🗄️ Data &amp; Audio Engine</a:t>
-            </a:r>
-          </a:p>
-          <a:p>
-            <a:pPr>
-              <a:spcBef>
-                <a:spcPts val="800"/>
-              </a:spcBef>
-              <a:defRPr sz="1100">
-                <a:solidFill>
-                  <a:srgbClr val="94A3B8"/>
-                </a:solidFill>
-              </a:defRPr>
-            </a:pPr>
-            <a:r>
-              <a:t>• MySQL Relational DB</a:t>
-            </a:r>
-            <a:br/>
-            <a:r>
-              <a:t>• InnoDB with Row Locking</a:t>
-            </a:r>
-            <a:br/>
-            <a:r>
-              <a:t>• In-Browser Mock DB Fallback</a:t>
-            </a:r>
-            <a:br/>
-            <a:r>
-              <a:t>• Web Audio API Synthesizer</a:t>
-            </a:r>
-            <a:br/>
-            <a:r>
-              <a:t>• Web Speech Voice Engine</a:t>
-            </a:r>
-            <a:br/>
-            <a:r>
-              <a:t>• HTML5 Canvas QR Generator</a:t>
-            </a:r>
-          </a:p>
-        </p:txBody>
-      </p:sp>
-    </p:spTree>
-  </p:cSld>
-  <p:clrMapOvr>
-    <a:masterClrMapping/>
-  </p:clrMapOvr>
-</p:sld>
-</file>
-
-<file path=ppt/slides/slide8.xml><?xml version="1.0" encoding="utf-8"?>
-<p:sld xmlns:a="http://schemas.openxmlformats.org/drawingml/2006/main" xmlns:p="http://schemas.openxmlformats.org/presentationml/2006/main" xmlns:r="http://schemas.openxmlformats.org/officeDocument/2006/relationships">
-  <p:cSld>
-    <p:spTree>
-      <p:nvGrpSpPr>
-        <p:cNvPr id="1" name=""/>
-        <p:cNvGrpSpPr/>
-        <p:nvPr/>
-      </p:nvGrpSpPr>
-      <p:grpSpPr/>
-      <p:sp>
-        <p:nvSpPr>
-          <p:cNvPr id="2" name="Rectangle 1"/>
+              <a:t>⚛️  Complete Full-Stack</a:t>
+            </a:r>
+          </a:p>
+          <a:p>
+            <a:pPr algn="ctr">
+              <a:defRPr sz="950">
+                <a:solidFill>
+                  <a:srgbClr val="64748B"/>
+                </a:solidFill>
+              </a:defRPr>
+            </a:pPr>
+            <a:r>
+              <a:t>React 19 + Express + MySQL 8</a:t>
+            </a:r>
+          </a:p>
+        </p:txBody>
+      </p:sp>
+      <p:sp>
+        <p:nvSpPr>
+          <p:cNvPr id="9" name="Rounded Rectangle 8"/>
           <p:cNvSpPr/>
           <p:nvPr/>
         </p:nvSpPr>
         <p:spPr>
           <a:xfrm>
-            <a:off x="0" y="0"/>
-            <a:ext cx="12191695" cy="6858000"/>
-          </a:xfrm>
-          <a:prstGeom prst="rect">
+            <a:off x="4389120" y="3108960"/>
+            <a:ext cx="3383280" cy="1188720"/>
+          </a:xfrm>
+          <a:prstGeom prst="roundRect">
             <a:avLst/>
           </a:prstGeom>
           <a:solidFill>
-            <a:srgbClr val="0F172A"/>
+            <a:srgbClr val="1A2538"/>
           </a:solidFill>
-          <a:ln>
-            <a:noFill/>
+          <a:ln w="12700">
+            <a:solidFill>
+              <a:srgbClr val="14B8A6"/>
+            </a:solidFill>
           </a:ln>
         </p:spPr>
         <p:style>
@@ -7652,14 +9062,14 @@
       </p:sp>
       <p:sp>
         <p:nvSpPr>
-          <p:cNvPr id="3" name="TextBox 2"/>
+          <p:cNvPr id="10" name="TextBox 9"/>
           <p:cNvSpPr txBox="1"/>
           <p:nvPr/>
         </p:nvSpPr>
         <p:spPr>
           <a:xfrm>
-            <a:off x="731520" y="548640"/>
-            <a:ext cx="10698480" cy="365760"/>
+            <a:off x="4526280" y="3200400"/>
+            <a:ext cx="3108960" cy="1005840"/>
           </a:xfrm>
           <a:prstGeom prst="rect">
             <a:avLst/>
@@ -7672,109 +9082,51 @@
           </a:bodyPr>
           <a:lstStyle/>
           <a:p>
-            <a:pPr>
-              <a:defRPr sz="1100" b="1">
-                <a:solidFill>
-                  <a:srgbClr val="38BDF8"/>
-                </a:solidFill>
-              </a:defRPr>
-            </a:pPr>
-            <a:r>
-              <a:t>07. APPLICATIONS</a:t>
-            </a:r>
-          </a:p>
-        </p:txBody>
-      </p:sp>
-      <p:sp>
-        <p:nvSpPr>
-          <p:cNvPr id="4" name="TextBox 3"/>
-          <p:cNvSpPr txBox="1"/>
-          <p:nvPr/>
-        </p:nvSpPr>
-        <p:spPr>
-          <a:xfrm>
-            <a:off x="731520" y="822960"/>
-            <a:ext cx="10698480" cy="731520"/>
-          </a:xfrm>
-          <a:prstGeom prst="rect">
-            <a:avLst/>
-          </a:prstGeom>
-          <a:noFill/>
-        </p:spPr>
-        <p:txBody>
-          <a:bodyPr wrap="square">
-            <a:spAutoFit/>
-          </a:bodyPr>
-          <a:lstStyle/>
-          <a:p>
-            <a:pPr>
-              <a:defRPr sz="2600" b="1">
-                <a:solidFill>
-                  <a:srgbClr val="FFFFFF"/>
-                </a:solidFill>
-              </a:defRPr>
-            </a:pPr>
-            <a:r>
-              <a:t>Versatile Industry Deployments</a:t>
-            </a:r>
-          </a:p>
-        </p:txBody>
-      </p:sp>
-      <p:sp>
-        <p:nvSpPr>
-          <p:cNvPr id="5" name="TextBox 4"/>
-          <p:cNvSpPr txBox="1"/>
-          <p:nvPr/>
-        </p:nvSpPr>
-        <p:spPr>
-          <a:xfrm>
-            <a:off x="731520" y="1463040"/>
-            <a:ext cx="10698480" cy="365760"/>
-          </a:xfrm>
-          <a:prstGeom prst="rect">
-            <a:avLst/>
-          </a:prstGeom>
-          <a:noFill/>
-        </p:spPr>
-        <p:txBody>
-          <a:bodyPr wrap="square">
-            <a:spAutoFit/>
-          </a:bodyPr>
-          <a:lstStyle/>
-          <a:p>
-            <a:pPr>
-              <a:defRPr sz="1300">
-                <a:solidFill>
-                  <a:srgbClr val="94A3B8"/>
-                </a:solidFill>
-              </a:defRPr>
-            </a:pPr>
-            <a:r>
-              <a:t>Configurable for diverse high-traffic service environments.</a:t>
-            </a:r>
-          </a:p>
-        </p:txBody>
-      </p:sp>
-      <p:sp>
-        <p:nvSpPr>
-          <p:cNvPr id="6" name="Rounded Rectangle 5"/>
+            <a:pPr algn="ctr">
+              <a:defRPr sz="1250" b="1">
+                <a:solidFill>
+                  <a:srgbClr val="14B8A6"/>
+                </a:solidFill>
+              </a:defRPr>
+            </a:pPr>
+            <a:r>
+              <a:t>🛡️  Zero-Crash Resilience</a:t>
+            </a:r>
+          </a:p>
+          <a:p>
+            <a:pPr algn="ctr">
+              <a:defRPr sz="950">
+                <a:solidFill>
+                  <a:srgbClr val="64748B"/>
+                </a:solidFill>
+              </a:defRPr>
+            </a:pPr>
+            <a:r>
+              <a:t>Auto in-browser DB fallback</a:t>
+            </a:r>
+          </a:p>
+        </p:txBody>
+      </p:sp>
+      <p:sp>
+        <p:nvSpPr>
+          <p:cNvPr id="11" name="Rounded Rectangle 10"/>
           <p:cNvSpPr/>
           <p:nvPr/>
         </p:nvSpPr>
         <p:spPr>
           <a:xfrm>
-            <a:off x="731520" y="2011680"/>
-            <a:ext cx="5120640" cy="1920240"/>
+            <a:off x="7955280" y="3108960"/>
+            <a:ext cx="3383280" cy="1188720"/>
           </a:xfrm>
           <a:prstGeom prst="roundRect">
             <a:avLst/>
           </a:prstGeom>
           <a:solidFill>
-            <a:srgbClr val="1E293B"/>
+            <a:srgbClr val="1A2538"/>
           </a:solidFill>
           <a:ln w="12700">
             <a:solidFill>
-              <a:srgbClr val="334155"/>
+              <a:srgbClr val="2D3E50"/>
             </a:solidFill>
           </a:ln>
         </p:spPr>
@@ -7802,14 +9154,14 @@
       </p:sp>
       <p:sp>
         <p:nvSpPr>
-          <p:cNvPr id="7" name="TextBox 6"/>
+          <p:cNvPr id="12" name="TextBox 11"/>
           <p:cNvSpPr txBox="1"/>
           <p:nvPr/>
         </p:nvSpPr>
         <p:spPr>
           <a:xfrm>
-            <a:off x="868680" y="2148840"/>
-            <a:ext cx="4846320" cy="1645920"/>
+            <a:off x="8092440" y="3200400"/>
+            <a:ext cx="3108960" cy="1005840"/>
           </a:xfrm>
           <a:prstGeom prst="rect">
             <a:avLst/>
@@ -7822,89 +9174,41 @@
           </a:bodyPr>
           <a:lstStyle/>
           <a:p>
-            <a:pPr>
-              <a:defRPr sz="1400" b="1">
+            <a:pPr algn="ctr">
+              <a:defRPr sz="1250" b="1">
                 <a:solidFill>
                   <a:srgbClr val="FFFFFF"/>
                 </a:solidFill>
               </a:defRPr>
             </a:pPr>
             <a:r>
-              <a:t>🏥 Healthcare &amp; Clinics</a:t>
-            </a:r>
-          </a:p>
-          <a:p>
-            <a:pPr>
-              <a:spcBef>
-                <a:spcPts val="800"/>
-              </a:spcBef>
-              <a:defRPr sz="1100">
-                <a:solidFill>
-                  <a:srgbClr val="94A3B8"/>
-                </a:solidFill>
-              </a:defRPr>
-            </a:pPr>
-            <a:r>
-              <a:t>Eliminate crowded waiting rooms to reduce infection risk; triage walk-ins vs specialist appointments.</a:t>
-            </a:r>
-          </a:p>
-        </p:txBody>
-      </p:sp>
-      <p:sp>
-        <p:nvSpPr>
-          <p:cNvPr id="8" name="Rounded Rectangle 7"/>
-          <p:cNvSpPr/>
-          <p:nvPr/>
-        </p:nvSpPr>
-        <p:spPr>
-          <a:xfrm>
-            <a:off x="6217920" y="2011680"/>
-            <a:ext cx="5120640" cy="1920240"/>
-          </a:xfrm>
-          <a:prstGeom prst="roundRect">
-            <a:avLst/>
-          </a:prstGeom>
-          <a:solidFill>
-            <a:srgbClr val="1E293B"/>
-          </a:solidFill>
-          <a:ln w="12700">
-            <a:solidFill>
-              <a:srgbClr val="334155"/>
-            </a:solidFill>
-          </a:ln>
-        </p:spPr>
-        <p:style>
-          <a:lnRef idx="1">
-            <a:schemeClr val="accent1"/>
-          </a:lnRef>
-          <a:fillRef idx="3">
-            <a:schemeClr val="accent1"/>
-          </a:fillRef>
-          <a:effectRef idx="2">
-            <a:schemeClr val="accent1"/>
-          </a:effectRef>
-          <a:fontRef idx="minor">
-            <a:schemeClr val="lt1"/>
-          </a:fontRef>
-        </p:style>
-        <p:txBody>
-          <a:bodyPr rtlCol="0" anchor="ctr"/>
-          <a:lstStyle/>
-          <a:p>
-            <a:pPr algn="ctr"/>
-          </a:p>
-        </p:txBody>
-      </p:sp>
-      <p:sp>
-        <p:nvSpPr>
-          <p:cNvPr id="9" name="TextBox 8"/>
+              <a:t>🔊  Native Browser APIs</a:t>
+            </a:r>
+          </a:p>
+          <a:p>
+            <a:pPr algn="ctr">
+              <a:defRPr sz="950">
+                <a:solidFill>
+                  <a:srgbClr val="64748B"/>
+                </a:solidFill>
+              </a:defRPr>
+            </a:pPr>
+            <a:r>
+              <a:t>Zero external hardware</a:t>
+            </a:r>
+          </a:p>
+        </p:txBody>
+      </p:sp>
+      <p:sp>
+        <p:nvSpPr>
+          <p:cNvPr id="13" name="TextBox 12"/>
           <p:cNvSpPr txBox="1"/>
           <p:nvPr/>
         </p:nvSpPr>
         <p:spPr>
           <a:xfrm>
-            <a:off x="6355080" y="2148840"/>
-            <a:ext cx="4846320" cy="1645920"/>
+            <a:off x="914400" y="4572000"/>
+            <a:ext cx="10360152" cy="457200"/>
           </a:xfrm>
           <a:prstGeom prst="rect">
             <a:avLst/>
@@ -7912,621 +9216,20 @@
           <a:noFill/>
         </p:spPr>
         <p:txBody>
-          <a:bodyPr wrap="square">
+          <a:bodyPr wrap="none">
             <a:spAutoFit/>
           </a:bodyPr>
           <a:lstStyle/>
           <a:p>
-            <a:pPr>
-              <a:defRPr sz="1400" b="1">
-                <a:solidFill>
-                  <a:srgbClr val="FFFFFF"/>
-                </a:solidFill>
-              </a:defRPr>
-            </a:pPr>
-            <a:r>
-              <a:t>🏦 Banking &amp; Financial Desks</a:t>
-            </a:r>
-          </a:p>
-          <a:p>
-            <a:pPr>
-              <a:spcBef>
-                <a:spcPts val="800"/>
-              </a:spcBef>
-              <a:defRPr sz="1100">
-                <a:solidFill>
-                  <a:srgbClr val="94A3B8"/>
-                </a:solidFill>
-              </a:defRPr>
-            </a:pPr>
-            <a:r>
-              <a:t>Segment customer traffic across Cashiers, Loan Desks, and Account Services with counter routing.</a:t>
-            </a:r>
-          </a:p>
-        </p:txBody>
-      </p:sp>
-      <p:sp>
-        <p:nvSpPr>
-          <p:cNvPr id="10" name="Rounded Rectangle 9"/>
-          <p:cNvSpPr/>
-          <p:nvPr/>
-        </p:nvSpPr>
-        <p:spPr>
-          <a:xfrm>
-            <a:off x="731520" y="4206240"/>
-            <a:ext cx="5120640" cy="1920240"/>
-          </a:xfrm>
-          <a:prstGeom prst="roundRect">
-            <a:avLst/>
-          </a:prstGeom>
-          <a:solidFill>
-            <a:srgbClr val="1E293B"/>
-          </a:solidFill>
-          <a:ln w="12700">
-            <a:solidFill>
-              <a:srgbClr val="334155"/>
-            </a:solidFill>
-          </a:ln>
-        </p:spPr>
-        <p:style>
-          <a:lnRef idx="1">
-            <a:schemeClr val="accent1"/>
-          </a:lnRef>
-          <a:fillRef idx="3">
-            <a:schemeClr val="accent1"/>
-          </a:fillRef>
-          <a:effectRef idx="2">
-            <a:schemeClr val="accent1"/>
-          </a:effectRef>
-          <a:fontRef idx="minor">
-            <a:schemeClr val="lt1"/>
-          </a:fontRef>
-        </p:style>
-        <p:txBody>
-          <a:bodyPr rtlCol="0" anchor="ctr"/>
-          <a:lstStyle/>
-          <a:p>
-            <a:pPr algn="ctr"/>
-          </a:p>
-        </p:txBody>
-      </p:sp>
-      <p:sp>
-        <p:nvSpPr>
-          <p:cNvPr id="11" name="TextBox 10"/>
-          <p:cNvSpPr txBox="1"/>
-          <p:nvPr/>
-        </p:nvSpPr>
-        <p:spPr>
-          <a:xfrm>
-            <a:off x="868680" y="4343400"/>
-            <a:ext cx="4846320" cy="1645920"/>
-          </a:xfrm>
-          <a:prstGeom prst="rect">
-            <a:avLst/>
-          </a:prstGeom>
-          <a:noFill/>
-        </p:spPr>
-        <p:txBody>
-          <a:bodyPr wrap="square">
-            <a:spAutoFit/>
-          </a:bodyPr>
-          <a:lstStyle/>
-          <a:p>
-            <a:pPr>
-              <a:defRPr sz="1400" b="1">
-                <a:solidFill>
-                  <a:srgbClr val="FFFFFF"/>
-                </a:solidFill>
-              </a:defRPr>
-            </a:pPr>
-            <a:r>
-              <a:t>💇 Salons, Spas &amp; Wellness</a:t>
-            </a:r>
-          </a:p>
-          <a:p>
-            <a:pPr>
-              <a:spcBef>
-                <a:spcPts val="800"/>
-              </a:spcBef>
-              <a:defRPr sz="1100">
-                <a:solidFill>
-                  <a:srgbClr val="94A3B8"/>
-                </a:solidFill>
-              </a:defRPr>
-            </a:pPr>
-            <a:r>
-              <a:t>Allow clients to wait comfortably in nearby cafes; provide accurate average styling durations.</a:t>
-            </a:r>
-          </a:p>
-        </p:txBody>
-      </p:sp>
-      <p:sp>
-        <p:nvSpPr>
-          <p:cNvPr id="12" name="Rounded Rectangle 11"/>
-          <p:cNvSpPr/>
-          <p:nvPr/>
-        </p:nvSpPr>
-        <p:spPr>
-          <a:xfrm>
-            <a:off x="6217920" y="4206240"/>
-            <a:ext cx="5120640" cy="1920240"/>
-          </a:xfrm>
-          <a:prstGeom prst="roundRect">
-            <a:avLst/>
-          </a:prstGeom>
-          <a:solidFill>
-            <a:srgbClr val="1E293B"/>
-          </a:solidFill>
-          <a:ln w="12700">
-            <a:solidFill>
-              <a:srgbClr val="334155"/>
-            </a:solidFill>
-          </a:ln>
-        </p:spPr>
-        <p:style>
-          <a:lnRef idx="1">
-            <a:schemeClr val="accent1"/>
-          </a:lnRef>
-          <a:fillRef idx="3">
-            <a:schemeClr val="accent1"/>
-          </a:fillRef>
-          <a:effectRef idx="2">
-            <a:schemeClr val="accent1"/>
-          </a:effectRef>
-          <a:fontRef idx="minor">
-            <a:schemeClr val="lt1"/>
-          </a:fontRef>
-        </p:style>
-        <p:txBody>
-          <a:bodyPr rtlCol="0" anchor="ctr"/>
-          <a:lstStyle/>
-          <a:p>
-            <a:pPr algn="ctr"/>
-          </a:p>
-        </p:txBody>
-      </p:sp>
-      <p:sp>
-        <p:nvSpPr>
-          <p:cNvPr id="13" name="TextBox 12"/>
-          <p:cNvSpPr txBox="1"/>
-          <p:nvPr/>
-        </p:nvSpPr>
-        <p:spPr>
-          <a:xfrm>
-            <a:off x="6355080" y="4343400"/>
-            <a:ext cx="4846320" cy="1645920"/>
-          </a:xfrm>
-          <a:prstGeom prst="rect">
-            <a:avLst/>
-          </a:prstGeom>
-          <a:noFill/>
-        </p:spPr>
-        <p:txBody>
-          <a:bodyPr wrap="square">
-            <a:spAutoFit/>
-          </a:bodyPr>
-          <a:lstStyle/>
-          <a:p>
-            <a:pPr>
-              <a:defRPr sz="1400" b="1">
-                <a:solidFill>
-                  <a:srgbClr val="FFFFFF"/>
-                </a:solidFill>
-              </a:defRPr>
-            </a:pPr>
-            <a:r>
-              <a:t>🏛️ Government &amp; Public Offices</a:t>
-            </a:r>
-          </a:p>
-          <a:p>
-            <a:pPr>
-              <a:spcBef>
-                <a:spcPts val="800"/>
-              </a:spcBef>
-              <a:defRPr sz="1100">
-                <a:solidFill>
-                  <a:srgbClr val="94A3B8"/>
-                </a:solidFill>
-              </a:defRPr>
-            </a:pPr>
-            <a:r>
-              <a:t>Eliminate physical queues with high-volume lobby TV displays and loud synthetic voice announcements.</a:t>
-            </a:r>
-          </a:p>
-        </p:txBody>
-      </p:sp>
-    </p:spTree>
-  </p:cSld>
-  <p:clrMapOvr>
-    <a:masterClrMapping/>
-  </p:clrMapOvr>
-</p:sld>
-</file>
-
-<file path=ppt/slides/slide9.xml><?xml version="1.0" encoding="utf-8"?>
-<p:sld xmlns:a="http://schemas.openxmlformats.org/drawingml/2006/main" xmlns:p="http://schemas.openxmlformats.org/presentationml/2006/main" xmlns:r="http://schemas.openxmlformats.org/officeDocument/2006/relationships">
-  <p:cSld>
-    <p:spTree>
-      <p:nvGrpSpPr>
-        <p:cNvPr id="1" name=""/>
-        <p:cNvGrpSpPr/>
-        <p:nvPr/>
-      </p:nvGrpSpPr>
-      <p:grpSpPr/>
-      <p:sp>
-        <p:nvSpPr>
-          <p:cNvPr id="2" name="Rectangle 1"/>
-          <p:cNvSpPr/>
-          <p:nvPr/>
-        </p:nvSpPr>
-        <p:spPr>
-          <a:xfrm>
-            <a:off x="0" y="0"/>
-            <a:ext cx="12191695" cy="6858000"/>
-          </a:xfrm>
-          <a:prstGeom prst="rect">
-            <a:avLst/>
-          </a:prstGeom>
-          <a:solidFill>
-            <a:srgbClr val="0F172A"/>
-          </a:solidFill>
-          <a:ln>
-            <a:noFill/>
-          </a:ln>
-        </p:spPr>
-        <p:style>
-          <a:lnRef idx="1">
-            <a:schemeClr val="accent1"/>
-          </a:lnRef>
-          <a:fillRef idx="3">
-            <a:schemeClr val="accent1"/>
-          </a:fillRef>
-          <a:effectRef idx="2">
-            <a:schemeClr val="accent1"/>
-          </a:effectRef>
-          <a:fontRef idx="minor">
-            <a:schemeClr val="lt1"/>
-          </a:fontRef>
-        </p:style>
-        <p:txBody>
-          <a:bodyPr rtlCol="0" anchor="ctr"/>
-          <a:lstStyle/>
-          <a:p>
-            <a:pPr algn="ctr"/>
-          </a:p>
-        </p:txBody>
-      </p:sp>
-      <p:sp>
-        <p:nvSpPr>
-          <p:cNvPr id="3" name="TextBox 2"/>
-          <p:cNvSpPr txBox="1"/>
-          <p:nvPr/>
-        </p:nvSpPr>
-        <p:spPr>
-          <a:xfrm>
-            <a:off x="731520" y="548640"/>
-            <a:ext cx="10698480" cy="365760"/>
-          </a:xfrm>
-          <a:prstGeom prst="rect">
-            <a:avLst/>
-          </a:prstGeom>
-          <a:noFill/>
-        </p:spPr>
-        <p:txBody>
-          <a:bodyPr wrap="square">
-            <a:spAutoFit/>
-          </a:bodyPr>
-          <a:lstStyle/>
-          <a:p>
-            <a:pPr>
-              <a:defRPr sz="1100" b="1">
+            <a:pPr algn="ctr">
+              <a:defRPr sz="1500" b="1">
                 <a:solidFill>
                   <a:srgbClr val="38BDF8"/>
                 </a:solidFill>
               </a:defRPr>
             </a:pPr>
             <a:r>
-              <a:t>08. IMPACT &amp; ROI</a:t>
-            </a:r>
-          </a:p>
-        </p:txBody>
-      </p:sp>
-      <p:sp>
-        <p:nvSpPr>
-          <p:cNvPr id="4" name="TextBox 3"/>
-          <p:cNvSpPr txBox="1"/>
-          <p:nvPr/>
-        </p:nvSpPr>
-        <p:spPr>
-          <a:xfrm>
-            <a:off x="731520" y="822960"/>
-            <a:ext cx="10698480" cy="731520"/>
-          </a:xfrm>
-          <a:prstGeom prst="rect">
-            <a:avLst/>
-          </a:prstGeom>
-          <a:noFill/>
-        </p:spPr>
-        <p:txBody>
-          <a:bodyPr wrap="square">
-            <a:spAutoFit/>
-          </a:bodyPr>
-          <a:lstStyle/>
-          <a:p>
-            <a:pPr>
-              <a:defRPr sz="2600" b="1">
-                <a:solidFill>
-                  <a:srgbClr val="FFFFFF"/>
-                </a:solidFill>
-              </a:defRPr>
-            </a:pPr>
-            <a:r>
-              <a:t>Measurable Business &amp; Customer Value</a:t>
-            </a:r>
-          </a:p>
-        </p:txBody>
-      </p:sp>
-      <p:sp>
-        <p:nvSpPr>
-          <p:cNvPr id="5" name="TextBox 4"/>
-          <p:cNvSpPr txBox="1"/>
-          <p:nvPr/>
-        </p:nvSpPr>
-        <p:spPr>
-          <a:xfrm>
-            <a:off x="731520" y="1463040"/>
-            <a:ext cx="10698480" cy="365760"/>
-          </a:xfrm>
-          <a:prstGeom prst="rect">
-            <a:avLst/>
-          </a:prstGeom>
-          <a:noFill/>
-        </p:spPr>
-        <p:txBody>
-          <a:bodyPr wrap="square">
-            <a:spAutoFit/>
-          </a:bodyPr>
-          <a:lstStyle/>
-          <a:p>
-            <a:pPr>
-              <a:defRPr sz="1300">
-                <a:solidFill>
-                  <a:srgbClr val="94A3B8"/>
-                </a:solidFill>
-              </a:defRPr>
-            </a:pPr>
-            <a:r>
-              <a:t>Clear advantages delivered to both customers and service providers.</a:t>
-            </a:r>
-          </a:p>
-        </p:txBody>
-      </p:sp>
-      <p:sp>
-        <p:nvSpPr>
-          <p:cNvPr id="6" name="Rounded Rectangle 5"/>
-          <p:cNvSpPr/>
-          <p:nvPr/>
-        </p:nvSpPr>
-        <p:spPr>
-          <a:xfrm>
-            <a:off x="731520" y="2103120"/>
-            <a:ext cx="5120640" cy="3931920"/>
-          </a:xfrm>
-          <a:prstGeom prst="roundRect">
-            <a:avLst/>
-          </a:prstGeom>
-          <a:solidFill>
-            <a:srgbClr val="1E293B"/>
-          </a:solidFill>
-          <a:ln w="12700">
-            <a:solidFill>
-              <a:srgbClr val="334155"/>
-            </a:solidFill>
-          </a:ln>
-        </p:spPr>
-        <p:style>
-          <a:lnRef idx="1">
-            <a:schemeClr val="accent1"/>
-          </a:lnRef>
-          <a:fillRef idx="3">
-            <a:schemeClr val="accent1"/>
-          </a:fillRef>
-          <a:effectRef idx="2">
-            <a:schemeClr val="accent1"/>
-          </a:effectRef>
-          <a:fontRef idx="minor">
-            <a:schemeClr val="lt1"/>
-          </a:fontRef>
-        </p:style>
-        <p:txBody>
-          <a:bodyPr rtlCol="0" anchor="ctr"/>
-          <a:lstStyle/>
-          <a:p>
-            <a:pPr algn="ctr"/>
-          </a:p>
-        </p:txBody>
-      </p:sp>
-      <p:sp>
-        <p:nvSpPr>
-          <p:cNvPr id="7" name="TextBox 6"/>
-          <p:cNvSpPr txBox="1"/>
-          <p:nvPr/>
-        </p:nvSpPr>
-        <p:spPr>
-          <a:xfrm>
-            <a:off x="868680" y="2240280"/>
-            <a:ext cx="4846320" cy="3657600"/>
-          </a:xfrm>
-          <a:prstGeom prst="rect">
-            <a:avLst/>
-          </a:prstGeom>
-          <a:noFill/>
-        </p:spPr>
-        <p:txBody>
-          <a:bodyPr wrap="square">
-            <a:spAutoFit/>
-          </a:bodyPr>
-          <a:lstStyle/>
-          <a:p>
-            <a:pPr>
-              <a:defRPr sz="1400" b="1">
-                <a:solidFill>
-                  <a:srgbClr val="FFFFFF"/>
-                </a:solidFill>
-              </a:defRPr>
-            </a:pPr>
-            <a:r>
-              <a:t>👤 For Customers</a:t>
-            </a:r>
-          </a:p>
-          <a:p>
-            <a:pPr>
-              <a:spcBef>
-                <a:spcPts val="800"/>
-              </a:spcBef>
-              <a:defRPr sz="1100">
-                <a:solidFill>
-                  <a:srgbClr val="94A3B8"/>
-                </a:solidFill>
-              </a:defRPr>
-            </a:pPr>
-            <a:r>
-              <a:t>⏱️  60%+ reduction in perceived wait time</a:t>
-            </a:r>
-            <a:br/>
-            <a:br/>
-            <a:r>
-              <a:t>🚶  Freedom to wait anywhere (cafe, car, home)</a:t>
-            </a:r>
-            <a:br/>
-            <a:br/>
-            <a:r>
-              <a:t>🔔  Proactive status alerts ('2 people ahead')</a:t>
-            </a:r>
-            <a:br/>
-            <a:br/>
-            <a:r>
-              <a:t>📱  Zero app install needed (runs on any browser)</a:t>
-            </a:r>
-            <a:br/>
-            <a:br/>
-            <a:r>
-              <a:t>🎫  Instant digital QR verification token pass</a:t>
-            </a:r>
-          </a:p>
-        </p:txBody>
-      </p:sp>
-      <p:sp>
-        <p:nvSpPr>
-          <p:cNvPr id="8" name="Rounded Rectangle 7"/>
-          <p:cNvSpPr/>
-          <p:nvPr/>
-        </p:nvSpPr>
-        <p:spPr>
-          <a:xfrm>
-            <a:off x="6217920" y="2103120"/>
-            <a:ext cx="5120640" cy="3931920"/>
-          </a:xfrm>
-          <a:prstGeom prst="roundRect">
-            <a:avLst/>
-          </a:prstGeom>
-          <a:solidFill>
-            <a:srgbClr val="1E293B"/>
-          </a:solidFill>
-          <a:ln w="12700">
-            <a:solidFill>
-              <a:srgbClr val="334155"/>
-            </a:solidFill>
-          </a:ln>
-        </p:spPr>
-        <p:style>
-          <a:lnRef idx="1">
-            <a:schemeClr val="accent1"/>
-          </a:lnRef>
-          <a:fillRef idx="3">
-            <a:schemeClr val="accent1"/>
-          </a:fillRef>
-          <a:effectRef idx="2">
-            <a:schemeClr val="accent1"/>
-          </a:effectRef>
-          <a:fontRef idx="minor">
-            <a:schemeClr val="lt1"/>
-          </a:fontRef>
-        </p:style>
-        <p:txBody>
-          <a:bodyPr rtlCol="0" anchor="ctr"/>
-          <a:lstStyle/>
-          <a:p>
-            <a:pPr algn="ctr"/>
-          </a:p>
-        </p:txBody>
-      </p:sp>
-      <p:sp>
-        <p:nvSpPr>
-          <p:cNvPr id="9" name="TextBox 8"/>
-          <p:cNvSpPr txBox="1"/>
-          <p:nvPr/>
-        </p:nvSpPr>
-        <p:spPr>
-          <a:xfrm>
-            <a:off x="6355080" y="2240280"/>
-            <a:ext cx="4846320" cy="3657600"/>
-          </a:xfrm>
-          <a:prstGeom prst="rect">
-            <a:avLst/>
-          </a:prstGeom>
-          <a:noFill/>
-        </p:spPr>
-        <p:txBody>
-          <a:bodyPr wrap="square">
-            <a:spAutoFit/>
-          </a:bodyPr>
-          <a:lstStyle/>
-          <a:p>
-            <a:pPr>
-              <a:defRPr sz="1400" b="1">
-                <a:solidFill>
-                  <a:srgbClr val="FFFFFF"/>
-                </a:solidFill>
-              </a:defRPr>
-            </a:pPr>
-            <a:r>
-              <a:t>🏢 For Businesses</a:t>
-            </a:r>
-          </a:p>
-          <a:p>
-            <a:pPr>
-              <a:spcBef>
-                <a:spcPts val="800"/>
-              </a:spcBef>
-              <a:defRPr sz="1100">
-                <a:solidFill>
-                  <a:srgbClr val="94A3B8"/>
-                </a:solidFill>
-              </a:defRPr>
-            </a:pPr>
-            <a:r>
-              <a:t>📈  35%+ increase in daily counter throughput</a:t>
-            </a:r>
-            <a:br/>
-            <a:br/>
-            <a:r>
-              <a:t>📉  Zero waiting room congestion &amp; less stress</a:t>
-            </a:r>
-            <a:br/>
-            <a:br/>
-            <a:r>
-              <a:t>📊  Actionable historical logs &amp; CSV export</a:t>
-            </a:r>
-            <a:br/>
-            <a:br/>
-            <a:r>
-              <a:t>💰  Zero specialized hardware (uses standard TVs)</a:t>
-            </a:r>
-            <a:br/>
-            <a:br/>
-            <a:r>
-              <a:t>⚙️  Fast 1-click counter calling &amp; walk-in entry</a:t>
+              <a:t>Thank you — Open for Questions &amp; Live Demo  🚀</a:t>
             </a:r>
           </a:p>
         </p:txBody>
